--- a/presentation/ORBIT.pptx
+++ b/presentation/ORBIT.pptx
@@ -7,6 +7,7 @@
   <p:sldIdLst>
     <p:sldId id="256" r:id="rId7"/>
     <p:sldId id="257" r:id="rId8"/>
+    <p:sldId id="274" r:id="rId25"/>
     <p:sldId id="258" r:id="rId9"/>
     <p:sldId id="259" r:id="rId10"/>
     <p:sldId id="260" r:id="rId11"/>
@@ -3857,7 +3858,7 @@
                 </a:solidFill>
                 <a:latin typeface="Courier New"/>
               </a:rPr>
-              <a:t>thoughts/shared/research/</a:t>
+              <a:t>thoughts/shared/facts/</a:t>
             </a:r>
           </a:p>
         </p:txBody>
@@ -4049,7 +4050,7 @@
                 </a:solidFill>
                 <a:latin typeface="Courier New"/>
               </a:rPr>
-              <a:t>research/</a:t>
+              <a:t>facts/</a:t>
             </a:r>
           </a:p>
         </p:txBody>
@@ -4362,7 +4363,7 @@
                 </a:solidFill>
                 <a:latin typeface="Arial"/>
               </a:rPr>
-              <a:t>10</a:t>
+              <a:t>11</a:t>
             </a:r>
           </a:p>
         </p:txBody>
@@ -5491,7 +5492,7 @@
                 </a:solidFill>
                 <a:latin typeface="Arial"/>
               </a:rPr>
-              <a:t>11</a:t>
+              <a:t>12</a:t>
             </a:r>
           </a:p>
         </p:txBody>
@@ -6059,7 +6060,7 @@
                 </a:solidFill>
                 <a:latin typeface="Arial"/>
               </a:rPr>
-              <a:t>12</a:t>
+              <a:t>13</a:t>
             </a:r>
           </a:p>
         </p:txBody>
@@ -6691,7 +6692,7 @@
                 </a:solidFill>
                 <a:latin typeface="Arial"/>
               </a:rPr>
-              <a:t>13</a:t>
+              <a:t>14</a:t>
             </a:r>
           </a:p>
         </p:txBody>
@@ -6895,7 +6896,7 @@
                 </a:solidFill>
                 <a:latin typeface="Courier New"/>
               </a:rPr>
-              <a:t>/researcher</a:t>
+              <a:t>/fact-finder</a:t>
             </a:r>
             <a:r>
               <a:rPr sz="1200" b="0" i="0">
@@ -7671,7 +7672,7 @@
                 </a:solidFill>
                 <a:latin typeface="Arial"/>
               </a:rPr>
-              <a:t>14</a:t>
+              <a:t>15</a:t>
             </a:r>
           </a:p>
         </p:txBody>
@@ -8623,7 +8624,7 @@
                 </a:solidFill>
                 <a:latin typeface="Arial"/>
               </a:rPr>
-              <a:t>15</a:t>
+              <a:t>16</a:t>
             </a:r>
           </a:p>
         </p:txBody>
@@ -9423,7 +9424,7 @@
                 </a:solidFill>
                 <a:latin typeface="Arial"/>
               </a:rPr>
-              <a:t>16</a:t>
+              <a:t>17</a:t>
             </a:r>
           </a:p>
         </p:txBody>
@@ -10008,7 +10009,7 @@
                 </a:solidFill>
                 <a:latin typeface="Courier New"/>
               </a:rPr>
-              <a:t>/researcher QA</a:t>
+              <a:t>/fact-finder QA</a:t>
             </a:r>
           </a:p>
         </p:txBody>
@@ -10584,7 +10585,7 @@
                 </a:solidFill>
                 <a:latin typeface="Arial"/>
               </a:rPr>
-              <a:t>17</a:t>
+              <a:t>18</a:t>
             </a:r>
           </a:p>
         </p:txBody>
@@ -10860,7 +10861,7 @@
                 </a:solidFill>
                 <a:latin typeface="Courier New"/>
               </a:rPr>
-              <a:t>research/</a:t>
+              <a:t>facts/</a:t>
             </a:r>
             <a:r>
               <a:rPr sz="1150" b="0" i="0">
@@ -11254,7 +11255,7 @@
                 </a:solidFill>
                 <a:latin typeface="Arial"/>
               </a:rPr>
-              <a:t>18</a:t>
+              <a:t>19</a:t>
             </a:r>
           </a:p>
         </p:txBody>
@@ -11262,6 +11263,1367 @@
       <p:pic>
         <p:nvPicPr>
           <p:cNvPr id="15" name="Picture 14" descr="vier-logo-dark.png"/>
+          <p:cNvPicPr>
+            <a:picLocks noChangeAspect="1"/>
+          </p:cNvPicPr>
+          <p:nvPr/>
+        </p:nvPicPr>
+        <p:blipFill>
+          <a:blip r:embed="rId2"/>
+          <a:stretch>
+            <a:fillRect/>
+          </a:stretch>
+        </p:blipFill>
+        <p:spPr>
+          <a:xfrm>
+            <a:off x="10911535" y="6400800"/>
+            <a:ext cx="777240" cy="297864"/>
+          </a:xfrm>
+          <a:prstGeom prst="rect">
+            <a:avLst/>
+          </a:prstGeom>
+        </p:spPr>
+      </p:pic>
+    </p:spTree>
+  </p:cSld>
+  <p:clrMapOvr>
+    <a:masterClrMapping/>
+  </p:clrMapOvr>
+</p:sld>
+</file>
+
+<file path=ppt/slides/slide19.xml><?xml version="1.0" encoding="utf-8"?>
+<p:sld xmlns:a="http://schemas.openxmlformats.org/drawingml/2006/main" xmlns:p="http://schemas.openxmlformats.org/presentationml/2006/main" xmlns:r="http://schemas.openxmlformats.org/officeDocument/2006/relationships">
+  <p:cSld>
+    <p:spTree>
+      <p:nvGrpSpPr>
+        <p:cNvPr id="1" name=""/>
+        <p:cNvGrpSpPr/>
+        <p:nvPr/>
+      </p:nvGrpSpPr>
+      <p:grpSpPr/>
+      <p:sp>
+        <p:nvSpPr>
+          <p:cNvPr id="2" name="TextBox"/>
+          <p:cNvSpPr txBox="1"/>
+          <p:nvPr/>
+        </p:nvSpPr>
+        <p:spPr>
+          <a:xfrm>
+            <a:off x="502920" y="365760"/>
+            <a:ext cx="11155680" cy="274320"/>
+          </a:xfrm>
+          <a:prstGeom prst="rect">
+            <a:avLst/>
+          </a:prstGeom>
+          <a:noFill/>
+        </p:spPr>
+        <p:txBody>
+          <a:bodyPr wrap="square" lIns="0" rIns="0" tIns="0" bIns="0" anchor="t">
+            <a:spAutoFit/>
+          </a:bodyPr>
+          <a:lstStyle/>
+          <a:p>
+            <a:pPr algn="l">
+              <a:spcAft>
+                <a:spcPts val="0"/>
+              </a:spcAft>
+            </a:pPr>
+            <a:r>
+              <a:rPr sz="1100" b="1" i="0" spc="240">
+                <a:solidFill>
+                  <a:srgbClr val="FF3C00"/>
+                </a:solidFill>
+                <a:latin typeface="Arial"/>
+              </a:rPr>
+              <a:t xml:space="preserve">DER KERN</a:t>
+            </a:r>
+          </a:p>
+        </p:txBody>
+      </p:sp>
+      <p:sp>
+        <p:nvSpPr>
+          <p:cNvPr id="3" name="TextBox"/>
+          <p:cNvSpPr txBox="1"/>
+          <p:nvPr/>
+        </p:nvSpPr>
+        <p:spPr>
+          <a:xfrm>
+            <a:off x="502920" y="667512"/>
+            <a:ext cx="11155680" cy="566928"/>
+          </a:xfrm>
+          <a:prstGeom prst="rect">
+            <a:avLst/>
+          </a:prstGeom>
+          <a:noFill/>
+        </p:spPr>
+        <p:txBody>
+          <a:bodyPr wrap="square" lIns="0" rIns="0" tIns="0" bIns="0" anchor="t">
+            <a:spAutoFit/>
+          </a:bodyPr>
+          <a:lstStyle/>
+          <a:p>
+            <a:pPr algn="l">
+              <a:lnSpc>
+                <a:spcPct val="102000"/>
+              </a:lnSpc>
+              <a:spcAft>
+                <a:spcPts val="0"/>
+              </a:spcAft>
+            </a:pPr>
+            <a:r>
+              <a:rPr sz="3000" b="1" i="0">
+                <a:solidFill>
+                  <a:srgbClr val="141414"/>
+                </a:solidFill>
+                <a:latin typeface="Arial"/>
+              </a:rPr>
+              <a:t xml:space="preserve">Ziel — Ist — Plan: der Kern jeder Änderung</a:t>
+            </a:r>
+          </a:p>
+        </p:txBody>
+      </p:sp>
+      <p:sp>
+        <p:nvSpPr>
+          <p:cNvPr id="4" name="Rule"/>
+          <p:cNvSpPr/>
+          <p:nvPr/>
+        </p:nvSpPr>
+        <p:spPr>
+          <a:xfrm>
+            <a:off x="502920" y="1216152"/>
+            <a:ext cx="1051560" cy="45720"/>
+          </a:xfrm>
+          <a:prstGeom prst="rect">
+            <a:avLst/>
+          </a:prstGeom>
+          <a:solidFill>
+            <a:srgbClr val="FF3C00"/>
+          </a:solidFill>
+          <a:ln>
+            <a:noFill/>
+          </a:ln>
+          <a:effectLst/>
+        </p:spPr>
+        <p:txBody>
+          <a:bodyPr rtlCol="0" anchor="ctr" wrap="square" lIns="0" rIns="0" tIns="0" bIns="0"/>
+          <a:lstStyle/>
+          <a:p>
+            <a:pPr algn="ctr"/>
+          </a:p>
+        </p:txBody>
+      </p:sp>
+      <p:sp>
+        <p:nvSpPr>
+          <p:cNvPr id="5" name="TextBox"/>
+          <p:cNvSpPr txBox="1"/>
+          <p:nvPr/>
+        </p:nvSpPr>
+        <p:spPr>
+          <a:xfrm>
+            <a:off x="502920" y="1481328"/>
+            <a:ext cx="10600000" cy="560000"/>
+          </a:xfrm>
+          <a:prstGeom prst="rect">
+            <a:avLst/>
+          </a:prstGeom>
+          <a:noFill/>
+        </p:spPr>
+        <p:txBody>
+          <a:bodyPr wrap="square" lIns="0" rIns="0" tIns="0" bIns="0" anchor="t">
+            <a:spAutoFit/>
+          </a:bodyPr>
+          <a:lstStyle/>
+          <a:p>
+            <a:pPr algn="l">
+              <a:lnSpc>
+                <a:spcPct val="130000"/>
+              </a:lnSpc>
+              <a:spcAft>
+                <a:spcPts val="0"/>
+              </a:spcAft>
+            </a:pPr>
+            <a:r>
+              <a:rPr sz="1200" b="0" i="0">
+                <a:solidFill>
+                  <a:srgbClr val="5C5C5C"/>
+                </a:solidFill>
+                <a:latin typeface="Arial"/>
+              </a:rPr>
+              <a:t xml:space="preserve">Jede Code-Änderung folgt demselben Muster — erst drei Schritte, dann die Umsetzung. Nur die Tiefe variiert: ob Greenfield, Brownfield oder kleiner Bugfix.</a:t>
+            </a:r>
+          </a:p>
+        </p:txBody>
+      </p:sp>
+      <p:sp>
+        <p:nvSpPr>
+          <p:cNvPr id="6" name="ZoneLabel"/>
+          <p:cNvSpPr/>
+          <p:nvPr/>
+        </p:nvSpPr>
+        <p:spPr>
+          <a:xfrm>
+            <a:off x="502920" y="2057400"/>
+            <a:ext cx="2057400" cy="274320"/>
+          </a:xfrm>
+          <a:prstGeom prst="rect">
+            <a:avLst/>
+          </a:prstGeom>
+          <a:solidFill>
+            <a:srgbClr val="FF3C00"/>
+          </a:solidFill>
+          <a:ln>
+            <a:noFill/>
+          </a:ln>
+          <a:effectLst/>
+        </p:spPr>
+        <p:txBody>
+          <a:bodyPr rtlCol="0" anchor="ctr" wrap="square" lIns="0" rIns="0" tIns="0" bIns="0"/>
+          <a:lstStyle/>
+          <a:p>
+            <a:pPr algn="ctr"/>
+          </a:p>
+        </p:txBody>
+      </p:sp>
+      <p:sp>
+        <p:nvSpPr>
+          <p:cNvPr id="7" name="TextBox"/>
+          <p:cNvSpPr txBox="1"/>
+          <p:nvPr/>
+        </p:nvSpPr>
+        <p:spPr>
+          <a:xfrm>
+            <a:off x="502920" y="2057400"/>
+            <a:ext cx="2057400" cy="274320"/>
+          </a:xfrm>
+          <a:prstGeom prst="rect">
+            <a:avLst/>
+          </a:prstGeom>
+          <a:noFill/>
+        </p:spPr>
+        <p:txBody>
+          <a:bodyPr wrap="square" lIns="0" rIns="0" tIns="0" bIns="0" anchor="ctr">
+            <a:spAutoFit/>
+          </a:bodyPr>
+          <a:lstStyle/>
+          <a:p>
+            <a:pPr algn="ctr">
+              <a:spcAft>
+                <a:spcPts val="0"/>
+              </a:spcAft>
+            </a:pPr>
+            <a:r>
+              <a:rPr sz="950" b="1" i="0" spc="120">
+                <a:solidFill>
+                  <a:srgbClr val="FFFFFF"/>
+                </a:solidFill>
+                <a:latin typeface="Arial"/>
+              </a:rPr>
+              <a:t xml:space="preserve">DAS UNIVERSELLE MUSTER</a:t>
+            </a:r>
+          </a:p>
+        </p:txBody>
+      </p:sp>
+      <p:sp>
+        <p:nvSpPr>
+          <p:cNvPr id="8" name="NumBadge"/>
+          <p:cNvSpPr/>
+          <p:nvPr/>
+        </p:nvSpPr>
+        <p:spPr>
+          <a:xfrm>
+            <a:off x="502920" y="2500000"/>
+            <a:ext cx="380000" cy="380000"/>
+          </a:xfrm>
+          <a:prstGeom prst="rect">
+            <a:avLst/>
+          </a:prstGeom>
+          <a:solidFill>
+            <a:srgbClr val="FF3C00"/>
+          </a:solidFill>
+          <a:ln>
+            <a:noFill/>
+          </a:ln>
+          <a:effectLst/>
+        </p:spPr>
+        <p:txBody>
+          <a:bodyPr rtlCol="0" anchor="ctr" wrap="square" lIns="0" rIns="0" tIns="0" bIns="0"/>
+          <a:lstStyle/>
+          <a:p>
+            <a:pPr algn="ctr"/>
+          </a:p>
+        </p:txBody>
+      </p:sp>
+      <p:sp>
+        <p:nvSpPr>
+          <p:cNvPr id="9" name="TextBox"/>
+          <p:cNvSpPr txBox="1"/>
+          <p:nvPr/>
+        </p:nvSpPr>
+        <p:spPr>
+          <a:xfrm>
+            <a:off x="502920" y="2500000"/>
+            <a:ext cx="380000" cy="380000"/>
+          </a:xfrm>
+          <a:prstGeom prst="rect">
+            <a:avLst/>
+          </a:prstGeom>
+          <a:noFill/>
+        </p:spPr>
+        <p:txBody>
+          <a:bodyPr wrap="square" lIns="0" rIns="0" tIns="0" bIns="0" anchor="ctr"/>
+          <a:lstStyle/>
+          <a:p>
+            <a:pPr algn="ctr">
+              <a:spcAft>
+                <a:spcPts val="0"/>
+              </a:spcAft>
+            </a:pPr>
+            <a:r>
+              <a:rPr sz="1400" b="1" i="0">
+                <a:solidFill>
+                  <a:srgbClr val="FFFFFF"/>
+                </a:solidFill>
+                <a:latin typeface="Arial"/>
+              </a:rPr>
+              <a:t xml:space="preserve">1</a:t>
+            </a:r>
+          </a:p>
+        </p:txBody>
+      </p:sp>
+      <p:sp>
+        <p:nvSpPr>
+          <p:cNvPr id="10" name="TextBox"/>
+          <p:cNvSpPr txBox="1"/>
+          <p:nvPr/>
+        </p:nvSpPr>
+        <p:spPr>
+          <a:xfrm>
+            <a:off x="1022920" y="2480000"/>
+            <a:ext cx="4230000" cy="760000"/>
+          </a:xfrm>
+          <a:prstGeom prst="rect">
+            <a:avLst/>
+          </a:prstGeom>
+          <a:noFill/>
+        </p:spPr>
+        <p:txBody>
+          <a:bodyPr wrap="square" lIns="0" rIns="0" tIns="0" bIns="0" anchor="t">
+            <a:spAutoFit/>
+          </a:bodyPr>
+          <a:lstStyle/>
+          <a:p>
+            <a:pPr algn="l">
+              <a:lnSpc>
+                <a:spcPct val="118000"/>
+              </a:lnSpc>
+              <a:spcAft>
+                <a:spcPts val="0"/>
+              </a:spcAft>
+            </a:pPr>
+            <a:r>
+              <a:rPr sz="1200" b="1" i="0">
+                <a:solidFill>
+                  <a:srgbClr val="141414"/>
+                </a:solidFill>
+                <a:latin typeface="Arial"/>
+              </a:rPr>
+              <a:t xml:space="preserve">ZIEL — Spezifikation</a:t>
+            </a:r>
+          </a:p>
+          <a:p>
+            <a:pPr algn="l">
+              <a:lnSpc>
+                <a:spcPct val="118000"/>
+              </a:lnSpc>
+              <a:spcAft>
+                <a:spcPts val="0"/>
+              </a:spcAft>
+            </a:pPr>
+            <a:r>
+              <a:rPr sz="1000" b="0" i="0">
+                <a:solidFill>
+                  <a:srgbClr val="5C5C5C"/>
+                </a:solidFill>
+                <a:latin typeface="Arial"/>
+              </a:rPr>
+              <a:t xml:space="preserve">Was will ich erreichen? Bei trivialen Zielen (z. B. rename a → b) optional.</a:t>
+            </a:r>
+          </a:p>
+        </p:txBody>
+      </p:sp>
+      <p:sp>
+        <p:nvSpPr>
+          <p:cNvPr id="11" name="NumBadge"/>
+          <p:cNvSpPr/>
+          <p:nvPr/>
+        </p:nvSpPr>
+        <p:spPr>
+          <a:xfrm>
+            <a:off x="502920" y="3300000"/>
+            <a:ext cx="380000" cy="380000"/>
+          </a:xfrm>
+          <a:prstGeom prst="rect">
+            <a:avLst/>
+          </a:prstGeom>
+          <a:solidFill>
+            <a:srgbClr val="FF3C00"/>
+          </a:solidFill>
+          <a:ln>
+            <a:noFill/>
+          </a:ln>
+          <a:effectLst/>
+        </p:spPr>
+        <p:txBody>
+          <a:bodyPr rtlCol="0" anchor="ctr" wrap="square" lIns="0" rIns="0" tIns="0" bIns="0"/>
+          <a:lstStyle/>
+          <a:p>
+            <a:pPr algn="ctr"/>
+          </a:p>
+        </p:txBody>
+      </p:sp>
+      <p:sp>
+        <p:nvSpPr>
+          <p:cNvPr id="12" name="TextBox"/>
+          <p:cNvSpPr txBox="1"/>
+          <p:nvPr/>
+        </p:nvSpPr>
+        <p:spPr>
+          <a:xfrm>
+            <a:off x="502920" y="3300000"/>
+            <a:ext cx="380000" cy="380000"/>
+          </a:xfrm>
+          <a:prstGeom prst="rect">
+            <a:avLst/>
+          </a:prstGeom>
+          <a:noFill/>
+        </p:spPr>
+        <p:txBody>
+          <a:bodyPr wrap="square" lIns="0" rIns="0" tIns="0" bIns="0" anchor="ctr"/>
+          <a:lstStyle/>
+          <a:p>
+            <a:pPr algn="ctr">
+              <a:spcAft>
+                <a:spcPts val="0"/>
+              </a:spcAft>
+            </a:pPr>
+            <a:r>
+              <a:rPr sz="1400" b="1" i="0">
+                <a:solidFill>
+                  <a:srgbClr val="FFFFFF"/>
+                </a:solidFill>
+                <a:latin typeface="Arial"/>
+              </a:rPr>
+              <a:t xml:space="preserve">2</a:t>
+            </a:r>
+          </a:p>
+        </p:txBody>
+      </p:sp>
+      <p:sp>
+        <p:nvSpPr>
+          <p:cNvPr id="13" name="TextBox"/>
+          <p:cNvSpPr txBox="1"/>
+          <p:nvPr/>
+        </p:nvSpPr>
+        <p:spPr>
+          <a:xfrm>
+            <a:off x="1022920" y="3280000"/>
+            <a:ext cx="4230000" cy="760000"/>
+          </a:xfrm>
+          <a:prstGeom prst="rect">
+            <a:avLst/>
+          </a:prstGeom>
+          <a:noFill/>
+        </p:spPr>
+        <p:txBody>
+          <a:bodyPr wrap="square" lIns="0" rIns="0" tIns="0" bIns="0" anchor="t">
+            <a:spAutoFit/>
+          </a:bodyPr>
+          <a:lstStyle/>
+          <a:p>
+            <a:pPr algn="l">
+              <a:lnSpc>
+                <a:spcPct val="118000"/>
+              </a:lnSpc>
+              <a:spcAft>
+                <a:spcPts val="0"/>
+              </a:spcAft>
+            </a:pPr>
+            <a:r>
+              <a:rPr sz="1200" b="1" i="0">
+                <a:solidFill>
+                  <a:srgbClr val="141414"/>
+                </a:solidFill>
+                <a:latin typeface="Arial"/>
+              </a:rPr>
+              <a:t xml:space="preserve">IST — fact-finder</a:t>
+            </a:r>
+          </a:p>
+          <a:p>
+            <a:pPr algn="l">
+              <a:lnSpc>
+                <a:spcPct val="118000"/>
+              </a:lnSpc>
+              <a:spcAft>
+                <a:spcPts val="0"/>
+              </a:spcAft>
+            </a:pPr>
+            <a:r>
+              <a:rPr sz="1000" b="0" i="0">
+                <a:solidFill>
+                  <a:srgbClr val="5C5C5C"/>
+                </a:solidFill>
+                <a:latin typeface="Arial"/>
+              </a:rPr>
+              <a:t xml:space="preserve">Woher starten wir? Die Codebasis samt Doku plus externes Wissen (Best Practices, Libraries, Standards, Services) — verifiziert festgehalten.</a:t>
+            </a:r>
+          </a:p>
+        </p:txBody>
+      </p:sp>
+      <p:sp>
+        <p:nvSpPr>
+          <p:cNvPr id="14" name="NumBadge"/>
+          <p:cNvSpPr/>
+          <p:nvPr/>
+        </p:nvSpPr>
+        <p:spPr>
+          <a:xfrm>
+            <a:off x="502920" y="4100000"/>
+            <a:ext cx="380000" cy="380000"/>
+          </a:xfrm>
+          <a:prstGeom prst="rect">
+            <a:avLst/>
+          </a:prstGeom>
+          <a:solidFill>
+            <a:srgbClr val="FF3C00"/>
+          </a:solidFill>
+          <a:ln>
+            <a:noFill/>
+          </a:ln>
+          <a:effectLst/>
+        </p:spPr>
+        <p:txBody>
+          <a:bodyPr rtlCol="0" anchor="ctr" wrap="square" lIns="0" rIns="0" tIns="0" bIns="0"/>
+          <a:lstStyle/>
+          <a:p>
+            <a:pPr algn="ctr"/>
+          </a:p>
+        </p:txBody>
+      </p:sp>
+      <p:sp>
+        <p:nvSpPr>
+          <p:cNvPr id="15" name="TextBox"/>
+          <p:cNvSpPr txBox="1"/>
+          <p:nvPr/>
+        </p:nvSpPr>
+        <p:spPr>
+          <a:xfrm>
+            <a:off x="502920" y="4100000"/>
+            <a:ext cx="380000" cy="380000"/>
+          </a:xfrm>
+          <a:prstGeom prst="rect">
+            <a:avLst/>
+          </a:prstGeom>
+          <a:noFill/>
+        </p:spPr>
+        <p:txBody>
+          <a:bodyPr wrap="square" lIns="0" rIns="0" tIns="0" bIns="0" anchor="ctr"/>
+          <a:lstStyle/>
+          <a:p>
+            <a:pPr algn="ctr">
+              <a:spcAft>
+                <a:spcPts val="0"/>
+              </a:spcAft>
+            </a:pPr>
+            <a:r>
+              <a:rPr sz="1400" b="1" i="0">
+                <a:solidFill>
+                  <a:srgbClr val="FFFFFF"/>
+                </a:solidFill>
+                <a:latin typeface="Arial"/>
+              </a:rPr>
+              <a:t xml:space="preserve">3</a:t>
+            </a:r>
+          </a:p>
+        </p:txBody>
+      </p:sp>
+      <p:sp>
+        <p:nvSpPr>
+          <p:cNvPr id="16" name="TextBox"/>
+          <p:cNvSpPr txBox="1"/>
+          <p:nvPr/>
+        </p:nvSpPr>
+        <p:spPr>
+          <a:xfrm>
+            <a:off x="1022920" y="4080000"/>
+            <a:ext cx="4230000" cy="760000"/>
+          </a:xfrm>
+          <a:prstGeom prst="rect">
+            <a:avLst/>
+          </a:prstGeom>
+          <a:noFill/>
+        </p:spPr>
+        <p:txBody>
+          <a:bodyPr wrap="square" lIns="0" rIns="0" tIns="0" bIns="0" anchor="t">
+            <a:spAutoFit/>
+          </a:bodyPr>
+          <a:lstStyle/>
+          <a:p>
+            <a:pPr algn="l">
+              <a:lnSpc>
+                <a:spcPct val="118000"/>
+              </a:lnSpc>
+              <a:spcAft>
+                <a:spcPts val="0"/>
+              </a:spcAft>
+            </a:pPr>
+            <a:r>
+              <a:rPr sz="1200" b="1" i="0">
+                <a:solidFill>
+                  <a:srgbClr val="141414"/>
+                </a:solidFill>
+                <a:latin typeface="Arial"/>
+              </a:rPr>
+              <a:t xml:space="preserve">PLAN</a:t>
+            </a:r>
+          </a:p>
+          <a:p>
+            <a:pPr algn="l">
+              <a:lnSpc>
+                <a:spcPct val="118000"/>
+              </a:lnSpc>
+              <a:spcAft>
+                <a:spcPts val="0"/>
+              </a:spcAft>
+            </a:pPr>
+            <a:r>
+              <a:rPr sz="1000" b="0" i="0">
+                <a:solidFill>
+                  <a:srgbClr val="5C5C5C"/>
+                </a:solidFill>
+                <a:latin typeface="Arial"/>
+              </a:rPr>
+              <a:t xml:space="preserve">Der Weg vom Ist zum Ziel.</a:t>
+            </a:r>
+          </a:p>
+        </p:txBody>
+      </p:sp>
+      <p:sp>
+        <p:nvSpPr>
+          <p:cNvPr id="17" name="UmsetzChip"/>
+          <p:cNvSpPr/>
+          <p:nvPr/>
+        </p:nvSpPr>
+        <p:spPr>
+          <a:xfrm>
+            <a:off x="502920" y="4960000"/>
+            <a:ext cx="4750000" cy="470000"/>
+          </a:xfrm>
+          <a:prstGeom prst="rect">
+            <a:avLst/>
+          </a:prstGeom>
+          <a:solidFill>
+            <a:srgbClr val="141414"/>
+          </a:solidFill>
+          <a:ln>
+            <a:noFill/>
+          </a:ln>
+          <a:effectLst/>
+        </p:spPr>
+        <p:txBody>
+          <a:bodyPr rtlCol="0" anchor="ctr" wrap="square" lIns="0" rIns="0" tIns="0" bIns="0"/>
+          <a:lstStyle/>
+          <a:p>
+            <a:pPr algn="ctr"/>
+          </a:p>
+        </p:txBody>
+      </p:sp>
+      <p:sp>
+        <p:nvSpPr>
+          <p:cNvPr id="18" name="TextBox"/>
+          <p:cNvSpPr txBox="1"/>
+          <p:nvPr/>
+        </p:nvSpPr>
+        <p:spPr>
+          <a:xfrm>
+            <a:off x="502920" y="4960000"/>
+            <a:ext cx="4750000" cy="470000"/>
+          </a:xfrm>
+          <a:prstGeom prst="rect">
+            <a:avLst/>
+          </a:prstGeom>
+          <a:noFill/>
+        </p:spPr>
+        <p:txBody>
+          <a:bodyPr wrap="square" lIns="228600" rIns="0" tIns="0" bIns="0" anchor="ctr">
+            <a:spAutoFit/>
+          </a:bodyPr>
+          <a:lstStyle/>
+          <a:p>
+            <a:pPr algn="l">
+              <a:spcAft>
+                <a:spcPts val="0"/>
+              </a:spcAft>
+            </a:pPr>
+            <a:r>
+              <a:rPr sz="1150" b="1" i="0">
+                <a:solidFill>
+                  <a:srgbClr val="FF3C00"/>
+                </a:solidFill>
+                <a:latin typeface="Arial"/>
+              </a:rPr>
+              <a:t xml:space="preserve">→ UMSETZUNG</a:t>
+            </a:r>
+            <a:r>
+              <a:rPr sz="1150" b="0" i="0">
+                <a:solidFill>
+                  <a:srgbClr val="FFFFFF"/>
+                </a:solidFill>
+                <a:latin typeface="Arial"/>
+              </a:rPr>
+              <a:t xml:space="preserve">   erst jetzt entsteht Code.</a:t>
+            </a:r>
+          </a:p>
+        </p:txBody>
+      </p:sp>
+      <p:sp>
+        <p:nvSpPr>
+          <p:cNvPr id="19" name="TextBox"/>
+          <p:cNvSpPr txBox="1"/>
+          <p:nvPr/>
+        </p:nvSpPr>
+        <p:spPr>
+          <a:xfrm>
+            <a:off x="502920" y="5580000"/>
+            <a:ext cx="4750000" cy="600000"/>
+          </a:xfrm>
+          <a:prstGeom prst="rect">
+            <a:avLst/>
+          </a:prstGeom>
+          <a:noFill/>
+        </p:spPr>
+        <p:txBody>
+          <a:bodyPr wrap="square" lIns="0" rIns="0" tIns="0" bIns="0" anchor="t">
+            <a:spAutoFit/>
+          </a:bodyPr>
+          <a:lstStyle/>
+          <a:p>
+            <a:pPr algn="l">
+              <a:lnSpc>
+                <a:spcPct val="122000"/>
+              </a:lnSpc>
+              <a:spcAft>
+                <a:spcPts val="0"/>
+              </a:spcAft>
+            </a:pPr>
+            <a:r>
+              <a:rPr sz="1000" b="1" i="0">
+                <a:solidFill>
+                  <a:srgbClr val="FF3C00"/>
+                </a:solidFill>
+                <a:latin typeface="Arial"/>
+              </a:rPr>
+              <a:t xml:space="preserve">Ist + Plan sind immer Pflicht. Nur die Spezifikation entfällt, wenn das Ziel trivial und eindeutig ist.</a:t>
+            </a:r>
+          </a:p>
+        </p:txBody>
+      </p:sp>
+      <p:sp>
+        <p:nvSpPr>
+          <p:cNvPr id="20" name="TextBox"/>
+          <p:cNvSpPr txBox="1"/>
+          <p:nvPr/>
+        </p:nvSpPr>
+        <p:spPr>
+          <a:xfrm>
+            <a:off x="6850000" y="2057400"/>
+            <a:ext cx="3900000" cy="240000"/>
+          </a:xfrm>
+          <a:prstGeom prst="rect">
+            <a:avLst/>
+          </a:prstGeom>
+          <a:noFill/>
+        </p:spPr>
+        <p:txBody>
+          <a:bodyPr wrap="square" lIns="0" rIns="0" tIns="0" bIns="0" anchor="t">
+            <a:spAutoFit/>
+          </a:bodyPr>
+          <a:lstStyle/>
+          <a:p>
+            <a:pPr algn="ctr">
+              <a:spcAft>
+                <a:spcPts val="0"/>
+              </a:spcAft>
+            </a:pPr>
+            <a:r>
+              <a:rPr sz="1000" b="1" i="0" spc="120">
+                <a:solidFill>
+                  <a:srgbClr val="8A8A8A"/>
+                </a:solidFill>
+                <a:latin typeface="Arial"/>
+              </a:rPr>
+              <a:t xml:space="preserve">ALLES ANDERE UMKREIST DEN KERN</a:t>
+            </a:r>
+          </a:p>
+        </p:txBody>
+      </p:sp>
+      <p:sp>
+        <p:nvSpPr>
+          <p:cNvPr id="21" name="OrbitRing"/>
+          <p:cNvSpPr/>
+          <p:nvPr/>
+        </p:nvSpPr>
+        <p:spPr>
+          <a:xfrm>
+            <a:off x="6850000" y="2350000"/>
+            <a:ext cx="3900000" cy="3900000"/>
+          </a:xfrm>
+          <a:prstGeom prst="ellipse">
+            <a:avLst/>
+          </a:prstGeom>
+          <a:noFill/>
+          <a:ln w="12700">
+            <a:solidFill>
+              <a:srgbClr val="E8E8E8"/>
+            </a:solidFill>
+          </a:ln>
+          <a:effectLst/>
+        </p:spPr>
+        <p:txBody>
+          <a:bodyPr rtlCol="0" anchor="ctr" wrap="square" lIns="0" rIns="0" tIns="0" bIns="0"/>
+          <a:lstStyle/>
+          <a:p>
+            <a:pPr algn="ctr"/>
+          </a:p>
+        </p:txBody>
+      </p:sp>
+      <p:sp>
+        <p:nvSpPr>
+          <p:cNvPr id="22" name="Line"/>
+          <p:cNvSpPr/>
+          <p:nvPr/>
+        </p:nvSpPr>
+        <p:spPr>
+          <a:xfrm>
+            <a:off x="7421136" y="2921136"/>
+            <a:ext cx="1378864" cy="1378864"/>
+          </a:xfrm>
+          <a:prstGeom prst="line">
+            <a:avLst/>
+          </a:prstGeom>
+          <a:ln w="9525">
+            <a:solidFill>
+              <a:srgbClr val="E8E8E8"/>
+            </a:solidFill>
+          </a:ln>
+          <a:effectLst/>
+        </p:spPr>
+        <p:txBody>
+          <a:bodyPr/>
+          <a:lstStyle/>
+          <a:p/>
+        </p:txBody>
+      </p:sp>
+      <p:sp>
+        <p:nvSpPr>
+          <p:cNvPr id="23" name="Line"/>
+          <p:cNvSpPr/>
+          <p:nvPr/>
+        </p:nvSpPr>
+        <p:spPr>
+          <a:xfrm flipV="1">
+            <a:off x="8800000" y="2921136"/>
+            <a:ext cx="1378864" cy="1378864"/>
+          </a:xfrm>
+          <a:prstGeom prst="line">
+            <a:avLst/>
+          </a:prstGeom>
+          <a:ln w="9525">
+            <a:solidFill>
+              <a:srgbClr val="E8E8E8"/>
+            </a:solidFill>
+          </a:ln>
+          <a:effectLst/>
+        </p:spPr>
+        <p:txBody>
+          <a:bodyPr/>
+          <a:lstStyle/>
+          <a:p/>
+        </p:txBody>
+      </p:sp>
+      <p:sp>
+        <p:nvSpPr>
+          <p:cNvPr id="24" name="Line"/>
+          <p:cNvSpPr/>
+          <p:nvPr/>
+        </p:nvSpPr>
+        <p:spPr>
+          <a:xfrm flipH="1">
+            <a:off x="7421136" y="4300000"/>
+            <a:ext cx="1378864" cy="1378864"/>
+          </a:xfrm>
+          <a:prstGeom prst="line">
+            <a:avLst/>
+          </a:prstGeom>
+          <a:ln w="9525">
+            <a:solidFill>
+              <a:srgbClr val="E8E8E8"/>
+            </a:solidFill>
+          </a:ln>
+          <a:effectLst/>
+        </p:spPr>
+        <p:txBody>
+          <a:bodyPr/>
+          <a:lstStyle/>
+          <a:p/>
+        </p:txBody>
+      </p:sp>
+      <p:sp>
+        <p:nvSpPr>
+          <p:cNvPr id="25" name="Line"/>
+          <p:cNvSpPr/>
+          <p:nvPr/>
+        </p:nvSpPr>
+        <p:spPr>
+          <a:xfrm>
+            <a:off x="8800000" y="4300000"/>
+            <a:ext cx="1378864" cy="1378864"/>
+          </a:xfrm>
+          <a:prstGeom prst="line">
+            <a:avLst/>
+          </a:prstGeom>
+          <a:ln w="9525">
+            <a:solidFill>
+              <a:srgbClr val="E8E8E8"/>
+            </a:solidFill>
+          </a:ln>
+          <a:effectLst/>
+        </p:spPr>
+        <p:txBody>
+          <a:bodyPr/>
+          <a:lstStyle/>
+          <a:p/>
+        </p:txBody>
+      </p:sp>
+      <p:sp>
+        <p:nvSpPr>
+          <p:cNvPr id="26" name="Core"/>
+          <p:cNvSpPr/>
+          <p:nvPr/>
+        </p:nvSpPr>
+        <p:spPr>
+          <a:xfrm>
+            <a:off x="8075000" y="3575000"/>
+            <a:ext cx="1450000" cy="1450000"/>
+          </a:xfrm>
+          <a:prstGeom prst="ellipse">
+            <a:avLst/>
+          </a:prstGeom>
+          <a:solidFill>
+            <a:srgbClr val="141414"/>
+          </a:solidFill>
+          <a:ln>
+            <a:noFill/>
+          </a:ln>
+          <a:effectLst/>
+        </p:spPr>
+        <p:txBody>
+          <a:bodyPr rtlCol="0" anchor="ctr" wrap="square" lIns="0" rIns="0" tIns="0" bIns="0"/>
+          <a:lstStyle/>
+          <a:p>
+            <a:pPr algn="ctr"/>
+          </a:p>
+        </p:txBody>
+      </p:sp>
+      <p:sp>
+        <p:nvSpPr>
+          <p:cNvPr id="27" name="TextBox"/>
+          <p:cNvSpPr txBox="1"/>
+          <p:nvPr/>
+        </p:nvSpPr>
+        <p:spPr>
+          <a:xfrm>
+            <a:off x="8075000" y="3575000"/>
+            <a:ext cx="1450000" cy="1450000"/>
+          </a:xfrm>
+          <a:prstGeom prst="rect">
+            <a:avLst/>
+          </a:prstGeom>
+          <a:noFill/>
+        </p:spPr>
+        <p:txBody>
+          <a:bodyPr wrap="square" lIns="0" rIns="0" tIns="0" bIns="0" anchor="ctr"/>
+          <a:lstStyle/>
+          <a:p>
+            <a:pPr algn="ctr">
+              <a:lnSpc>
+                <a:spcPct val="120000"/>
+              </a:lnSpc>
+              <a:spcAft>
+                <a:spcPts val="0"/>
+              </a:spcAft>
+            </a:pPr>
+            <a:r>
+              <a:rPr sz="1000" b="1" i="0" spc="120">
+                <a:solidFill>
+                  <a:srgbClr val="FF3C00"/>
+                </a:solidFill>
+                <a:latin typeface="Arial"/>
+              </a:rPr>
+              <a:t xml:space="preserve">KERN</a:t>
+            </a:r>
+          </a:p>
+          <a:p>
+            <a:pPr algn="ctr">
+              <a:lnSpc>
+                <a:spcPct val="120000"/>
+              </a:lnSpc>
+              <a:spcAft>
+                <a:spcPts val="0"/>
+              </a:spcAft>
+            </a:pPr>
+            <a:r>
+              <a:rPr sz="1200" b="1" i="0">
+                <a:solidFill>
+                  <a:srgbClr val="FFFFFF"/>
+                </a:solidFill>
+                <a:latin typeface="Arial"/>
+              </a:rPr>
+              <a:t xml:space="preserve">Ziel · Ist · Plan</a:t>
+            </a:r>
+          </a:p>
+        </p:txBody>
+      </p:sp>
+      <p:sp>
+        <p:nvSpPr>
+          <p:cNvPr id="28" name="Pill_NW"/>
+          <p:cNvSpPr/>
+          <p:nvPr/>
+        </p:nvSpPr>
+        <p:spPr>
+          <a:xfrm>
+            <a:off x="6471136" y="2661136"/>
+            <a:ext cx="1900000" cy="520000"/>
+          </a:xfrm>
+          <a:prstGeom prst="rect">
+            <a:avLst/>
+          </a:prstGeom>
+          <a:solidFill>
+            <a:srgbClr val="FAF9F9"/>
+          </a:solidFill>
+          <a:ln w="12700">
+            <a:solidFill>
+              <a:srgbClr val="E8E8E8"/>
+            </a:solidFill>
+          </a:ln>
+          <a:effectLst/>
+        </p:spPr>
+        <p:txBody>
+          <a:bodyPr rtlCol="0" anchor="ctr" wrap="square" lIns="0" rIns="0" tIns="0" bIns="0"/>
+          <a:lstStyle/>
+          <a:p>
+            <a:pPr algn="ctr"/>
+          </a:p>
+        </p:txBody>
+      </p:sp>
+      <p:sp>
+        <p:nvSpPr>
+          <p:cNvPr id="29" name="TextBox"/>
+          <p:cNvSpPr txBox="1"/>
+          <p:nvPr/>
+        </p:nvSpPr>
+        <p:spPr>
+          <a:xfrm>
+            <a:off x="6471136" y="2661136"/>
+            <a:ext cx="1900000" cy="520000"/>
+          </a:xfrm>
+          <a:prstGeom prst="rect">
+            <a:avLst/>
+          </a:prstGeom>
+          <a:noFill/>
+        </p:spPr>
+        <p:txBody>
+          <a:bodyPr wrap="square" lIns="0" rIns="0" tIns="0" bIns="0" anchor="ctr"/>
+          <a:lstStyle/>
+          <a:p>
+            <a:pPr algn="ctr">
+              <a:lnSpc>
+                <a:spcPct val="105000"/>
+              </a:lnSpc>
+              <a:spcAft>
+                <a:spcPts val="0"/>
+              </a:spcAft>
+            </a:pPr>
+            <a:r>
+              <a:rPr sz="1000" b="1" i="0">
+                <a:solidFill>
+                  <a:srgbClr val="141414"/>
+                </a:solidFill>
+                <a:latin typeface="Arial"/>
+              </a:rPr>
+              <a:t xml:space="preserve">Greenfield- &amp; Brownfield-Architekten</a:t>
+            </a:r>
+          </a:p>
+        </p:txBody>
+      </p:sp>
+      <p:sp>
+        <p:nvSpPr>
+          <p:cNvPr id="30" name="Pill_NE"/>
+          <p:cNvSpPr/>
+          <p:nvPr/>
+        </p:nvSpPr>
+        <p:spPr>
+          <a:xfrm>
+            <a:off x="9228864" y="2661136"/>
+            <a:ext cx="1900000" cy="520000"/>
+          </a:xfrm>
+          <a:prstGeom prst="rect">
+            <a:avLst/>
+          </a:prstGeom>
+          <a:solidFill>
+            <a:srgbClr val="FAF9F9"/>
+          </a:solidFill>
+          <a:ln w="12700">
+            <a:solidFill>
+              <a:srgbClr val="E8E8E8"/>
+            </a:solidFill>
+          </a:ln>
+          <a:effectLst/>
+        </p:spPr>
+        <p:txBody>
+          <a:bodyPr rtlCol="0" anchor="ctr" wrap="square" lIns="0" rIns="0" tIns="0" bIns="0"/>
+          <a:lstStyle/>
+          <a:p>
+            <a:pPr algn="ctr"/>
+          </a:p>
+        </p:txBody>
+      </p:sp>
+      <p:sp>
+        <p:nvSpPr>
+          <p:cNvPr id="31" name="TextBox"/>
+          <p:cNvSpPr txBox="1"/>
+          <p:nvPr/>
+        </p:nvSpPr>
+        <p:spPr>
+          <a:xfrm>
+            <a:off x="9228864" y="2661136"/>
+            <a:ext cx="1900000" cy="520000"/>
+          </a:xfrm>
+          <a:prstGeom prst="rect">
+            <a:avLst/>
+          </a:prstGeom>
+          <a:noFill/>
+        </p:spPr>
+        <p:txBody>
+          <a:bodyPr wrap="square" lIns="0" rIns="0" tIns="0" bIns="0" anchor="ctr"/>
+          <a:lstStyle/>
+          <a:p>
+            <a:pPr algn="ctr">
+              <a:lnSpc>
+                <a:spcPct val="105000"/>
+              </a:lnSpc>
+              <a:spcAft>
+                <a:spcPts val="0"/>
+              </a:spcAft>
+            </a:pPr>
+            <a:r>
+              <a:rPr sz="1000" b="1" i="0">
+                <a:solidFill>
+                  <a:srgbClr val="141414"/>
+                </a:solidFill>
+                <a:latin typeface="Arial"/>
+              </a:rPr>
+              <a:t xml:space="preserve">DOX-Governance</a:t>
+            </a:r>
+          </a:p>
+        </p:txBody>
+      </p:sp>
+      <p:sp>
+        <p:nvSpPr>
+          <p:cNvPr id="32" name="Pill_SW"/>
+          <p:cNvSpPr/>
+          <p:nvPr/>
+        </p:nvSpPr>
+        <p:spPr>
+          <a:xfrm>
+            <a:off x="6471136" y="5418864"/>
+            <a:ext cx="1900000" cy="520000"/>
+          </a:xfrm>
+          <a:prstGeom prst="rect">
+            <a:avLst/>
+          </a:prstGeom>
+          <a:solidFill>
+            <a:srgbClr val="FAF9F9"/>
+          </a:solidFill>
+          <a:ln w="12700">
+            <a:solidFill>
+              <a:srgbClr val="E8E8E8"/>
+            </a:solidFill>
+          </a:ln>
+          <a:effectLst/>
+        </p:spPr>
+        <p:txBody>
+          <a:bodyPr rtlCol="0" anchor="ctr" wrap="square" lIns="0" rIns="0" tIns="0" bIns="0"/>
+          <a:lstStyle/>
+          <a:p>
+            <a:pPr algn="ctr"/>
+          </a:p>
+        </p:txBody>
+      </p:sp>
+      <p:sp>
+        <p:nvSpPr>
+          <p:cNvPr id="33" name="TextBox"/>
+          <p:cNvSpPr txBox="1"/>
+          <p:nvPr/>
+        </p:nvSpPr>
+        <p:spPr>
+          <a:xfrm>
+            <a:off x="6471136" y="5418864"/>
+            <a:ext cx="1900000" cy="520000"/>
+          </a:xfrm>
+          <a:prstGeom prst="rect">
+            <a:avLst/>
+          </a:prstGeom>
+          <a:noFill/>
+        </p:spPr>
+        <p:txBody>
+          <a:bodyPr wrap="square" lIns="0" rIns="0" tIns="0" bIns="0" anchor="ctr"/>
+          <a:lstStyle/>
+          <a:p>
+            <a:pPr algn="ctr">
+              <a:lnSpc>
+                <a:spcPct val="105000"/>
+              </a:lnSpc>
+              <a:spcAft>
+                <a:spcPts val="0"/>
+              </a:spcAft>
+            </a:pPr>
+            <a:r>
+              <a:rPr sz="1000" b="1" i="0">
+                <a:solidFill>
+                  <a:srgbClr val="141414"/>
+                </a:solidFill>
+                <a:latin typeface="Arial"/>
+              </a:rPr>
+              <a:t xml:space="preserve">Sub-Agenten-Flotte</a:t>
+            </a:r>
+          </a:p>
+        </p:txBody>
+      </p:sp>
+      <p:sp>
+        <p:nvSpPr>
+          <p:cNvPr id="34" name="Pill_SE"/>
+          <p:cNvSpPr/>
+          <p:nvPr/>
+        </p:nvSpPr>
+        <p:spPr>
+          <a:xfrm>
+            <a:off x="9228864" y="5418864"/>
+            <a:ext cx="1900000" cy="520000"/>
+          </a:xfrm>
+          <a:prstGeom prst="rect">
+            <a:avLst/>
+          </a:prstGeom>
+          <a:solidFill>
+            <a:srgbClr val="FAF9F9"/>
+          </a:solidFill>
+          <a:ln w="12700">
+            <a:solidFill>
+              <a:srgbClr val="E8E8E8"/>
+            </a:solidFill>
+          </a:ln>
+          <a:effectLst/>
+        </p:spPr>
+        <p:txBody>
+          <a:bodyPr rtlCol="0" anchor="ctr" wrap="square" lIns="0" rIns="0" tIns="0" bIns="0"/>
+          <a:lstStyle/>
+          <a:p>
+            <a:pPr algn="ctr"/>
+          </a:p>
+        </p:txBody>
+      </p:sp>
+      <p:sp>
+        <p:nvSpPr>
+          <p:cNvPr id="35" name="TextBox"/>
+          <p:cNvSpPr txBox="1"/>
+          <p:nvPr/>
+        </p:nvSpPr>
+        <p:spPr>
+          <a:xfrm>
+            <a:off x="9228864" y="5418864"/>
+            <a:ext cx="1900000" cy="520000"/>
+          </a:xfrm>
+          <a:prstGeom prst="rect">
+            <a:avLst/>
+          </a:prstGeom>
+          <a:noFill/>
+        </p:spPr>
+        <p:txBody>
+          <a:bodyPr wrap="square" lIns="0" rIns="0" tIns="0" bIns="0" anchor="ctr"/>
+          <a:lstStyle/>
+          <a:p>
+            <a:pPr algn="ctr">
+              <a:lnSpc>
+                <a:spcPct val="105000"/>
+              </a:lnSpc>
+              <a:spcAft>
+                <a:spcPts val="0"/>
+              </a:spcAft>
+            </a:pPr>
+            <a:r>
+              <a:rPr sz="1000" b="1" i="0">
+                <a:solidFill>
+                  <a:srgbClr val="141414"/>
+                </a:solidFill>
+                <a:latin typeface="Arial"/>
+              </a:rPr>
+              <a:t xml:space="preserve">QA-Workflow</a:t>
+            </a:r>
+          </a:p>
+        </p:txBody>
+      </p:sp>
+      <p:sp>
+        <p:nvSpPr>
+          <p:cNvPr id="36" name="TextBox"/>
+          <p:cNvSpPr txBox="1"/>
+          <p:nvPr/>
+        </p:nvSpPr>
+        <p:spPr>
+          <a:xfrm>
+            <a:off x="502920" y="6455664"/>
+            <a:ext cx="914400" cy="274320"/>
+          </a:xfrm>
+          <a:prstGeom prst="rect">
+            <a:avLst/>
+          </a:prstGeom>
+          <a:noFill/>
+        </p:spPr>
+        <p:txBody>
+          <a:bodyPr wrap="square" lIns="0" rIns="0" tIns="0" bIns="0" anchor="t">
+            <a:spAutoFit/>
+          </a:bodyPr>
+          <a:lstStyle/>
+          <a:p>
+            <a:pPr algn="l">
+              <a:spcAft>
+                <a:spcPts val="0"/>
+              </a:spcAft>
+            </a:pPr>
+            <a:r>
+              <a:rPr sz="1000" b="0" i="0">
+                <a:solidFill>
+                  <a:srgbClr val="8A8A8A"/>
+                </a:solidFill>
+                <a:latin typeface="Arial"/>
+              </a:rPr>
+              <a:t xml:space="preserve">3</a:t>
+            </a:r>
+          </a:p>
+        </p:txBody>
+      </p:sp>
+      <p:pic>
+        <p:nvPicPr>
+          <p:cNvPr id="37" name="Picture" descr="vier-logo.png"/>
           <p:cNvPicPr>
             <a:picLocks noChangeAspect="1"/>
           </p:cNvPicPr>
@@ -12774,7 +14136,7 @@
                 </a:solidFill>
                 <a:latin typeface="Arial"/>
               </a:rPr>
-              <a:t>VISION</a:t>
+              <a:t>ZIEL · SPEC</a:t>
             </a:r>
           </a:p>
         </p:txBody>
@@ -12816,7 +14178,7 @@
                 </a:solidFill>
                 <a:latin typeface="Arial"/>
               </a:rPr>
-              <a:t>Das „Warum" definieren, bevor Technologie gewählt wird.</a:t>
+              <a:t>Warum und Was definieren — technologieneutral, ohne Techniknamen.</a:t>
             </a:r>
           </a:p>
         </p:txBody>
@@ -12859,7 +14221,7 @@
                 </a:solidFill>
                 <a:latin typeface="Arial"/>
               </a:rPr>
-              <a:t>SPEZIFIKATION</a:t>
+              <a:t>IST</a:t>
             </a:r>
           </a:p>
         </p:txBody>
@@ -12901,7 +14263,7 @@
                 </a:solidFill>
                 <a:latin typeface="Arial"/>
               </a:rPr>
-              <a:t>Architektur definieren, technologieneutral.</a:t>
+              <a:t>Codebasis und externes Wissen erheben — via fact-finder verifiziert.</a:t>
             </a:r>
           </a:p>
         </p:txBody>
@@ -12944,7 +14306,7 @@
                 </a:solidFill>
                 <a:latin typeface="Arial"/>
               </a:rPr>
-              <a:t>PLANUNG</a:t>
+              <a:t>PLAN</a:t>
             </a:r>
           </a:p>
         </p:txBody>
@@ -12986,7 +14348,7 @@
                 </a:solidFill>
                 <a:latin typeface="Arial"/>
               </a:rPr>
-              <a:t>Codebasis kartografieren — jede Aufgabe belegt.</a:t>
+              <a:t>Der Weg vom Ist zum Ziel — jede Aufgabe belegt.</a:t>
             </a:r>
           </a:p>
         </p:txBody>
@@ -13156,7 +14518,7 @@
                 </a:solidFill>
                 <a:latin typeface="Arial"/>
               </a:rPr>
-              <a:t>3</a:t>
+              <a:t>4</a:t>
             </a:r>
           </a:p>
         </p:txBody>
@@ -14155,7 +15517,7 @@
                 </a:solidFill>
                 <a:latin typeface="Courier New"/>
               </a:rPr>
-              <a:t>research/</a:t>
+              <a:t>facts/</a:t>
             </a:r>
           </a:p>
         </p:txBody>
@@ -14194,7 +15556,7 @@
                 </a:solidFill>
                 <a:latin typeface="Arial"/>
               </a:rPr>
-              <a:t>Die Fakten</a:t>
+              <a:t>Das Ist</a:t>
             </a:r>
           </a:p>
         </p:txBody>
@@ -14315,7 +15677,7 @@
                 </a:solidFill>
                 <a:latin typeface="Arial"/>
               </a:rPr>
-              <a:t>Die Aufgaben</a:t>
+              <a:t>Der Plan</a:t>
             </a:r>
           </a:p>
         </p:txBody>
@@ -14514,7 +15876,7 @@
                 </a:solidFill>
                 <a:latin typeface="Arial"/>
               </a:rPr>
-              <a:t>4</a:t>
+              <a:t>5</a:t>
             </a:r>
           </a:p>
         </p:txBody>
@@ -15500,7 +16862,7 @@
                 </a:solidFill>
                 <a:latin typeface="Courier New"/>
               </a:rPr>
-              <a:t>/researcher</a:t>
+              <a:t>/fact-finder</a:t>
             </a:r>
           </a:p>
         </p:txBody>
@@ -15596,7 +16958,7 @@
                 </a:solidFill>
                 <a:latin typeface="Arial"/>
               </a:rPr>
-              <a:t>5</a:t>
+              <a:t>6</a:t>
             </a:r>
           </a:p>
         </p:txBody>
@@ -16897,7 +18259,7 @@
                 </a:solidFill>
                 <a:latin typeface="Arial"/>
               </a:rPr>
-              <a:t>6</a:t>
+              <a:t>7</a:t>
             </a:r>
           </a:p>
         </p:txBody>
@@ -17940,7 +19302,7 @@
                 </a:solidFill>
                 <a:latin typeface="Arial"/>
               </a:rPr>
-              <a:t>7</a:t>
+              <a:t>8</a:t>
             </a:r>
           </a:p>
         </p:txBody>
@@ -18740,7 +20102,7 @@
                 </a:solidFill>
                 <a:latin typeface="Arial"/>
               </a:rPr>
-              <a:t>Zwingende Fragen für den Researcher — unbeantwortet bleiben sie eine offene Gefahr.</a:t>
+              <a:t>Zwingende Fragen für den fact-finder — unbeantwortet bleiben sie eine offene Gefahr.</a:t>
             </a:r>
           </a:p>
         </p:txBody>
@@ -18779,7 +20141,7 @@
                 </a:solidFill>
                 <a:latin typeface="Arial"/>
               </a:rPr>
-              <a:t>8</a:t>
+              <a:t>9</a:t>
             </a:r>
           </a:p>
         </p:txBody>
@@ -18902,7 +20264,7 @@
                 </a:solidFill>
                 <a:latin typeface="Arial"/>
               </a:rPr>
-              <a:t>Der Researcher bildet das faktenbasierte Fundament</a:t>
+              <a:t>Der fact-finder bildet das faktenbasierte Fundament</a:t>
             </a:r>
           </a:p>
         </p:txBody>
@@ -19135,7 +20497,7 @@
                 </a:solidFill>
                 <a:latin typeface="Courier New"/>
               </a:rPr>
-              <a:t>thoughts/shared/research/</a:t>
+              <a:t>thoughts/shared/facts/</a:t>
             </a:r>
           </a:p>
         </p:txBody>
@@ -19404,7 +20766,7 @@
                 </a:solidFill>
                 <a:latin typeface="Courier New"/>
               </a:rPr>
-              <a:t>/researcher</a:t>
+              <a:t>/fact-finder</a:t>
             </a:r>
           </a:p>
         </p:txBody>
@@ -19502,7 +20864,7 @@
                 </a:solidFill>
                 <a:latin typeface="Arial"/>
               </a:rPr>
-              <a:t>9</a:t>
+              <a:t>10</a:t>
             </a:r>
           </a:p>
         </p:txBody>

--- a/presentation/ORBIT.pptx
+++ b/presentation/ORBIT.pptx
@@ -10,6 +10,7 @@
     <p:sldId id="274" r:id="rId25"/>
     <p:sldId id="258" r:id="rId9"/>
     <p:sldId id="259" r:id="rId10"/>
+    <p:sldId id="276" r:id="rId27"/>
     <p:sldId id="260" r:id="rId11"/>
     <p:sldId id="261" r:id="rId12"/>
     <p:sldId id="262" r:id="rId13"/>
@@ -17,6 +18,7 @@
     <p:sldId id="264" r:id="rId15"/>
     <p:sldId id="265" r:id="rId16"/>
     <p:sldId id="266" r:id="rId17"/>
+    <p:sldId id="275" r:id="rId26"/>
     <p:sldId id="267" r:id="rId18"/>
     <p:sldId id="268" r:id="rId19"/>
     <p:sldId id="269" r:id="rId20"/>
@@ -4363,7 +4365,7 @@
                 </a:solidFill>
                 <a:latin typeface="Arial"/>
               </a:rPr>
-              <a:t>11</a:t>
+              <a:t>12</a:t>
             </a:r>
           </a:p>
         </p:txBody>
@@ -5492,7 +5494,7 @@
                 </a:solidFill>
                 <a:latin typeface="Arial"/>
               </a:rPr>
-              <a:t>12</a:t>
+              <a:t>13</a:t>
             </a:r>
           </a:p>
         </p:txBody>
@@ -6060,7 +6062,7 @@
                 </a:solidFill>
                 <a:latin typeface="Arial"/>
               </a:rPr>
-              <a:t>13</a:t>
+              <a:t>15</a:t>
             </a:r>
           </a:p>
         </p:txBody>
@@ -6692,7 +6694,7 @@
                 </a:solidFill>
                 <a:latin typeface="Arial"/>
               </a:rPr>
-              <a:t>14</a:t>
+              <a:t>16</a:t>
             </a:r>
           </a:p>
         </p:txBody>
@@ -7672,7 +7674,7 @@
                 </a:solidFill>
                 <a:latin typeface="Arial"/>
               </a:rPr>
-              <a:t>15</a:t>
+              <a:t>17</a:t>
             </a:r>
           </a:p>
         </p:txBody>
@@ -8624,7 +8626,7 @@
                 </a:solidFill>
                 <a:latin typeface="Arial"/>
               </a:rPr>
-              <a:t>16</a:t>
+              <a:t>18</a:t>
             </a:r>
           </a:p>
         </p:txBody>
@@ -9424,7 +9426,7 @@
                 </a:solidFill>
                 <a:latin typeface="Arial"/>
               </a:rPr>
-              <a:t>17</a:t>
+              <a:t>19</a:t>
             </a:r>
           </a:p>
         </p:txBody>
@@ -10585,7 +10587,7 @@
                 </a:solidFill>
                 <a:latin typeface="Arial"/>
               </a:rPr>
-              <a:t>18</a:t>
+              <a:t>20</a:t>
             </a:r>
           </a:p>
         </p:txBody>
@@ -11255,7 +11257,7 @@
                 </a:solidFill>
                 <a:latin typeface="Arial"/>
               </a:rPr>
-              <a:t>19</a:t>
+              <a:t>21</a:t>
             </a:r>
           </a:p>
         </p:txBody>
@@ -13581,6 +13583,2227 @@
 </p:sld>
 </file>
 
+<file path=ppt/slides/slide20.xml><?xml version="1.0" encoding="utf-8"?>
+<p:sld xmlns:a="http://schemas.openxmlformats.org/drawingml/2006/main" xmlns:p="http://schemas.openxmlformats.org/presentationml/2006/main" xmlns:r="http://schemas.openxmlformats.org/officeDocument/2006/relationships">
+  <p:cSld>
+    <p:spTree>
+      <p:nvGrpSpPr>
+        <p:cNvPr id="1" name=""/>
+        <p:cNvGrpSpPr/>
+        <p:nvPr/>
+      </p:nvGrpSpPr>
+      <p:grpSpPr/>
+      <p:sp>
+        <p:nvSpPr>
+          <p:cNvPr id="2" name="TextBox"/>
+          <p:cNvSpPr txBox="1"/>
+          <p:nvPr/>
+        </p:nvSpPr>
+        <p:spPr>
+          <a:xfrm>
+            <a:off x="502920" y="365760"/>
+            <a:ext cx="11155680" cy="274320"/>
+          </a:xfrm>
+          <a:prstGeom prst="rect">
+            <a:avLst/>
+          </a:prstGeom>
+          <a:noFill/>
+        </p:spPr>
+        <p:txBody>
+          <a:bodyPr wrap="square" lIns="0" rIns="0" tIns="0" bIns="0" anchor="t">
+            <a:spAutoFit/>
+          </a:bodyPr>
+          <a:lstStyle/>
+          <a:p>
+            <a:pPr algn="l">
+              <a:spcAft>
+                <a:spcPts val="0"/>
+              </a:spcAft>
+            </a:pPr>
+            <a:r>
+              <a:rPr sz="1100" b="1" i="0" spc="240">
+                <a:solidFill>
+                  <a:srgbClr val="FF3C00"/>
+                </a:solidFill>
+                <a:latin typeface="Arial"/>
+              </a:rPr>
+              <a:t xml:space="preserve">EXPLORATION</a:t>
+            </a:r>
+          </a:p>
+        </p:txBody>
+      </p:sp>
+      <p:sp>
+        <p:nvSpPr>
+          <p:cNvPr id="3" name="TextBox"/>
+          <p:cNvSpPr txBox="1"/>
+          <p:nvPr/>
+        </p:nvSpPr>
+        <p:spPr>
+          <a:xfrm>
+            <a:off x="502920" y="667512"/>
+            <a:ext cx="11155680" cy="566928"/>
+          </a:xfrm>
+          <a:prstGeom prst="rect">
+            <a:avLst/>
+          </a:prstGeom>
+          <a:noFill/>
+        </p:spPr>
+        <p:txBody>
+          <a:bodyPr wrap="square" lIns="0" rIns="0" tIns="0" bIns="0" anchor="t">
+            <a:spAutoFit/>
+          </a:bodyPr>
+          <a:lstStyle/>
+          <a:p>
+            <a:pPr algn="l">
+              <a:lnSpc>
+                <a:spcPct val="102000"/>
+              </a:lnSpc>
+              <a:spcAft>
+                <a:spcPts val="0"/>
+              </a:spcAft>
+            </a:pPr>
+            <a:r>
+              <a:rPr sz="3000" b="1" i="0">
+                <a:solidFill>
+                  <a:srgbClr val="141414"/>
+                </a:solidFill>
+                <a:latin typeface="Arial"/>
+              </a:rPr>
+              <a:t xml:space="preserve">Ausbrechen aus dem Prozess</a:t>
+            </a:r>
+          </a:p>
+        </p:txBody>
+      </p:sp>
+      <p:sp>
+        <p:nvSpPr>
+          <p:cNvPr id="4" name="Rule"/>
+          <p:cNvSpPr/>
+          <p:nvPr/>
+        </p:nvSpPr>
+        <p:spPr>
+          <a:xfrm>
+            <a:off x="502920" y="1216152"/>
+            <a:ext cx="1051560" cy="45720"/>
+          </a:xfrm>
+          <a:prstGeom prst="rect">
+            <a:avLst/>
+          </a:prstGeom>
+          <a:solidFill>
+            <a:srgbClr val="FF3C00"/>
+          </a:solidFill>
+          <a:ln>
+            <a:noFill/>
+          </a:ln>
+          <a:effectLst/>
+        </p:spPr>
+        <p:txBody>
+          <a:bodyPr rtlCol="0" anchor="ctr" wrap="square" lIns="0" rIns="0" tIns="0" bIns="0"/>
+          <a:lstStyle/>
+          <a:p>
+            <a:pPr algn="ctr"/>
+          </a:p>
+        </p:txBody>
+      </p:sp>
+      <p:sp>
+        <p:nvSpPr>
+          <p:cNvPr id="5" name="TextBox"/>
+          <p:cNvSpPr txBox="1"/>
+          <p:nvPr/>
+        </p:nvSpPr>
+        <p:spPr>
+          <a:xfrm>
+            <a:off x="502920" y="1481328"/>
+            <a:ext cx="10600000" cy="560000"/>
+          </a:xfrm>
+          <a:prstGeom prst="rect">
+            <a:avLst/>
+          </a:prstGeom>
+          <a:noFill/>
+        </p:spPr>
+        <p:txBody>
+          <a:bodyPr wrap="square" lIns="0" rIns="0" tIns="0" bIns="0" anchor="t">
+            <a:spAutoFit/>
+          </a:bodyPr>
+          <a:lstStyle/>
+          <a:p>
+            <a:pPr algn="l">
+              <a:lnSpc>
+                <a:spcPct val="130000"/>
+              </a:lnSpc>
+              <a:spcAft>
+                <a:spcPts val="0"/>
+              </a:spcAft>
+            </a:pPr>
+            <a:r>
+              <a:rPr sz="1200" b="0" i="0">
+                <a:solidFill>
+                  <a:srgbClr val="5C5C5C"/>
+                </a:solidFill>
+                <a:latin typeface="Arial"/>
+              </a:rPr>
+              <a:t xml:space="preserve">Manchmal muss man schnell etwas ausprobieren. Der </a:t>
+            </a:r>
+            <a:r>
+              <a:rPr sz="1200" b="1" i="0">
+                <a:solidFill>
+                  <a:srgbClr val="141414"/>
+                </a:solidFill>
+                <a:latin typeface="Courier New"/>
+              </a:rPr>
+              <a:t xml:space="preserve">/prototype</a:t>
+            </a:r>
+            <a:r>
+              <a:rPr sz="1200" b="0" i="0">
+                <a:solidFill>
+                  <a:srgbClr val="5C5C5C"/>
+                </a:solidFill>
+                <a:latin typeface="Arial"/>
+              </a:rPr>
+              <a:t xml:space="preserve">-Skill erlaubt genau das — ohne Spec, Plan oder QA, aber mit klaren Leitplanken.</a:t>
+            </a:r>
+          </a:p>
+        </p:txBody>
+      </p:sp>
+      <p:sp>
+        <p:nvSpPr>
+          <p:cNvPr id="6" name="ZoneLabel"/>
+          <p:cNvSpPr/>
+          <p:nvPr/>
+        </p:nvSpPr>
+        <p:spPr>
+          <a:xfrm>
+            <a:off x="502920" y="2057400"/>
+            <a:ext cx="1783080" cy="274320"/>
+          </a:xfrm>
+          <a:prstGeom prst="rect">
+            <a:avLst/>
+          </a:prstGeom>
+          <a:solidFill>
+            <a:srgbClr val="FF3C00"/>
+          </a:solidFill>
+          <a:ln>
+            <a:noFill/>
+          </a:ln>
+          <a:effectLst/>
+        </p:spPr>
+        <p:txBody>
+          <a:bodyPr rtlCol="0" anchor="ctr" wrap="square" lIns="0" rIns="0" tIns="0" bIns="0"/>
+          <a:lstStyle/>
+          <a:p>
+            <a:pPr algn="ctr"/>
+          </a:p>
+        </p:txBody>
+      </p:sp>
+      <p:sp>
+        <p:nvSpPr>
+          <p:cNvPr id="7" name="TextBox"/>
+          <p:cNvSpPr txBox="1"/>
+          <p:nvPr/>
+        </p:nvSpPr>
+        <p:spPr>
+          <a:xfrm>
+            <a:off x="502920" y="2057400"/>
+            <a:ext cx="1783080" cy="274320"/>
+          </a:xfrm>
+          <a:prstGeom prst="rect">
+            <a:avLst/>
+          </a:prstGeom>
+          <a:noFill/>
+        </p:spPr>
+        <p:txBody>
+          <a:bodyPr wrap="square" lIns="0" rIns="0" tIns="0" bIns="0" anchor="ctr">
+            <a:spAutoFit/>
+          </a:bodyPr>
+          <a:lstStyle/>
+          <a:p>
+            <a:pPr algn="ctr">
+              <a:spcAft>
+                <a:spcPts val="0"/>
+              </a:spcAft>
+            </a:pPr>
+            <a:r>
+              <a:rPr sz="950" b="1" i="0" spc="120">
+                <a:solidFill>
+                  <a:srgbClr val="FFFFFF"/>
+                </a:solidFill>
+                <a:latin typeface="Arial"/>
+              </a:rPr>
+              <a:t xml:space="preserve">SO ARBEITET DER SKILL</a:t>
+            </a:r>
+          </a:p>
+        </p:txBody>
+      </p:sp>
+      <p:sp>
+        <p:nvSpPr>
+          <p:cNvPr id="8" name="Num"/>
+          <p:cNvSpPr/>
+          <p:nvPr/>
+        </p:nvSpPr>
+        <p:spPr>
+          <a:xfrm>
+            <a:off x="502920" y="2520000"/>
+            <a:ext cx="380000" cy="380000"/>
+          </a:xfrm>
+          <a:prstGeom prst="rect">
+            <a:avLst/>
+          </a:prstGeom>
+          <a:solidFill>
+            <a:srgbClr val="FF3C00"/>
+          </a:solidFill>
+          <a:ln>
+            <a:noFill/>
+          </a:ln>
+          <a:effectLst/>
+        </p:spPr>
+        <p:txBody>
+          <a:bodyPr rtlCol="0" anchor="ctr" wrap="square" lIns="0" rIns="0" tIns="0" bIns="0"/>
+          <a:lstStyle/>
+          <a:p>
+            <a:pPr algn="ctr"/>
+          </a:p>
+        </p:txBody>
+      </p:sp>
+      <p:sp>
+        <p:nvSpPr>
+          <p:cNvPr id="9" name="TextBox"/>
+          <p:cNvSpPr txBox="1"/>
+          <p:nvPr/>
+        </p:nvSpPr>
+        <p:spPr>
+          <a:xfrm>
+            <a:off x="502920" y="2520000"/>
+            <a:ext cx="380000" cy="380000"/>
+          </a:xfrm>
+          <a:prstGeom prst="rect">
+            <a:avLst/>
+          </a:prstGeom>
+          <a:noFill/>
+        </p:spPr>
+        <p:txBody>
+          <a:bodyPr wrap="square" lIns="0" rIns="0" tIns="0" bIns="0" anchor="ctr"/>
+          <a:lstStyle/>
+          <a:p>
+            <a:pPr algn="ctr">
+              <a:spcAft>
+                <a:spcPts val="0"/>
+              </a:spcAft>
+            </a:pPr>
+            <a:r>
+              <a:rPr sz="1400" b="1" i="0">
+                <a:solidFill>
+                  <a:srgbClr val="FFFFFF"/>
+                </a:solidFill>
+                <a:latin typeface="Arial"/>
+              </a:rPr>
+              <a:t xml:space="preserve">1</a:t>
+            </a:r>
+          </a:p>
+        </p:txBody>
+      </p:sp>
+      <p:sp>
+        <p:nvSpPr>
+          <p:cNvPr id="10" name="TextBox"/>
+          <p:cNvSpPr txBox="1"/>
+          <p:nvPr/>
+        </p:nvSpPr>
+        <p:spPr>
+          <a:xfrm>
+            <a:off x="1022920" y="2500000"/>
+            <a:ext cx="5450000" cy="720000"/>
+          </a:xfrm>
+          <a:prstGeom prst="rect">
+            <a:avLst/>
+          </a:prstGeom>
+          <a:noFill/>
+        </p:spPr>
+        <p:txBody>
+          <a:bodyPr wrap="square" lIns="0" rIns="0" tIns="0" bIns="0" anchor="t">
+            <a:spAutoFit/>
+          </a:bodyPr>
+          <a:lstStyle/>
+          <a:p>
+            <a:pPr algn="l">
+              <a:lnSpc>
+                <a:spcPct val="118000"/>
+              </a:lnSpc>
+              <a:spcAft>
+                <a:spcPts val="0"/>
+              </a:spcAft>
+            </a:pPr>
+            <a:r>
+              <a:rPr sz="1200" b="1" i="0">
+                <a:solidFill>
+                  <a:srgbClr val="141414"/>
+                </a:solidFill>
+                <a:latin typeface="Arial"/>
+              </a:rPr>
+              <a:t xml:space="preserve">Isolierter git-Worktree</a:t>
+            </a:r>
+          </a:p>
+          <a:p>
+            <a:pPr algn="l">
+              <a:lnSpc>
+                <a:spcPct val="118000"/>
+              </a:lnSpc>
+              <a:spcAft>
+                <a:spcPts val="0"/>
+              </a:spcAft>
+            </a:pPr>
+            <a:r>
+              <a:rPr sz="1000" b="0" i="0">
+                <a:solidFill>
+                  <a:srgbClr val="5C5C5C"/>
+                </a:solidFill>
+                <a:latin typeface="Arial"/>
+              </a:rPr>
+              <a:t xml:space="preserve">Wegwerf-Code entsteht getrennt vom Hauptzweig — nichts kontaminiert die Codebasis.</a:t>
+            </a:r>
+          </a:p>
+        </p:txBody>
+      </p:sp>
+      <p:sp>
+        <p:nvSpPr>
+          <p:cNvPr id="11" name="Num"/>
+          <p:cNvSpPr/>
+          <p:nvPr/>
+        </p:nvSpPr>
+        <p:spPr>
+          <a:xfrm>
+            <a:off x="502920" y="3255000"/>
+            <a:ext cx="380000" cy="380000"/>
+          </a:xfrm>
+          <a:prstGeom prst="rect">
+            <a:avLst/>
+          </a:prstGeom>
+          <a:solidFill>
+            <a:srgbClr val="FF3C00"/>
+          </a:solidFill>
+          <a:ln>
+            <a:noFill/>
+          </a:ln>
+          <a:effectLst/>
+        </p:spPr>
+        <p:txBody>
+          <a:bodyPr rtlCol="0" anchor="ctr" wrap="square" lIns="0" rIns="0" tIns="0" bIns="0"/>
+          <a:lstStyle/>
+          <a:p>
+            <a:pPr algn="ctr"/>
+          </a:p>
+        </p:txBody>
+      </p:sp>
+      <p:sp>
+        <p:nvSpPr>
+          <p:cNvPr id="12" name="TextBox"/>
+          <p:cNvSpPr txBox="1"/>
+          <p:nvPr/>
+        </p:nvSpPr>
+        <p:spPr>
+          <a:xfrm>
+            <a:off x="502920" y="3255000"/>
+            <a:ext cx="380000" cy="380000"/>
+          </a:xfrm>
+          <a:prstGeom prst="rect">
+            <a:avLst/>
+          </a:prstGeom>
+          <a:noFill/>
+        </p:spPr>
+        <p:txBody>
+          <a:bodyPr wrap="square" lIns="0" rIns="0" tIns="0" bIns="0" anchor="ctr"/>
+          <a:lstStyle/>
+          <a:p>
+            <a:pPr algn="ctr">
+              <a:spcAft>
+                <a:spcPts val="0"/>
+              </a:spcAft>
+            </a:pPr>
+            <a:r>
+              <a:rPr sz="1400" b="1" i="0">
+                <a:solidFill>
+                  <a:srgbClr val="FFFFFF"/>
+                </a:solidFill>
+                <a:latin typeface="Arial"/>
+              </a:rPr>
+              <a:t xml:space="preserve">2</a:t>
+            </a:r>
+          </a:p>
+        </p:txBody>
+      </p:sp>
+      <p:sp>
+        <p:nvSpPr>
+          <p:cNvPr id="13" name="TextBox"/>
+          <p:cNvSpPr txBox="1"/>
+          <p:nvPr/>
+        </p:nvSpPr>
+        <p:spPr>
+          <a:xfrm>
+            <a:off x="1022920" y="3235000"/>
+            <a:ext cx="5450000" cy="720000"/>
+          </a:xfrm>
+          <a:prstGeom prst="rect">
+            <a:avLst/>
+          </a:prstGeom>
+          <a:noFill/>
+        </p:spPr>
+        <p:txBody>
+          <a:bodyPr wrap="square" lIns="0" rIns="0" tIns="0" bIns="0" anchor="t">
+            <a:spAutoFit/>
+          </a:bodyPr>
+          <a:lstStyle/>
+          <a:p>
+            <a:pPr algn="l">
+              <a:lnSpc>
+                <a:spcPct val="118000"/>
+              </a:lnSpc>
+              <a:spcAft>
+                <a:spcPts val="0"/>
+              </a:spcAft>
+            </a:pPr>
+            <a:r>
+              <a:rPr sz="1200" b="1" i="0">
+                <a:solidFill>
+                  <a:srgbClr val="141414"/>
+                </a:solidFill>
+                <a:latin typeface="Arial"/>
+              </a:rPr>
+              <a:t xml:space="preserve">Keine Gates</a:t>
+            </a:r>
+          </a:p>
+          <a:p>
+            <a:pPr algn="l">
+              <a:lnSpc>
+                <a:spcPct val="118000"/>
+              </a:lnSpc>
+              <a:spcAft>
+                <a:spcPts val="0"/>
+              </a:spcAft>
+            </a:pPr>
+            <a:r>
+              <a:rPr sz="1000" b="0" i="0">
+                <a:solidFill>
+                  <a:srgbClr val="5C5C5C"/>
+                </a:solidFill>
+                <a:latin typeface="Arial"/>
+              </a:rPr>
+              <a:t xml:space="preserve">Kein Spec, kein Plan, keine QA — schnelles, rohes Ausprobieren einer Idee.</a:t>
+            </a:r>
+          </a:p>
+        </p:txBody>
+      </p:sp>
+      <p:sp>
+        <p:nvSpPr>
+          <p:cNvPr id="14" name="Num"/>
+          <p:cNvSpPr/>
+          <p:nvPr/>
+        </p:nvSpPr>
+        <p:spPr>
+          <a:xfrm>
+            <a:off x="502920" y="3990000"/>
+            <a:ext cx="380000" cy="380000"/>
+          </a:xfrm>
+          <a:prstGeom prst="rect">
+            <a:avLst/>
+          </a:prstGeom>
+          <a:solidFill>
+            <a:srgbClr val="FF3C00"/>
+          </a:solidFill>
+          <a:ln>
+            <a:noFill/>
+          </a:ln>
+          <a:effectLst/>
+        </p:spPr>
+        <p:txBody>
+          <a:bodyPr rtlCol="0" anchor="ctr" wrap="square" lIns="0" rIns="0" tIns="0" bIns="0"/>
+          <a:lstStyle/>
+          <a:p>
+            <a:pPr algn="ctr"/>
+          </a:p>
+        </p:txBody>
+      </p:sp>
+      <p:sp>
+        <p:nvSpPr>
+          <p:cNvPr id="15" name="TextBox"/>
+          <p:cNvSpPr txBox="1"/>
+          <p:nvPr/>
+        </p:nvSpPr>
+        <p:spPr>
+          <a:xfrm>
+            <a:off x="502920" y="3990000"/>
+            <a:ext cx="380000" cy="380000"/>
+          </a:xfrm>
+          <a:prstGeom prst="rect">
+            <a:avLst/>
+          </a:prstGeom>
+          <a:noFill/>
+        </p:spPr>
+        <p:txBody>
+          <a:bodyPr wrap="square" lIns="0" rIns="0" tIns="0" bIns="0" anchor="ctr"/>
+          <a:lstStyle/>
+          <a:p>
+            <a:pPr algn="ctr">
+              <a:spcAft>
+                <a:spcPts val="0"/>
+              </a:spcAft>
+            </a:pPr>
+            <a:r>
+              <a:rPr sz="1400" b="1" i="0">
+                <a:solidFill>
+                  <a:srgbClr val="FFFFFF"/>
+                </a:solidFill>
+                <a:latin typeface="Arial"/>
+              </a:rPr>
+              <a:t xml:space="preserve">3</a:t>
+            </a:r>
+          </a:p>
+        </p:txBody>
+      </p:sp>
+      <p:sp>
+        <p:nvSpPr>
+          <p:cNvPr id="16" name="TextBox"/>
+          <p:cNvSpPr txBox="1"/>
+          <p:nvPr/>
+        </p:nvSpPr>
+        <p:spPr>
+          <a:xfrm>
+            <a:off x="1022920" y="3970000"/>
+            <a:ext cx="5450000" cy="720000"/>
+          </a:xfrm>
+          <a:prstGeom prst="rect">
+            <a:avLst/>
+          </a:prstGeom>
+          <a:noFill/>
+        </p:spPr>
+        <p:txBody>
+          <a:bodyPr wrap="square" lIns="0" rIns="0" tIns="0" bIns="0" anchor="t">
+            <a:spAutoFit/>
+          </a:bodyPr>
+          <a:lstStyle/>
+          <a:p>
+            <a:pPr algn="l">
+              <a:lnSpc>
+                <a:spcPct val="118000"/>
+              </a:lnSpc>
+              <a:spcAft>
+                <a:spcPts val="0"/>
+              </a:spcAft>
+            </a:pPr>
+            <a:r>
+              <a:rPr sz="1200" b="1" i="0">
+                <a:solidFill>
+                  <a:srgbClr val="141414"/>
+                </a:solidFill>
+                <a:latin typeface="Arial"/>
+              </a:rPr>
+              <a:t xml:space="preserve">Explizite Entscheidung</a:t>
+            </a:r>
+          </a:p>
+          <a:p>
+            <a:pPr algn="l">
+              <a:lnSpc>
+                <a:spcPct val="118000"/>
+              </a:lnSpc>
+              <a:spcAft>
+                <a:spcPts val="0"/>
+              </a:spcAft>
+            </a:pPr>
+            <a:r>
+              <a:rPr sz="1000" b="0" i="0">
+                <a:solidFill>
+                  <a:srgbClr val="5C5C5C"/>
+                </a:solidFill>
+                <a:latin typeface="Arial"/>
+              </a:rPr>
+              <a:t xml:space="preserve">Am Ende steht bewusst ein klares go / no-go / iterate.</a:t>
+            </a:r>
+          </a:p>
+        </p:txBody>
+      </p:sp>
+      <p:sp>
+        <p:nvSpPr>
+          <p:cNvPr id="17" name="Num"/>
+          <p:cNvSpPr/>
+          <p:nvPr/>
+        </p:nvSpPr>
+        <p:spPr>
+          <a:xfrm>
+            <a:off x="502920" y="4725000"/>
+            <a:ext cx="380000" cy="380000"/>
+          </a:xfrm>
+          <a:prstGeom prst="rect">
+            <a:avLst/>
+          </a:prstGeom>
+          <a:solidFill>
+            <a:srgbClr val="FF3C00"/>
+          </a:solidFill>
+          <a:ln>
+            <a:noFill/>
+          </a:ln>
+          <a:effectLst/>
+        </p:spPr>
+        <p:txBody>
+          <a:bodyPr rtlCol="0" anchor="ctr" wrap="square" lIns="0" rIns="0" tIns="0" bIns="0"/>
+          <a:lstStyle/>
+          <a:p>
+            <a:pPr algn="ctr"/>
+          </a:p>
+        </p:txBody>
+      </p:sp>
+      <p:sp>
+        <p:nvSpPr>
+          <p:cNvPr id="18" name="TextBox"/>
+          <p:cNvSpPr txBox="1"/>
+          <p:nvPr/>
+        </p:nvSpPr>
+        <p:spPr>
+          <a:xfrm>
+            <a:off x="502920" y="4725000"/>
+            <a:ext cx="380000" cy="380000"/>
+          </a:xfrm>
+          <a:prstGeom prst="rect">
+            <a:avLst/>
+          </a:prstGeom>
+          <a:noFill/>
+        </p:spPr>
+        <p:txBody>
+          <a:bodyPr wrap="square" lIns="0" rIns="0" tIns="0" bIns="0" anchor="ctr"/>
+          <a:lstStyle/>
+          <a:p>
+            <a:pPr algn="ctr">
+              <a:spcAft>
+                <a:spcPts val="0"/>
+              </a:spcAft>
+            </a:pPr>
+            <a:r>
+              <a:rPr sz="1400" b="1" i="0">
+                <a:solidFill>
+                  <a:srgbClr val="FFFFFF"/>
+                </a:solidFill>
+                <a:latin typeface="Arial"/>
+              </a:rPr>
+              <a:t xml:space="preserve">4</a:t>
+            </a:r>
+          </a:p>
+        </p:txBody>
+      </p:sp>
+      <p:sp>
+        <p:nvSpPr>
+          <p:cNvPr id="19" name="TextBox"/>
+          <p:cNvSpPr txBox="1"/>
+          <p:nvPr/>
+        </p:nvSpPr>
+        <p:spPr>
+          <a:xfrm>
+            <a:off x="1022920" y="4705000"/>
+            <a:ext cx="5450000" cy="720000"/>
+          </a:xfrm>
+          <a:prstGeom prst="rect">
+            <a:avLst/>
+          </a:prstGeom>
+          <a:noFill/>
+        </p:spPr>
+        <p:txBody>
+          <a:bodyPr wrap="square" lIns="0" rIns="0" tIns="0" bIns="0" anchor="t">
+            <a:spAutoFit/>
+          </a:bodyPr>
+          <a:lstStyle/>
+          <a:p>
+            <a:pPr algn="l">
+              <a:lnSpc>
+                <a:spcPct val="118000"/>
+              </a:lnSpc>
+              <a:spcAft>
+                <a:spcPts val="0"/>
+              </a:spcAft>
+            </a:pPr>
+            <a:r>
+              <a:rPr sz="1200" b="1" i="0">
+                <a:solidFill>
+                  <a:srgbClr val="141414"/>
+                </a:solidFill>
+                <a:latin typeface="Arial"/>
+              </a:rPr>
+              <a:t xml:space="preserve">Code wird verworfen</a:t>
+            </a:r>
+          </a:p>
+          <a:p>
+            <a:pPr algn="l">
+              <a:lnSpc>
+                <a:spcPct val="118000"/>
+              </a:lnSpc>
+              <a:spcAft>
+                <a:spcPts val="0"/>
+              </a:spcAft>
+            </a:pPr>
+            <a:r>
+              <a:rPr sz="1000" b="0" i="0">
+                <a:solidFill>
+                  <a:srgbClr val="5C5C5C"/>
+                </a:solidFill>
+                <a:latin typeface="Arial"/>
+              </a:rPr>
+              <a:t xml:space="preserve">Der Code wird immer gelöscht — es bleibt allein die Erkenntnis.</a:t>
+            </a:r>
+          </a:p>
+        </p:txBody>
+      </p:sp>
+      <p:sp>
+        <p:nvSpPr>
+          <p:cNvPr id="20" name="ProtoCard"/>
+          <p:cNvSpPr/>
+          <p:nvPr/>
+        </p:nvSpPr>
+        <p:spPr>
+          <a:xfrm>
+            <a:off x="6900000" y="2057400"/>
+            <a:ext cx="4758775" cy="3300000"/>
+          </a:xfrm>
+          <a:prstGeom prst="rect">
+            <a:avLst/>
+          </a:prstGeom>
+          <a:solidFill>
+            <a:srgbClr val="141414"/>
+          </a:solidFill>
+          <a:ln>
+            <a:noFill/>
+          </a:ln>
+          <a:effectLst/>
+        </p:spPr>
+        <p:txBody>
+          <a:bodyPr rtlCol="0" anchor="ctr" wrap="square" lIns="0" rIns="0" tIns="0" bIns="0"/>
+          <a:lstStyle/>
+          <a:p>
+            <a:pPr algn="ctr"/>
+          </a:p>
+        </p:txBody>
+      </p:sp>
+      <p:sp>
+        <p:nvSpPr>
+          <p:cNvPr id="21" name="TextBox"/>
+          <p:cNvSpPr txBox="1"/>
+          <p:nvPr/>
+        </p:nvSpPr>
+        <p:spPr>
+          <a:xfrm>
+            <a:off x="7200000" y="2337400"/>
+            <a:ext cx="4158775" cy="500000"/>
+          </a:xfrm>
+          <a:prstGeom prst="rect">
+            <a:avLst/>
+          </a:prstGeom>
+          <a:noFill/>
+        </p:spPr>
+        <p:txBody>
+          <a:bodyPr wrap="square" lIns="0" rIns="0" tIns="0" bIns="0" anchor="t"/>
+          <a:lstStyle/>
+          <a:p>
+            <a:pPr algn="l">
+              <a:spcAft>
+                <a:spcPts val="0"/>
+              </a:spcAft>
+            </a:pPr>
+            <a:r>
+              <a:rPr sz="2000" b="1" i="0">
+                <a:solidFill>
+                  <a:srgbClr val="FFFFFF"/>
+                </a:solidFill>
+                <a:latin typeface="Courier New"/>
+              </a:rPr>
+              <a:t xml:space="preserve">/prototype</a:t>
+            </a:r>
+          </a:p>
+        </p:txBody>
+      </p:sp>
+      <p:sp>
+        <p:nvSpPr>
+          <p:cNvPr id="22" name="TextBox"/>
+          <p:cNvSpPr txBox="1"/>
+          <p:nvPr/>
+        </p:nvSpPr>
+        <p:spPr>
+          <a:xfrm>
+            <a:off x="7200000" y="3057400"/>
+            <a:ext cx="4158775" cy="240000"/>
+          </a:xfrm>
+          <a:prstGeom prst="rect">
+            <a:avLst/>
+          </a:prstGeom>
+          <a:noFill/>
+        </p:spPr>
+        <p:txBody>
+          <a:bodyPr wrap="square" lIns="0" rIns="0" tIns="0" bIns="0" anchor="t">
+            <a:spAutoFit/>
+          </a:bodyPr>
+          <a:lstStyle/>
+          <a:p>
+            <a:pPr algn="l">
+              <a:spcAft>
+                <a:spcPts val="0"/>
+              </a:spcAft>
+            </a:pPr>
+            <a:r>
+              <a:rPr sz="900" b="1" i="0" spc="120">
+                <a:solidFill>
+                  <a:srgbClr val="FF3C00"/>
+                </a:solidFill>
+                <a:latin typeface="Arial"/>
+              </a:rPr>
+              <a:t xml:space="preserve">OPTIONALER EINSTIEG</a:t>
+            </a:r>
+          </a:p>
+        </p:txBody>
+      </p:sp>
+      <p:sp>
+        <p:nvSpPr>
+          <p:cNvPr id="23" name="TextBox"/>
+          <p:cNvSpPr txBox="1"/>
+          <p:nvPr/>
+        </p:nvSpPr>
+        <p:spPr>
+          <a:xfrm>
+            <a:off x="7200000" y="3377400"/>
+            <a:ext cx="4158775" cy="560000"/>
+          </a:xfrm>
+          <a:prstGeom prst="rect">
+            <a:avLst/>
+          </a:prstGeom>
+          <a:noFill/>
+        </p:spPr>
+        <p:txBody>
+          <a:bodyPr wrap="square" lIns="0" rIns="0" tIns="0" bIns="0" anchor="t">
+            <a:spAutoFit/>
+          </a:bodyPr>
+          <a:lstStyle/>
+          <a:p>
+            <a:pPr algn="l">
+              <a:lnSpc>
+                <a:spcPct val="120000"/>
+              </a:lnSpc>
+              <a:spcAft>
+                <a:spcPts val="0"/>
+              </a:spcAft>
+            </a:pPr>
+            <a:r>
+              <a:rPr sz="1050" b="0" i="0">
+                <a:solidFill>
+                  <a:srgbClr val="C8C8C8"/>
+                </a:solidFill>
+                <a:latin typeface="Arial"/>
+              </a:rPr>
+              <a:t xml:space="preserve">Vor mission-architect, feature-architect oder fact-finder — noch bevor die Kette startet.</a:t>
+            </a:r>
+          </a:p>
+        </p:txBody>
+      </p:sp>
+      <p:sp>
+        <p:nvSpPr>
+          <p:cNvPr id="24" name="Line"/>
+          <p:cNvSpPr/>
+          <p:nvPr/>
+        </p:nvSpPr>
+        <p:spPr>
+          <a:xfrm>
+            <a:off x="7200000" y="4137400"/>
+            <a:ext cx="4158775" cy="0"/>
+          </a:xfrm>
+          <a:prstGeom prst="line">
+            <a:avLst/>
+          </a:prstGeom>
+          <a:ln w="9525">
+            <a:solidFill>
+              <a:srgbClr val="3D3D3D"/>
+            </a:solidFill>
+          </a:ln>
+          <a:effectLst/>
+        </p:spPr>
+        <p:txBody>
+          <a:bodyPr/>
+          <a:lstStyle/>
+          <a:p/>
+        </p:txBody>
+      </p:sp>
+      <p:sp>
+        <p:nvSpPr>
+          <p:cNvPr id="25" name="TextBox"/>
+          <p:cNvSpPr txBox="1"/>
+          <p:nvPr/>
+        </p:nvSpPr>
+        <p:spPr>
+          <a:xfrm>
+            <a:off x="7200000" y="4317400"/>
+            <a:ext cx="4158775" cy="360000"/>
+          </a:xfrm>
+          <a:prstGeom prst="rect">
+            <a:avLst/>
+          </a:prstGeom>
+          <a:noFill/>
+        </p:spPr>
+        <p:txBody>
+          <a:bodyPr wrap="square" lIns="0" rIns="0" tIns="0" bIns="0" anchor="t">
+            <a:spAutoFit/>
+          </a:bodyPr>
+          <a:lstStyle/>
+          <a:p>
+            <a:pPr algn="l">
+              <a:spcAft>
+                <a:spcPts val="0"/>
+              </a:spcAft>
+            </a:pPr>
+            <a:r>
+              <a:rPr sz="1250" b="1" i="0">
+                <a:solidFill>
+                  <a:srgbClr val="FF3C00"/>
+                </a:solidFill>
+                <a:latin typeface="Arial"/>
+              </a:rPr>
+              <a:t xml:space="preserve">→ </a:t>
+            </a:r>
+            <a:r>
+              <a:rPr sz="1250" b="1" i="0">
+                <a:solidFill>
+                  <a:srgbClr val="FF3C00"/>
+                </a:solidFill>
+                <a:latin typeface="Courier New"/>
+              </a:rPr>
+              <a:t xml:space="preserve">thoughts/shared/prototypes/</a:t>
+            </a:r>
+          </a:p>
+        </p:txBody>
+      </p:sp>
+      <p:sp>
+        <p:nvSpPr>
+          <p:cNvPr id="26" name="TextBox"/>
+          <p:cNvSpPr txBox="1"/>
+          <p:nvPr/>
+        </p:nvSpPr>
+        <p:spPr>
+          <a:xfrm>
+            <a:off x="7200000" y="4757400"/>
+            <a:ext cx="4158775" cy="360000"/>
+          </a:xfrm>
+          <a:prstGeom prst="rect">
+            <a:avLst/>
+          </a:prstGeom>
+          <a:noFill/>
+        </p:spPr>
+        <p:txBody>
+          <a:bodyPr wrap="square" lIns="0" rIns="0" tIns="0" bIns="0" anchor="t">
+            <a:spAutoFit/>
+          </a:bodyPr>
+          <a:lstStyle/>
+          <a:p>
+            <a:pPr algn="l">
+              <a:lnSpc>
+                <a:spcPct val="115000"/>
+              </a:lnSpc>
+              <a:spcAft>
+                <a:spcPts val="0"/>
+              </a:spcAft>
+            </a:pPr>
+            <a:r>
+              <a:rPr sz="950" b="0" i="0">
+                <a:solidFill>
+                  <a:srgbClr val="C8C8C8"/>
+                </a:solidFill>
+                <a:latin typeface="Arial"/>
+              </a:rPr>
+              <a:t xml:space="preserve">Learnings-Notiz — immer, unabhängig vom Ergebnis.</a:t>
+            </a:r>
+          </a:p>
+        </p:txBody>
+      </p:sp>
+      <p:sp>
+        <p:nvSpPr>
+          <p:cNvPr id="27" name="Banner"/>
+          <p:cNvSpPr/>
+          <p:nvPr/>
+        </p:nvSpPr>
+        <p:spPr>
+          <a:xfrm>
+            <a:off x="502920" y="5650992"/>
+            <a:ext cx="11183112" cy="566928"/>
+          </a:xfrm>
+          <a:prstGeom prst="rect">
+            <a:avLst/>
+          </a:prstGeom>
+          <a:solidFill>
+            <a:srgbClr val="FF3C00"/>
+          </a:solidFill>
+          <a:ln>
+            <a:noFill/>
+          </a:ln>
+          <a:effectLst/>
+        </p:spPr>
+        <p:txBody>
+          <a:bodyPr rtlCol="0" anchor="ctr" wrap="square" lIns="0" rIns="0" tIns="0" bIns="0"/>
+          <a:lstStyle/>
+          <a:p>
+            <a:pPr algn="ctr"/>
+          </a:p>
+        </p:txBody>
+      </p:sp>
+      <p:sp>
+        <p:nvSpPr>
+          <p:cNvPr id="28" name="TextBox"/>
+          <p:cNvSpPr txBox="1"/>
+          <p:nvPr/>
+        </p:nvSpPr>
+        <p:spPr>
+          <a:xfrm>
+            <a:off x="502920" y="5650992"/>
+            <a:ext cx="11183112" cy="566928"/>
+          </a:xfrm>
+          <a:prstGeom prst="rect">
+            <a:avLst/>
+          </a:prstGeom>
+          <a:noFill/>
+        </p:spPr>
+        <p:txBody>
+          <a:bodyPr wrap="square" lIns="228600" rIns="0" tIns="0" bIns="0" anchor="ctr"/>
+          <a:lstStyle/>
+          <a:p>
+            <a:pPr algn="ctr">
+              <a:lnSpc>
+                <a:spcPct val="115000"/>
+              </a:lnSpc>
+              <a:spcAft>
+                <a:spcPts val="0"/>
+              </a:spcAft>
+            </a:pPr>
+            <a:r>
+              <a:rPr sz="1250" b="1" i="0">
+                <a:solidFill>
+                  <a:srgbClr val="FFFFFF"/>
+                </a:solidFill>
+                <a:latin typeface="Arial"/>
+              </a:rPr>
+              <a:t xml:space="preserve">Kein Ersatz für den Prozess, sondern ein bewusstes Ventil davor — die Erkenntnis fließt zurück in Mission, Feature oder Fakten.</a:t>
+            </a:r>
+          </a:p>
+        </p:txBody>
+      </p:sp>
+      <p:sp>
+        <p:nvSpPr>
+          <p:cNvPr id="29" name="TextBox"/>
+          <p:cNvSpPr txBox="1"/>
+          <p:nvPr/>
+        </p:nvSpPr>
+        <p:spPr>
+          <a:xfrm>
+            <a:off x="502920" y="6455664"/>
+            <a:ext cx="914400" cy="274320"/>
+          </a:xfrm>
+          <a:prstGeom prst="rect">
+            <a:avLst/>
+          </a:prstGeom>
+          <a:noFill/>
+        </p:spPr>
+        <p:txBody>
+          <a:bodyPr wrap="square" lIns="0" rIns="0" tIns="0" bIns="0" anchor="t">
+            <a:spAutoFit/>
+          </a:bodyPr>
+          <a:lstStyle/>
+          <a:p>
+            <a:pPr algn="l">
+              <a:spcAft>
+                <a:spcPts val="0"/>
+              </a:spcAft>
+            </a:pPr>
+            <a:r>
+              <a:rPr sz="1000" b="0" i="0">
+                <a:solidFill>
+                  <a:srgbClr val="8A8A8A"/>
+                </a:solidFill>
+                <a:latin typeface="Arial"/>
+              </a:rPr>
+              <a:t xml:space="preserve">14</a:t>
+            </a:r>
+          </a:p>
+        </p:txBody>
+      </p:sp>
+      <p:pic>
+        <p:nvPicPr>
+          <p:cNvPr id="30" name="Picture" descr="vier-logo.png"/>
+          <p:cNvPicPr>
+            <a:picLocks noChangeAspect="1"/>
+          </p:cNvPicPr>
+          <p:nvPr/>
+        </p:nvPicPr>
+        <p:blipFill>
+          <a:blip r:embed="rId2"/>
+          <a:stretch>
+            <a:fillRect/>
+          </a:stretch>
+        </p:blipFill>
+        <p:spPr>
+          <a:xfrm>
+            <a:off x="10911535" y="6400800"/>
+            <a:ext cx="777240" cy="297864"/>
+          </a:xfrm>
+          <a:prstGeom prst="rect">
+            <a:avLst/>
+          </a:prstGeom>
+        </p:spPr>
+      </p:pic>
+    </p:spTree>
+  </p:cSld>
+  <p:clrMapOvr>
+    <a:masterClrMapping/>
+  </p:clrMapOvr>
+</p:sld>
+</file>
+
+<file path=ppt/slides/slide21.xml><?xml version="1.0" encoding="utf-8"?>
+<p:sld xmlns:a="http://schemas.openxmlformats.org/drawingml/2006/main" xmlns:p="http://schemas.openxmlformats.org/presentationml/2006/main" xmlns:r="http://schemas.openxmlformats.org/officeDocument/2006/relationships">
+  <p:cSld>
+    <p:spTree>
+      <p:nvGrpSpPr>
+        <p:cNvPr id="1" name=""/>
+        <p:cNvGrpSpPr/>
+        <p:nvPr/>
+      </p:nvGrpSpPr>
+      <p:grpSpPr/>
+      <p:sp>
+        <p:nvSpPr>
+          <p:cNvPr id="2" name="TextBox"/>
+          <p:cNvSpPr txBox="1"/>
+          <p:nvPr/>
+        </p:nvSpPr>
+        <p:spPr>
+          <a:xfrm>
+            <a:off x="502920" y="365760"/>
+            <a:ext cx="11155680" cy="274320"/>
+          </a:xfrm>
+          <a:prstGeom prst="rect">
+            <a:avLst/>
+          </a:prstGeom>
+          <a:noFill/>
+        </p:spPr>
+        <p:txBody>
+          <a:bodyPr wrap="square" lIns="0" rIns="0" tIns="0" bIns="0" anchor="t">
+            <a:spAutoFit/>
+          </a:bodyPr>
+          <a:lstStyle/>
+          <a:p>
+            <a:pPr algn="l">
+              <a:spcAft>
+                <a:spcPts val="0"/>
+              </a:spcAft>
+            </a:pPr>
+            <a:r>
+              <a:rPr sz="1100" b="1" i="0" spc="240">
+                <a:solidFill>
+                  <a:srgbClr val="FF3C00"/>
+                </a:solidFill>
+                <a:latin typeface="Arial"/>
+              </a:rPr>
+              <a:t xml:space="preserve">WARUM SO VIELE DOKUMENTE</a:t>
+            </a:r>
+          </a:p>
+        </p:txBody>
+      </p:sp>
+      <p:sp>
+        <p:nvSpPr>
+          <p:cNvPr id="3" name="TextBox"/>
+          <p:cNvSpPr txBox="1"/>
+          <p:nvPr/>
+        </p:nvSpPr>
+        <p:spPr>
+          <a:xfrm>
+            <a:off x="502920" y="667512"/>
+            <a:ext cx="11155680" cy="566928"/>
+          </a:xfrm>
+          <a:prstGeom prst="rect">
+            <a:avLst/>
+          </a:prstGeom>
+          <a:noFill/>
+        </p:spPr>
+        <p:txBody>
+          <a:bodyPr wrap="square" lIns="0" rIns="0" tIns="0" bIns="0" anchor="t">
+            <a:spAutoFit/>
+          </a:bodyPr>
+          <a:lstStyle/>
+          <a:p>
+            <a:pPr algn="l">
+              <a:lnSpc>
+                <a:spcPct val="102000"/>
+              </a:lnSpc>
+              <a:spcAft>
+                <a:spcPts val="0"/>
+              </a:spcAft>
+            </a:pPr>
+            <a:r>
+              <a:rPr sz="3000" b="1" i="0">
+                <a:solidFill>
+                  <a:srgbClr val="141414"/>
+                </a:solidFill>
+                <a:latin typeface="Arial"/>
+              </a:rPr>
+              <a:t xml:space="preserve">Damit die KI das Projekt versteht</a:t>
+            </a:r>
+          </a:p>
+        </p:txBody>
+      </p:sp>
+      <p:sp>
+        <p:nvSpPr>
+          <p:cNvPr id="4" name="Rule"/>
+          <p:cNvSpPr/>
+          <p:nvPr/>
+        </p:nvSpPr>
+        <p:spPr>
+          <a:xfrm>
+            <a:off x="502920" y="1216152"/>
+            <a:ext cx="1051560" cy="45720"/>
+          </a:xfrm>
+          <a:prstGeom prst="rect">
+            <a:avLst/>
+          </a:prstGeom>
+          <a:solidFill>
+            <a:srgbClr val="FF3C00"/>
+          </a:solidFill>
+          <a:ln>
+            <a:noFill/>
+          </a:ln>
+          <a:effectLst/>
+        </p:spPr>
+        <p:txBody>
+          <a:bodyPr rtlCol="0" anchor="ctr" wrap="square" lIns="0" rIns="0" tIns="0" bIns="0"/>
+          <a:lstStyle/>
+          <a:p>
+            <a:pPr algn="ctr"/>
+          </a:p>
+        </p:txBody>
+      </p:sp>
+      <p:sp>
+        <p:nvSpPr>
+          <p:cNvPr id="5" name="TextBox"/>
+          <p:cNvSpPr txBox="1"/>
+          <p:nvPr/>
+        </p:nvSpPr>
+        <p:spPr>
+          <a:xfrm>
+            <a:off x="502920" y="1481328"/>
+            <a:ext cx="10600000" cy="560000"/>
+          </a:xfrm>
+          <a:prstGeom prst="rect">
+            <a:avLst/>
+          </a:prstGeom>
+          <a:noFill/>
+        </p:spPr>
+        <p:txBody>
+          <a:bodyPr wrap="square" lIns="0" rIns="0" tIns="0" bIns="0" anchor="t">
+            <a:spAutoFit/>
+          </a:bodyPr>
+          <a:lstStyle/>
+          <a:p>
+            <a:pPr algn="l">
+              <a:lnSpc>
+                <a:spcPct val="130000"/>
+              </a:lnSpc>
+              <a:spcAft>
+                <a:spcPts val="0"/>
+              </a:spcAft>
+            </a:pPr>
+            <a:r>
+              <a:rPr sz="1200" b="0" i="0">
+                <a:solidFill>
+                  <a:srgbClr val="5C5C5C"/>
+                </a:solidFill>
+                <a:latin typeface="Arial"/>
+              </a:rPr>
+              <a:t xml:space="preserve">Jedes Artefakt ist Kontext. Keine Entscheidung entsteht in Isolation — sie stützt sich auf die Absicht des Projekts und auf alle bisher getroffenen Entscheidungen.</a:t>
+            </a:r>
+          </a:p>
+        </p:txBody>
+      </p:sp>
+      <p:sp>
+        <p:nvSpPr>
+          <p:cNvPr id="6" name="Num"/>
+          <p:cNvSpPr/>
+          <p:nvPr/>
+        </p:nvSpPr>
+        <p:spPr>
+          <a:xfrm>
+            <a:off x="502920" y="2450000"/>
+            <a:ext cx="380000" cy="380000"/>
+          </a:xfrm>
+          <a:prstGeom prst="rect">
+            <a:avLst/>
+          </a:prstGeom>
+          <a:solidFill>
+            <a:srgbClr val="FF3C00"/>
+          </a:solidFill>
+          <a:ln>
+            <a:noFill/>
+          </a:ln>
+          <a:effectLst/>
+        </p:spPr>
+        <p:txBody>
+          <a:bodyPr rtlCol="0" anchor="ctr" wrap="square" lIns="0" rIns="0" tIns="0" bIns="0"/>
+          <a:lstStyle/>
+          <a:p>
+            <a:pPr algn="ctr"/>
+          </a:p>
+        </p:txBody>
+      </p:sp>
+      <p:sp>
+        <p:nvSpPr>
+          <p:cNvPr id="7" name="TextBox"/>
+          <p:cNvSpPr txBox="1"/>
+          <p:nvPr/>
+        </p:nvSpPr>
+        <p:spPr>
+          <a:xfrm>
+            <a:off x="502920" y="2450000"/>
+            <a:ext cx="380000" cy="380000"/>
+          </a:xfrm>
+          <a:prstGeom prst="rect">
+            <a:avLst/>
+          </a:prstGeom>
+          <a:noFill/>
+        </p:spPr>
+        <p:txBody>
+          <a:bodyPr wrap="square" lIns="0" rIns="0" tIns="0" bIns="0" anchor="ctr"/>
+          <a:lstStyle/>
+          <a:p>
+            <a:pPr algn="ctr">
+              <a:spcAft>
+                <a:spcPts val="0"/>
+              </a:spcAft>
+            </a:pPr>
+            <a:r>
+              <a:rPr sz="1400" b="1" i="0">
+                <a:solidFill>
+                  <a:srgbClr val="FFFFFF"/>
+                </a:solidFill>
+                <a:latin typeface="Arial"/>
+              </a:rPr>
+              <a:t xml:space="preserve">1</a:t>
+            </a:r>
+          </a:p>
+        </p:txBody>
+      </p:sp>
+      <p:sp>
+        <p:nvSpPr>
+          <p:cNvPr id="8" name="TextBox"/>
+          <p:cNvSpPr txBox="1"/>
+          <p:nvPr/>
+        </p:nvSpPr>
+        <p:spPr>
+          <a:xfrm>
+            <a:off x="1022920" y="2430000"/>
+            <a:ext cx="5250000" cy="820000"/>
+          </a:xfrm>
+          <a:prstGeom prst="rect">
+            <a:avLst/>
+          </a:prstGeom>
+          <a:noFill/>
+        </p:spPr>
+        <p:txBody>
+          <a:bodyPr wrap="square" lIns="0" rIns="0" tIns="0" bIns="0" anchor="t">
+            <a:spAutoFit/>
+          </a:bodyPr>
+          <a:lstStyle/>
+          <a:p>
+            <a:pPr algn="l">
+              <a:lnSpc>
+                <a:spcPct val="120000"/>
+              </a:lnSpc>
+              <a:spcAft>
+                <a:spcPts val="0"/>
+              </a:spcAft>
+            </a:pPr>
+            <a:r>
+              <a:rPr sz="1250" b="1" i="0">
+                <a:solidFill>
+                  <a:srgbClr val="141414"/>
+                </a:solidFill>
+                <a:latin typeface="Arial"/>
+              </a:rPr>
+              <a:t xml:space="preserve">Das Modell hat kein Gedächtnis</a:t>
+            </a:r>
+          </a:p>
+          <a:p>
+            <a:pPr algn="l">
+              <a:lnSpc>
+                <a:spcPct val="120000"/>
+              </a:lnSpc>
+              <a:spcAft>
+                <a:spcPts val="0"/>
+              </a:spcAft>
+            </a:pPr>
+            <a:r>
+              <a:rPr sz="1050" b="0" i="0">
+                <a:solidFill>
+                  <a:srgbClr val="5C5C5C"/>
+                </a:solidFill>
+                <a:latin typeface="Arial"/>
+              </a:rPr>
+              <a:t xml:space="preserve">Zwischen den Schritten vergisst die KI alles Vorherige. Die Artefakte sind ihr persistenter, gemeinsamer Kontext.</a:t>
+            </a:r>
+          </a:p>
+        </p:txBody>
+      </p:sp>
+      <p:sp>
+        <p:nvSpPr>
+          <p:cNvPr id="9" name="Num"/>
+          <p:cNvSpPr/>
+          <p:nvPr/>
+        </p:nvSpPr>
+        <p:spPr>
+          <a:xfrm>
+            <a:off x="502920" y="3400000"/>
+            <a:ext cx="380000" cy="380000"/>
+          </a:xfrm>
+          <a:prstGeom prst="rect">
+            <a:avLst/>
+          </a:prstGeom>
+          <a:solidFill>
+            <a:srgbClr val="FF3C00"/>
+          </a:solidFill>
+          <a:ln>
+            <a:noFill/>
+          </a:ln>
+          <a:effectLst/>
+        </p:spPr>
+        <p:txBody>
+          <a:bodyPr rtlCol="0" anchor="ctr" wrap="square" lIns="0" rIns="0" tIns="0" bIns="0"/>
+          <a:lstStyle/>
+          <a:p>
+            <a:pPr algn="ctr"/>
+          </a:p>
+        </p:txBody>
+      </p:sp>
+      <p:sp>
+        <p:nvSpPr>
+          <p:cNvPr id="10" name="TextBox"/>
+          <p:cNvSpPr txBox="1"/>
+          <p:nvPr/>
+        </p:nvSpPr>
+        <p:spPr>
+          <a:xfrm>
+            <a:off x="502920" y="3400000"/>
+            <a:ext cx="380000" cy="380000"/>
+          </a:xfrm>
+          <a:prstGeom prst="rect">
+            <a:avLst/>
+          </a:prstGeom>
+          <a:noFill/>
+        </p:spPr>
+        <p:txBody>
+          <a:bodyPr wrap="square" lIns="0" rIns="0" tIns="0" bIns="0" anchor="ctr"/>
+          <a:lstStyle/>
+          <a:p>
+            <a:pPr algn="ctr">
+              <a:spcAft>
+                <a:spcPts val="0"/>
+              </a:spcAft>
+            </a:pPr>
+            <a:r>
+              <a:rPr sz="1400" b="1" i="0">
+                <a:solidFill>
+                  <a:srgbClr val="FFFFFF"/>
+                </a:solidFill>
+                <a:latin typeface="Arial"/>
+              </a:rPr>
+              <a:t xml:space="preserve">2</a:t>
+            </a:r>
+          </a:p>
+        </p:txBody>
+      </p:sp>
+      <p:sp>
+        <p:nvSpPr>
+          <p:cNvPr id="11" name="TextBox"/>
+          <p:cNvSpPr txBox="1"/>
+          <p:nvPr/>
+        </p:nvSpPr>
+        <p:spPr>
+          <a:xfrm>
+            <a:off x="1022920" y="3380000"/>
+            <a:ext cx="5250000" cy="820000"/>
+          </a:xfrm>
+          <a:prstGeom prst="rect">
+            <a:avLst/>
+          </a:prstGeom>
+          <a:noFill/>
+        </p:spPr>
+        <p:txBody>
+          <a:bodyPr wrap="square" lIns="0" rIns="0" tIns="0" bIns="0" anchor="t">
+            <a:spAutoFit/>
+          </a:bodyPr>
+          <a:lstStyle/>
+          <a:p>
+            <a:pPr algn="l">
+              <a:lnSpc>
+                <a:spcPct val="120000"/>
+              </a:lnSpc>
+              <a:spcAft>
+                <a:spcPts val="0"/>
+              </a:spcAft>
+            </a:pPr>
+            <a:r>
+              <a:rPr sz="1250" b="1" i="0">
+                <a:solidFill>
+                  <a:srgbClr val="141414"/>
+                </a:solidFill>
+                <a:latin typeface="Arial"/>
+              </a:rPr>
+              <a:t xml:space="preserve">Keine Entscheidung in Isolation</a:t>
+            </a:r>
+          </a:p>
+          <a:p>
+            <a:pPr algn="l">
+              <a:lnSpc>
+                <a:spcPct val="120000"/>
+              </a:lnSpc>
+              <a:spcAft>
+                <a:spcPts val="0"/>
+              </a:spcAft>
+            </a:pPr>
+            <a:r>
+              <a:rPr sz="1050" b="0" i="0">
+                <a:solidFill>
+                  <a:srgbClr val="5C5C5C"/>
+                </a:solidFill>
+                <a:latin typeface="Arial"/>
+              </a:rPr>
+              <a:t xml:space="preserve">Jede neue Entscheidung setzt die Absicht des Projekts und alle bisher getroffenen Entscheidungen voraus.</a:t>
+            </a:r>
+          </a:p>
+        </p:txBody>
+      </p:sp>
+      <p:sp>
+        <p:nvSpPr>
+          <p:cNvPr id="12" name="Num"/>
+          <p:cNvSpPr/>
+          <p:nvPr/>
+        </p:nvSpPr>
+        <p:spPr>
+          <a:xfrm>
+            <a:off x="502920" y="4350000"/>
+            <a:ext cx="380000" cy="380000"/>
+          </a:xfrm>
+          <a:prstGeom prst="rect">
+            <a:avLst/>
+          </a:prstGeom>
+          <a:solidFill>
+            <a:srgbClr val="FF3C00"/>
+          </a:solidFill>
+          <a:ln>
+            <a:noFill/>
+          </a:ln>
+          <a:effectLst/>
+        </p:spPr>
+        <p:txBody>
+          <a:bodyPr rtlCol="0" anchor="ctr" wrap="square" lIns="0" rIns="0" tIns="0" bIns="0"/>
+          <a:lstStyle/>
+          <a:p>
+            <a:pPr algn="ctr"/>
+          </a:p>
+        </p:txBody>
+      </p:sp>
+      <p:sp>
+        <p:nvSpPr>
+          <p:cNvPr id="13" name="TextBox"/>
+          <p:cNvSpPr txBox="1"/>
+          <p:nvPr/>
+        </p:nvSpPr>
+        <p:spPr>
+          <a:xfrm>
+            <a:off x="502920" y="4350000"/>
+            <a:ext cx="380000" cy="380000"/>
+          </a:xfrm>
+          <a:prstGeom prst="rect">
+            <a:avLst/>
+          </a:prstGeom>
+          <a:noFill/>
+        </p:spPr>
+        <p:txBody>
+          <a:bodyPr wrap="square" lIns="0" rIns="0" tIns="0" bIns="0" anchor="ctr"/>
+          <a:lstStyle/>
+          <a:p>
+            <a:pPr algn="ctr">
+              <a:spcAft>
+                <a:spcPts val="0"/>
+              </a:spcAft>
+            </a:pPr>
+            <a:r>
+              <a:rPr sz="1400" b="1" i="0">
+                <a:solidFill>
+                  <a:srgbClr val="FFFFFF"/>
+                </a:solidFill>
+                <a:latin typeface="Arial"/>
+              </a:rPr>
+              <a:t xml:space="preserve">3</a:t>
+            </a:r>
+          </a:p>
+        </p:txBody>
+      </p:sp>
+      <p:sp>
+        <p:nvSpPr>
+          <p:cNvPr id="14" name="TextBox"/>
+          <p:cNvSpPr txBox="1"/>
+          <p:nvPr/>
+        </p:nvSpPr>
+        <p:spPr>
+          <a:xfrm>
+            <a:off x="1022920" y="4330000"/>
+            <a:ext cx="5250000" cy="820000"/>
+          </a:xfrm>
+          <a:prstGeom prst="rect">
+            <a:avLst/>
+          </a:prstGeom>
+          <a:noFill/>
+        </p:spPr>
+        <p:txBody>
+          <a:bodyPr wrap="square" lIns="0" rIns="0" tIns="0" bIns="0" anchor="t">
+            <a:spAutoFit/>
+          </a:bodyPr>
+          <a:lstStyle/>
+          <a:p>
+            <a:pPr algn="l">
+              <a:lnSpc>
+                <a:spcPct val="120000"/>
+              </a:lnSpc>
+              <a:spcAft>
+                <a:spcPts val="0"/>
+              </a:spcAft>
+            </a:pPr>
+            <a:r>
+              <a:rPr sz="1250" b="1" i="0">
+                <a:solidFill>
+                  <a:srgbClr val="141414"/>
+                </a:solidFill>
+                <a:latin typeface="Arial"/>
+              </a:rPr>
+              <a:t xml:space="preserve">Kontext führt zur richtigen Wahl</a:t>
+            </a:r>
+          </a:p>
+          <a:p>
+            <a:pPr algn="l">
+              <a:lnSpc>
+                <a:spcPct val="120000"/>
+              </a:lnSpc>
+              <a:spcAft>
+                <a:spcPts val="0"/>
+              </a:spcAft>
+            </a:pPr>
+            <a:r>
+              <a:rPr sz="1050" b="0" i="0">
+                <a:solidFill>
+                  <a:srgbClr val="5C5C5C"/>
+                </a:solidFill>
+                <a:latin typeface="Arial"/>
+              </a:rPr>
+              <a:t xml:space="preserve">Erst das Verständnis von Ziel und Historie macht aus einer beliebigen eine fundierte Entscheidung.</a:t>
+            </a:r>
+          </a:p>
+        </p:txBody>
+      </p:sp>
+      <p:sp>
+        <p:nvSpPr>
+          <p:cNvPr id="15" name="TextBox"/>
+          <p:cNvSpPr txBox="1"/>
+          <p:nvPr/>
+        </p:nvSpPr>
+        <p:spPr>
+          <a:xfrm>
+            <a:off x="6600000" y="2057400"/>
+            <a:ext cx="5088775" cy="240000"/>
+          </a:xfrm>
+          <a:prstGeom prst="rect">
+            <a:avLst/>
+          </a:prstGeom>
+          <a:noFill/>
+        </p:spPr>
+        <p:txBody>
+          <a:bodyPr wrap="square" lIns="0" rIns="0" tIns="0" bIns="0" anchor="t">
+            <a:spAutoFit/>
+          </a:bodyPr>
+          <a:lstStyle/>
+          <a:p>
+            <a:pPr algn="ctr">
+              <a:spcAft>
+                <a:spcPts val="0"/>
+              </a:spcAft>
+            </a:pPr>
+            <a:r>
+              <a:rPr sz="1000" b="1" i="0" spc="120">
+                <a:solidFill>
+                  <a:srgbClr val="8A8A8A"/>
+                </a:solidFill>
+                <a:latin typeface="Arial"/>
+              </a:rPr>
+              <a:t xml:space="preserve">SO ENTSTEHT EINE GUTE ENTSCHEIDUNG</a:t>
+            </a:r>
+          </a:p>
+        </p:txBody>
+      </p:sp>
+      <p:sp>
+        <p:nvSpPr>
+          <p:cNvPr id="16" name="FBox"/>
+          <p:cNvSpPr/>
+          <p:nvPr/>
+        </p:nvSpPr>
+        <p:spPr>
+          <a:xfrm>
+            <a:off x="6600000" y="2470000"/>
+            <a:ext cx="5088775" cy="640000"/>
+          </a:xfrm>
+          <a:prstGeom prst="rect">
+            <a:avLst/>
+          </a:prstGeom>
+          <a:solidFill>
+            <a:srgbClr val="FAF9F9"/>
+          </a:solidFill>
+          <a:ln w="12700">
+            <a:solidFill>
+              <a:srgbClr val="E8E8E8"/>
+            </a:solidFill>
+          </a:ln>
+          <a:effectLst/>
+        </p:spPr>
+        <p:txBody>
+          <a:bodyPr rtlCol="0" anchor="ctr" wrap="square" lIns="0" rIns="0" tIns="0" bIns="0"/>
+          <a:lstStyle/>
+          <a:p>
+            <a:pPr algn="ctr"/>
+          </a:p>
+        </p:txBody>
+      </p:sp>
+      <p:sp>
+        <p:nvSpPr>
+          <p:cNvPr id="17" name="TextBox"/>
+          <p:cNvSpPr txBox="1"/>
+          <p:nvPr/>
+        </p:nvSpPr>
+        <p:spPr>
+          <a:xfrm>
+            <a:off x="6600000" y="2470000"/>
+            <a:ext cx="5088775" cy="640000"/>
+          </a:xfrm>
+          <a:prstGeom prst="rect">
+            <a:avLst/>
+          </a:prstGeom>
+          <a:noFill/>
+        </p:spPr>
+        <p:txBody>
+          <a:bodyPr wrap="square" lIns="0" rIns="0" tIns="0" bIns="0" anchor="ctr"/>
+          <a:lstStyle/>
+          <a:p>
+            <a:pPr algn="ctr">
+              <a:lnSpc>
+                <a:spcPct val="115000"/>
+              </a:lnSpc>
+              <a:spcAft>
+                <a:spcPts val="0"/>
+              </a:spcAft>
+            </a:pPr>
+            <a:r>
+              <a:rPr sz="1250" b="1" i="0" spc="80">
+                <a:solidFill>
+                  <a:srgbClr val="141414"/>
+                </a:solidFill>
+                <a:latin typeface="Arial"/>
+              </a:rPr>
+              <a:t xml:space="preserve">ABSICHT</a:t>
+            </a:r>
+          </a:p>
+          <a:p>
+            <a:pPr algn="ctr">
+              <a:lnSpc>
+                <a:spcPct val="115000"/>
+              </a:lnSpc>
+              <a:spcAft>
+                <a:spcPts val="0"/>
+              </a:spcAft>
+            </a:pPr>
+            <a:r>
+              <a:rPr sz="1000" b="0" i="0">
+                <a:solidFill>
+                  <a:srgbClr val="5C5C5C"/>
+                </a:solidFill>
+                <a:latin typeface="Arial"/>
+              </a:rPr>
+              <a:t xml:space="preserve">Das Warum des Projekts</a:t>
+            </a:r>
+          </a:p>
+        </p:txBody>
+      </p:sp>
+      <p:sp>
+        <p:nvSpPr>
+          <p:cNvPr id="18" name="TextBox"/>
+          <p:cNvSpPr txBox="1"/>
+          <p:nvPr/>
+        </p:nvSpPr>
+        <p:spPr>
+          <a:xfrm>
+            <a:off x="6600000" y="3170000"/>
+            <a:ext cx="5088775" cy="300000"/>
+          </a:xfrm>
+          <a:prstGeom prst="rect">
+            <a:avLst/>
+          </a:prstGeom>
+          <a:noFill/>
+        </p:spPr>
+        <p:txBody>
+          <a:bodyPr wrap="square" lIns="0" rIns="0" tIns="0" bIns="0" anchor="ctr"/>
+          <a:lstStyle/>
+          <a:p>
+            <a:pPr algn="ctr">
+              <a:spcAft>
+                <a:spcPts val="0"/>
+              </a:spcAft>
+            </a:pPr>
+            <a:r>
+              <a:rPr sz="1800" b="1" i="0">
+                <a:solidFill>
+                  <a:srgbClr val="FF3C00"/>
+                </a:solidFill>
+                <a:latin typeface="Arial"/>
+              </a:rPr>
+              <a:t xml:space="preserve">+</a:t>
+            </a:r>
+          </a:p>
+        </p:txBody>
+      </p:sp>
+      <p:sp>
+        <p:nvSpPr>
+          <p:cNvPr id="19" name="FBox"/>
+          <p:cNvSpPr/>
+          <p:nvPr/>
+        </p:nvSpPr>
+        <p:spPr>
+          <a:xfrm>
+            <a:off x="6600000" y="3490000"/>
+            <a:ext cx="5088775" cy="640000"/>
+          </a:xfrm>
+          <a:prstGeom prst="rect">
+            <a:avLst/>
+          </a:prstGeom>
+          <a:solidFill>
+            <a:srgbClr val="FAF9F9"/>
+          </a:solidFill>
+          <a:ln w="12700">
+            <a:solidFill>
+              <a:srgbClr val="E8E8E8"/>
+            </a:solidFill>
+          </a:ln>
+          <a:effectLst/>
+        </p:spPr>
+        <p:txBody>
+          <a:bodyPr rtlCol="0" anchor="ctr" wrap="square" lIns="0" rIns="0" tIns="0" bIns="0"/>
+          <a:lstStyle/>
+          <a:p>
+            <a:pPr algn="ctr"/>
+          </a:p>
+        </p:txBody>
+      </p:sp>
+      <p:sp>
+        <p:nvSpPr>
+          <p:cNvPr id="20" name="TextBox"/>
+          <p:cNvSpPr txBox="1"/>
+          <p:nvPr/>
+        </p:nvSpPr>
+        <p:spPr>
+          <a:xfrm>
+            <a:off x="6600000" y="3490000"/>
+            <a:ext cx="5088775" cy="640000"/>
+          </a:xfrm>
+          <a:prstGeom prst="rect">
+            <a:avLst/>
+          </a:prstGeom>
+          <a:noFill/>
+        </p:spPr>
+        <p:txBody>
+          <a:bodyPr wrap="square" lIns="0" rIns="0" tIns="0" bIns="0" anchor="ctr"/>
+          <a:lstStyle/>
+          <a:p>
+            <a:pPr algn="ctr">
+              <a:lnSpc>
+                <a:spcPct val="115000"/>
+              </a:lnSpc>
+              <a:spcAft>
+                <a:spcPts val="0"/>
+              </a:spcAft>
+            </a:pPr>
+            <a:r>
+              <a:rPr sz="1250" b="1" i="0" spc="80">
+                <a:solidFill>
+                  <a:srgbClr val="141414"/>
+                </a:solidFill>
+                <a:latin typeface="Arial"/>
+              </a:rPr>
+              <a:t xml:space="preserve">BISHERIGE ENTSCHEIDUNGEN</a:t>
+            </a:r>
+          </a:p>
+          <a:p>
+            <a:pPr algn="ctr">
+              <a:lnSpc>
+                <a:spcPct val="115000"/>
+              </a:lnSpc>
+              <a:spcAft>
+                <a:spcPts val="0"/>
+              </a:spcAft>
+            </a:pPr>
+            <a:r>
+              <a:rPr sz="1000" b="0" i="0">
+                <a:solidFill>
+                  <a:srgbClr val="5C5C5C"/>
+                </a:solidFill>
+                <a:latin typeface="Arial"/>
+              </a:rPr>
+              <a:t xml:space="preserve">Die gesamte Artefakt-Kette</a:t>
+            </a:r>
+          </a:p>
+        </p:txBody>
+      </p:sp>
+      <p:sp>
+        <p:nvSpPr>
+          <p:cNvPr id="21" name="TextBox"/>
+          <p:cNvSpPr txBox="1"/>
+          <p:nvPr/>
+        </p:nvSpPr>
+        <p:spPr>
+          <a:xfrm>
+            <a:off x="6600000" y="4190000"/>
+            <a:ext cx="5088775" cy="300000"/>
+          </a:xfrm>
+          <a:prstGeom prst="rect">
+            <a:avLst/>
+          </a:prstGeom>
+          <a:noFill/>
+        </p:spPr>
+        <p:txBody>
+          <a:bodyPr wrap="square" lIns="0" rIns="0" tIns="0" bIns="0" anchor="ctr"/>
+          <a:lstStyle/>
+          <a:p>
+            <a:pPr algn="ctr">
+              <a:spcAft>
+                <a:spcPts val="0"/>
+              </a:spcAft>
+            </a:pPr>
+            <a:r>
+              <a:rPr sz="1800" b="1" i="0">
+                <a:solidFill>
+                  <a:srgbClr val="FF3C00"/>
+                </a:solidFill>
+                <a:latin typeface="Arial"/>
+              </a:rPr>
+              <a:t xml:space="preserve">=</a:t>
+            </a:r>
+          </a:p>
+        </p:txBody>
+      </p:sp>
+      <p:sp>
+        <p:nvSpPr>
+          <p:cNvPr id="22" name="FBox"/>
+          <p:cNvSpPr/>
+          <p:nvPr/>
+        </p:nvSpPr>
+        <p:spPr>
+          <a:xfrm>
+            <a:off x="6600000" y="4510000"/>
+            <a:ext cx="5088775" cy="640000"/>
+          </a:xfrm>
+          <a:prstGeom prst="rect">
+            <a:avLst/>
+          </a:prstGeom>
+          <a:solidFill>
+            <a:srgbClr val="FF3C00"/>
+          </a:solidFill>
+          <a:ln>
+            <a:noFill/>
+          </a:ln>
+          <a:effectLst/>
+        </p:spPr>
+        <p:txBody>
+          <a:bodyPr rtlCol="0" anchor="ctr" wrap="square" lIns="0" rIns="0" tIns="0" bIns="0"/>
+          <a:lstStyle/>
+          <a:p>
+            <a:pPr algn="ctr"/>
+          </a:p>
+        </p:txBody>
+      </p:sp>
+      <p:sp>
+        <p:nvSpPr>
+          <p:cNvPr id="23" name="TextBox"/>
+          <p:cNvSpPr txBox="1"/>
+          <p:nvPr/>
+        </p:nvSpPr>
+        <p:spPr>
+          <a:xfrm>
+            <a:off x="6600000" y="4510000"/>
+            <a:ext cx="5088775" cy="640000"/>
+          </a:xfrm>
+          <a:prstGeom prst="rect">
+            <a:avLst/>
+          </a:prstGeom>
+          <a:noFill/>
+        </p:spPr>
+        <p:txBody>
+          <a:bodyPr wrap="square" lIns="0" rIns="0" tIns="0" bIns="0" anchor="ctr"/>
+          <a:lstStyle/>
+          <a:p>
+            <a:pPr algn="ctr">
+              <a:lnSpc>
+                <a:spcPct val="115000"/>
+              </a:lnSpc>
+              <a:spcAft>
+                <a:spcPts val="0"/>
+              </a:spcAft>
+            </a:pPr>
+            <a:r>
+              <a:rPr sz="1250" b="1" i="0" spc="80">
+                <a:solidFill>
+                  <a:srgbClr val="FFFFFF"/>
+                </a:solidFill>
+                <a:latin typeface="Arial"/>
+              </a:rPr>
+              <a:t xml:space="preserve">DIE RICHTIGE ENTSCHEIDUNG</a:t>
+            </a:r>
+          </a:p>
+        </p:txBody>
+      </p:sp>
+      <p:sp>
+        <p:nvSpPr>
+          <p:cNvPr id="24" name="Banner"/>
+          <p:cNvSpPr/>
+          <p:nvPr/>
+        </p:nvSpPr>
+        <p:spPr>
+          <a:xfrm>
+            <a:off x="502920" y="5650992"/>
+            <a:ext cx="11183112" cy="566928"/>
+          </a:xfrm>
+          <a:prstGeom prst="rect">
+            <a:avLst/>
+          </a:prstGeom>
+          <a:solidFill>
+            <a:srgbClr val="141414"/>
+          </a:solidFill>
+          <a:ln>
+            <a:noFill/>
+          </a:ln>
+          <a:effectLst/>
+        </p:spPr>
+        <p:txBody>
+          <a:bodyPr rtlCol="0" anchor="ctr" wrap="square" lIns="0" rIns="0" tIns="0" bIns="0"/>
+          <a:lstStyle/>
+          <a:p>
+            <a:pPr algn="ctr"/>
+          </a:p>
+        </p:txBody>
+      </p:sp>
+      <p:sp>
+        <p:nvSpPr>
+          <p:cNvPr id="25" name="TextBox"/>
+          <p:cNvSpPr txBox="1"/>
+          <p:nvPr/>
+        </p:nvSpPr>
+        <p:spPr>
+          <a:xfrm>
+            <a:off x="502920" y="5650992"/>
+            <a:ext cx="11183112" cy="566928"/>
+          </a:xfrm>
+          <a:prstGeom prst="rect">
+            <a:avLst/>
+          </a:prstGeom>
+          <a:noFill/>
+        </p:spPr>
+        <p:txBody>
+          <a:bodyPr wrap="square" lIns="228600" rIns="0" tIns="0" bIns="0" anchor="ctr"/>
+          <a:lstStyle/>
+          <a:p>
+            <a:pPr algn="ctr">
+              <a:lnSpc>
+                <a:spcPct val="115000"/>
+              </a:lnSpc>
+              <a:spcAft>
+                <a:spcPts val="0"/>
+              </a:spcAft>
+            </a:pPr>
+            <a:r>
+              <a:rPr sz="1250" b="1" i="0">
+                <a:solidFill>
+                  <a:srgbClr val="FFFFFF"/>
+                </a:solidFill>
+                <a:latin typeface="Arial"/>
+              </a:rPr>
+              <a:t xml:space="preserve">Die Dokumente sind kein Overhead — sie sind das geteilte Gedächtnis, das jede Entscheidung trägt.</a:t>
+            </a:r>
+          </a:p>
+        </p:txBody>
+      </p:sp>
+      <p:sp>
+        <p:nvSpPr>
+          <p:cNvPr id="26" name="TextBox"/>
+          <p:cNvSpPr txBox="1"/>
+          <p:nvPr/>
+        </p:nvSpPr>
+        <p:spPr>
+          <a:xfrm>
+            <a:off x="502920" y="6455664"/>
+            <a:ext cx="914400" cy="274320"/>
+          </a:xfrm>
+          <a:prstGeom prst="rect">
+            <a:avLst/>
+          </a:prstGeom>
+          <a:noFill/>
+        </p:spPr>
+        <p:txBody>
+          <a:bodyPr wrap="square" lIns="0" rIns="0" tIns="0" bIns="0" anchor="t">
+            <a:spAutoFit/>
+          </a:bodyPr>
+          <a:lstStyle/>
+          <a:p>
+            <a:pPr algn="l">
+              <a:spcAft>
+                <a:spcPts val="0"/>
+              </a:spcAft>
+            </a:pPr>
+            <a:r>
+              <a:rPr sz="1000" b="0" i="0">
+                <a:solidFill>
+                  <a:srgbClr val="8A8A8A"/>
+                </a:solidFill>
+                <a:latin typeface="Arial"/>
+              </a:rPr>
+              <a:t xml:space="preserve">6</a:t>
+            </a:r>
+          </a:p>
+        </p:txBody>
+      </p:sp>
+      <p:pic>
+        <p:nvPicPr>
+          <p:cNvPr id="27" name="Picture" descr="vier-logo.png"/>
+          <p:cNvPicPr>
+            <a:picLocks noChangeAspect="1"/>
+          </p:cNvPicPr>
+          <p:nvPr/>
+        </p:nvPicPr>
+        <p:blipFill>
+          <a:blip r:embed="rId2"/>
+          <a:stretch>
+            <a:fillRect/>
+          </a:stretch>
+        </p:blipFill>
+        <p:spPr>
+          <a:xfrm>
+            <a:off x="10911535" y="6400800"/>
+            <a:ext cx="777240" cy="297864"/>
+          </a:xfrm>
+          <a:prstGeom prst="rect">
+            <a:avLst/>
+          </a:prstGeom>
+        </p:spPr>
+      </p:pic>
+    </p:spTree>
+  </p:cSld>
+  <p:clrMapOvr>
+    <a:masterClrMapping/>
+  </p:clrMapOvr>
+</p:sld>
+</file>
+
 <file path=ppt/slides/slide3.xml><?xml version="1.0" encoding="utf-8"?>
 <p:sld xmlns:a="http://schemas.openxmlformats.org/drawingml/2006/main" xmlns:p="http://schemas.openxmlformats.org/presentationml/2006/main" xmlns:r="http://schemas.openxmlformats.org/officeDocument/2006/relationships">
   <p:cSld>
@@ -16958,7 +19181,7 @@
                 </a:solidFill>
                 <a:latin typeface="Arial"/>
               </a:rPr>
-              <a:t>6</a:t>
+              <a:t>7</a:t>
             </a:r>
           </a:p>
         </p:txBody>
@@ -18259,7 +20482,7 @@
                 </a:solidFill>
                 <a:latin typeface="Arial"/>
               </a:rPr>
-              <a:t>7</a:t>
+              <a:t>8</a:t>
             </a:r>
           </a:p>
         </p:txBody>
@@ -19302,7 +21525,7 @@
                 </a:solidFill>
                 <a:latin typeface="Arial"/>
               </a:rPr>
-              <a:t>8</a:t>
+              <a:t>9</a:t>
             </a:r>
           </a:p>
         </p:txBody>
@@ -20141,7 +22364,7 @@
                 </a:solidFill>
                 <a:latin typeface="Arial"/>
               </a:rPr>
-              <a:t>9</a:t>
+              <a:t>10</a:t>
             </a:r>
           </a:p>
         </p:txBody>
@@ -20864,7 +23087,7 @@
                 </a:solidFill>
                 <a:latin typeface="Arial"/>
               </a:rPr>
-              <a:t>10</a:t>
+              <a:t>11</a:t>
             </a:r>
           </a:p>
         </p:txBody>

--- a/presentation/ORBIT.pptx
+++ b/presentation/ORBIT.pptx
@@ -10,6 +10,7 @@
     <p:sldId id="274" r:id="rId25"/>
     <p:sldId id="258" r:id="rId9"/>
     <p:sldId id="259" r:id="rId10"/>
+    <p:sldId id="277" r:id="rId28"/>
     <p:sldId id="276" r:id="rId27"/>
     <p:sldId id="260" r:id="rId11"/>
     <p:sldId id="261" r:id="rId12"/>
@@ -18,6 +19,7 @@
     <p:sldId id="264" r:id="rId15"/>
     <p:sldId id="265" r:id="rId16"/>
     <p:sldId id="266" r:id="rId17"/>
+    <p:sldId id="278" r:id="rId29"/>
     <p:sldId id="275" r:id="rId26"/>
     <p:sldId id="267" r:id="rId18"/>
     <p:sldId id="268" r:id="rId19"/>
@@ -3337,7 +3339,7 @@
                 </a:solidFill>
                 <a:latin typeface="Arial"/>
               </a:rPr>
-              <a:t>Die Agentische Montagelinie — V3</a:t>
+              <a:t>Die Agentische Montagelinie — V4</a:t>
             </a:r>
           </a:p>
         </p:txBody>
@@ -4104,8 +4106,8 @@
         </p:nvSpPr>
         <p:spPr>
           <a:xfrm>
-            <a:off x="1915668" y="4114800"/>
-            <a:ext cx="2560320" cy="640080"/>
+            <a:off x="1495828" y="4114800"/>
+            <a:ext cx="3400000" cy="640080"/>
           </a:xfrm>
           <a:prstGeom prst="rect">
             <a:avLst/>
@@ -4134,7 +4136,7 @@
                 </a:solidFill>
                 <a:latin typeface="Courier New"/>
               </a:rPr>
-              <a:t>STATE.md</a:t>
+              <a:t>plan.md + STATE.md</a:t>
             </a:r>
           </a:p>
         </p:txBody>
@@ -4179,7 +4181,7 @@
                 </a:solidFill>
                 <a:latin typeface="Arial"/>
               </a:rPr>
-              <a:t>PLAN-XXX Tasks</a:t>
+              <a:t>Der Task-Kontrakt</a:t>
             </a:r>
           </a:p>
           <a:p>
@@ -4198,7 +4200,7 @@
                 </a:solidFill>
                 <a:latin typeface="Arial"/>
               </a:rPr>
-              <a:t>Konkrete Umsetzungsschritte mit Pseudocode und Interfaces. Jeder Task ist eine atomare Einheit.</a:t>
+              <a:t>Wave:, Model:, Change Type:, File(s):, allowedAdjacentEdits:, Instruction:, Evidence:, Done When:, Verify:, Context: — zehn Felder mit vier Lesern.</a:t>
             </a:r>
           </a:p>
         </p:txBody>
@@ -4243,7 +4245,7 @@
                 </a:solidFill>
                 <a:latin typeface="Arial"/>
               </a:rPr>
-              <a:t>Beweispflicht (File:Line-Line)</a:t>
+              <a:t>Beweispflicht und Verify:</a:t>
             </a:r>
           </a:p>
           <a:p>
@@ -4262,7 +4264,7 @@
                 </a:solidFill>
                 <a:latin typeface="Arial"/>
               </a:rPr>
-              <a:t>Jede Dateiänderung wird mit Pfad:Zeile-Zeile belegt. Keine unbelegte Annahme überlebt.</a:t>
+              <a:t>Jede Änderung belegt mit Pfad:Zeile-Zeile. Verify: muss Inhalt prüfen — eine Zählung genügt nicht, sonst heißt es none — requires review.</a:t>
             </a:r>
           </a:p>
         </p:txBody>
@@ -4307,7 +4309,7 @@
                 </a:solidFill>
                 <a:latin typeface="Arial"/>
               </a:rPr>
-              <a:t>Resume Checkpoint</a:t>
+              <a:t>Wellen und STATE</a:t>
             </a:r>
           </a:p>
           <a:p>
@@ -4326,7 +4328,7 @@
                 </a:solidFill>
                 <a:latin typeface="Arial"/>
               </a:rPr>
-              <a:t>Speichert den exakten Fortschritt. Bei Abbruch weiß das System, wo es weiterarbeitet.</a:t>
+              <a:t>Tasks werden in dateidisjunkte Wellen gruppiert; die STATE-Datei entsteht mit status: in-progress. Nur /implement setzt sie auf complete.</a:t>
             </a:r>
           </a:p>
         </p:txBody>
@@ -4365,7 +4367,7 @@
                 </a:solidFill>
                 <a:latin typeface="Arial"/>
               </a:rPr>
-              <a:t>12</a:t>
+              <a:t>13</a:t>
             </a:r>
           </a:p>
         </p:txBody>
@@ -4785,7 +4787,7 @@
                 </a:solidFill>
                 <a:latin typeface="Arial"/>
               </a:rPr>
-              <a:t>Extract</a:t>
+              <a:t>Pre-Flight</a:t>
             </a:r>
           </a:p>
           <a:p>
@@ -4807,7 +4809,7 @@
                 </a:solidFill>
                 <a:latin typeface="Arial"/>
               </a:rPr>
-              <a:t>Task aus dem Plan laden</a:t>
+              <a:t>Branch prüfen, Plan vollständig lesen, Baseline setzen</a:t>
             </a:r>
           </a:p>
         </p:txBody>
@@ -4871,7 +4873,7 @@
                 </a:solidFill>
                 <a:latin typeface="Arial"/>
               </a:rPr>
-              <a:t>Delegate</a:t>
+              <a:t>Wellen planen</a:t>
             </a:r>
           </a:p>
           <a:p>
@@ -4893,7 +4895,7 @@
                 </a:solidFill>
                 <a:latin typeface="Arial"/>
               </a:rPr>
-              <a:t>An Coder-Subagent (Controller schreibt nicht selbst)</a:t>
+              <a:t>Dateidisjunkte Tasks gruppieren, maximal 5 gleichzeitig</a:t>
             </a:r>
           </a:p>
         </p:txBody>
@@ -4957,7 +4959,7 @@
                 </a:solidFill>
                 <a:latin typeface="Arial"/>
               </a:rPr>
-              <a:t>Parse</a:t>
+              <a:t>Dispatch</a:t>
             </a:r>
           </a:p>
           <a:p>
@@ -4979,7 +4981,7 @@
                 </a:solidFill>
                 <a:latin typeface="Arial"/>
               </a:rPr>
-              <a:t>Status auswerten (SUCCESS / BLOCKED)</a:t>
+              <a:t>Implementer parallel auf haiku — sie committen nie selbst</a:t>
             </a:r>
           </a:p>
         </p:txBody>
@@ -5043,7 +5045,7 @@
                 </a:solidFill>
                 <a:latin typeface="Arial"/>
               </a:rPr>
-              <a:t>Verify</a:t>
+              <a:t>Boundary Check</a:t>
             </a:r>
           </a:p>
           <a:p>
@@ -5065,7 +5067,7 @@
                 </a:solidFill>
                 <a:latin typeface="Arial"/>
               </a:rPr>
-              <a:t>„Done When"-Kriterien prüfen</a:t>
+              <a:t>Nur deklarierte Pfade dürfen berührt sein</a:t>
             </a:r>
           </a:p>
         </p:txBody>
@@ -5129,7 +5131,7 @@
                 </a:solidFill>
                 <a:latin typeface="Arial"/>
               </a:rPr>
-              <a:t>Update</a:t>
+              <a:t>Review-Gate</a:t>
             </a:r>
           </a:p>
           <a:p>
@@ -5151,7 +5153,7 @@
                 </a:solidFill>
                 <a:latin typeface="Arial"/>
               </a:rPr>
-              <a:t>STATE.md aktualisieren</a:t>
+              <a:t>Fast Path oder Reviewer: Spec und Qualität in einem</a:t>
             </a:r>
           </a:p>
         </p:txBody>
@@ -5215,7 +5217,7 @@
                 </a:solidFill>
                 <a:latin typeface="Arial"/>
               </a:rPr>
-              <a:t>Commit</a:t>
+              <a:t>Commit &amp; STATE</a:t>
             </a:r>
           </a:p>
           <a:p>
@@ -5237,7 +5239,7 @@
                 </a:solidFill>
                 <a:latin typeface="Arial"/>
               </a:rPr>
-              <a:t>Sauber in Git sichern</a:t>
+              <a:t>Ein Commit pro Änderung, jeder mit seinem STATE-Update</a:t>
             </a:r>
           </a:p>
         </p:txBody>
@@ -5301,7 +5303,7 @@
                 </a:solidFill>
                 <a:latin typeface="Arial"/>
               </a:rPr>
-              <a:t>Report</a:t>
+              <a:t>Nächste Welle</a:t>
             </a:r>
           </a:p>
           <a:p>
@@ -5323,7 +5325,7 @@
                 </a:solidFill>
                 <a:latin typeface="Arial"/>
               </a:rPr>
-              <a:t>Nutzerfreigabe einholen</a:t>
+              <a:t>Wellen laufen strikt sequenziell, nie überlappend</a:t>
             </a:r>
           </a:p>
         </p:txBody>
@@ -5368,7 +5370,7 @@
                 </a:solidFill>
                 <a:latin typeface="Arial"/>
               </a:rPr>
-              <a:t>ENDE</a:t>
+              <a:t>ABNAHME</a:t>
             </a:r>
           </a:p>
           <a:p>
@@ -5387,7 +5389,7 @@
                 </a:solidFill>
                 <a:latin typeface="Arial"/>
               </a:rPr>
-              <a:t>Source Code</a:t>
+              <a:t>Acceptance Criteria</a:t>
             </a:r>
           </a:p>
           <a:p>
@@ -5409,7 +5411,7 @@
                 </a:solidFill>
                 <a:latin typeface="Arial"/>
               </a:rPr>
-              <a:t>Kette vollständig</a:t>
+              <a:t>status: complete</a:t>
             </a:r>
           </a:p>
         </p:txBody>
@@ -5455,7 +5457,7 @@
                 </a:solidFill>
                 <a:latin typeface="Arial"/>
               </a:rPr>
-              <a:t>Das letzte Artefakt ist kein Dokument — es ist ausführbarer Code im Git-Repository, rückverfolgbar bis zur Vision.</a:t>
+              <a:t>Erst wenn die Acceptance Criteria und der Verification Plan des Epics geprüft sind, setzt /implement status: complete — der einzige Schreiber dieses Feldes.</a:t>
             </a:r>
           </a:p>
         </p:txBody>
@@ -5494,7 +5496,7 @@
                 </a:solidFill>
                 <a:latin typeface="Arial"/>
               </a:rPr>
-              <a:t>13</a:t>
+              <a:t>14</a:t>
             </a:r>
           </a:p>
         </p:txBody>
@@ -5804,7 +5806,7 @@
                 </a:solidFill>
                 <a:latin typeface="Arial"/>
               </a:rPr>
-              <a:t>Die nächste AGENTS.md zur Zieldatei ist der lokale Vertrag. Eltern liefern übergeordnete Regeln. Keine AGENTS.md überschreibt CLAUDE.md.</a:t>
+              <a:t>Die nächste AGENTS.md zur Zieldatei ist der lokale Vertrag. Eltern liefern übergeordnete Regeln. Keine AGENTS.md überschreibt CLAUDE.md — und .claude/** liegt bewusst außerhalb von DOX.</a:t>
             </a:r>
           </a:p>
         </p:txBody>
@@ -6062,7 +6064,7 @@
                 </a:solidFill>
                 <a:latin typeface="Arial"/>
               </a:rPr>
-              <a:t>15</a:t>
+              <a:t>17</a:t>
             </a:r>
           </a:p>
         </p:txBody>
@@ -6655,7 +6657,7 @@
                 </a:solidFill>
                 <a:latin typeface="Arial"/>
               </a:rPr>
-              <a:t>DOX ist aktiv bei jedem Datei-Edit — besonders während /implement. Die Governance-Schicht umhüllt die gesamte Pipeline, statt selbst ein Schritt zu sein.</a:t>
+              <a:t>DOX ist aktiv bei jedem Datei-Edit — besonders während /implement. .claude/** ist bewusst ausgenommen: dort beschreibt sich jede SKILL.md über ihr eigenes Frontmatter. Live sind die Root-AGENTS.md sowie thoughts/shared/ mit facts/, plans/, qa/ und prototypes/.</a:t>
             </a:r>
           </a:p>
         </p:txBody>
@@ -6694,7 +6696,7 @@
                 </a:solidFill>
                 <a:latin typeface="Arial"/>
               </a:rPr>
-              <a:t>16</a:t>
+              <a:t>18</a:t>
             </a:r>
           </a:p>
         </p:txBody>
@@ -6907,7 +6909,7 @@
                 </a:solidFill>
                 <a:latin typeface="Arial"/>
               </a:rPr>
-              <a:t> mit QA-Keywords — läuft parallel, ohne die Entwicklung zu blockieren.</a:t>
+              <a:t xml:space="preserve"> mit QA-Keywords — läuft parallel zur Entwicklung; der Bericht landet in thoughts/shared/qa/.</a:t>
             </a:r>
           </a:p>
         </p:txBody>
@@ -7089,7 +7091,7 @@
                 </a:solidFill>
                 <a:latin typeface="Courier New"/>
               </a:rPr>
-              <a:t>ruff (Style), pyright (Types), bandit (Security)</a:t>
+              <a:t>ruff (Style), pyright (Types), bandit (Security), interrogate (Docstrings)</a:t>
             </a:r>
           </a:p>
         </p:txBody>
@@ -7635,7 +7637,7 @@
                 </a:solidFill>
                 <a:latin typeface="Courier New"/>
               </a:rPr>
-              <a:t>Zyklomatische Komplexität (lizard), Duplizierung (jscpd)</a:t>
+              <a:t>Komplexität (lizard), Umfang (scc), Duplizierung (jscpd)</a:t>
             </a:r>
           </a:p>
         </p:txBody>
@@ -7674,7 +7676,7 @@
                 </a:solidFill>
                 <a:latin typeface="Arial"/>
               </a:rPr>
-              <a:t>17</a:t>
+              <a:t>19</a:t>
             </a:r>
           </a:p>
         </p:txBody>
@@ -8587,7 +8589,7 @@
                 </a:solidFill>
                 <a:latin typeface="Arial"/>
               </a:rPr>
-              <a:t>Diese Agenten kommunizieren nur mit dem Orchestrator — niemals direkt mit dem Nutzer.</a:t>
+              <a:t>Diese sechs Agenten sprechen nur mit dem Orchestrator. /implement ist die Ausnahme: seine Implementer und Reviewer laufen als general-purpose — auf haiku bzw. dem Session-Modell.</a:t>
             </a:r>
           </a:p>
         </p:txBody>
@@ -8626,7 +8628,7 @@
                 </a:solidFill>
                 <a:latin typeface="Arial"/>
               </a:rPr>
-              <a:t>18</a:t>
+              <a:t>20</a:t>
             </a:r>
           </a:p>
         </p:txBody>
@@ -8749,7 +8751,7 @@
                 </a:solidFill>
                 <a:latin typeface="Arial"/>
               </a:rPr>
-              <a:t>Erweiterte Logik und Web-Zugriff</a:t>
+              <a:t>Drei remote Server, kein lokaler Build</a:t>
             </a:r>
           </a:p>
         </p:txBody>
@@ -8793,7 +8795,7 @@
         <p:spPr>
           <a:xfrm>
             <a:off x="502920" y="1828800"/>
-            <a:ext cx="5408676" cy="1965960"/>
+            <a:ext cx="3514344" cy="2240000"/>
           </a:xfrm>
           <a:prstGeom prst="rect">
             <a:avLst/>
@@ -8864,7 +8866,7 @@
         <p:spPr>
           <a:xfrm>
             <a:off x="1252728" y="2139696"/>
-            <a:ext cx="4475988" cy="310896"/>
+            <a:ext cx="2471928" cy="310896"/>
           </a:xfrm>
           <a:prstGeom prst="rect">
             <a:avLst/>
@@ -8903,7 +8905,7 @@
         <p:spPr>
           <a:xfrm>
             <a:off x="795528" y="2670048"/>
-            <a:ext cx="4823460" cy="1005840"/>
+            <a:ext cx="2929128" cy="1600000"/>
           </a:xfrm>
           <a:prstGeom prst="rect">
             <a:avLst/>
@@ -8931,7 +8933,8 @@
                 </a:solidFill>
                 <a:latin typeface="Arial"/>
               </a:rPr>
-              <a:t>Extrahiert Web-Inhalte mit BM25/LLM-Filterung zur Token-Reduktion. Unterstützt crawl-, markdown- und screenshot-Modi.</a:t>
+              <a:t>Extrahiert Web-Inhalte mit BM25/LLM-Filterung zur Token-Reduktion. Modi: crawl, markdown, screenshot.
+mcp.vier.services/crawl4ai-mcp</a:t>
             </a:r>
           </a:p>
         </p:txBody>
@@ -8944,8 +8947,8 @@
         </p:nvSpPr>
         <p:spPr>
           <a:xfrm>
-            <a:off x="6277356" y="1828800"/>
-            <a:ext cx="5408676" cy="1965960"/>
+            <a:off x="4337304" y="1828800"/>
+            <a:ext cx="3514344" cy="2240000"/>
           </a:xfrm>
           <a:prstGeom prst="rect">
             <a:avLst/>
@@ -8976,7 +8979,7 @@
         </p:nvSpPr>
         <p:spPr>
           <a:xfrm>
-            <a:off x="6569964" y="2121408"/>
+            <a:off x="4629912" y="2121408"/>
             <a:ext cx="310896" cy="310896"/>
           </a:xfrm>
           <a:prstGeom prst="ellipse">
@@ -9015,8 +9018,8 @@
         </p:nvSpPr>
         <p:spPr>
           <a:xfrm>
-            <a:off x="7027164" y="2139696"/>
-            <a:ext cx="4475988" cy="310896"/>
+            <a:off x="5087112" y="2139696"/>
+            <a:ext cx="2471928" cy="310896"/>
           </a:xfrm>
           <a:prstGeom prst="rect">
             <a:avLst/>
@@ -9054,8 +9057,8 @@
         </p:nvSpPr>
         <p:spPr>
           <a:xfrm>
-            <a:off x="6569964" y="2670048"/>
-            <a:ext cx="4823460" cy="1005840"/>
+            <a:off x="4629912" y="2670048"/>
+            <a:ext cx="2929128" cy="1600000"/>
           </a:xfrm>
           <a:prstGeom prst="rect">
             <a:avLst/>
@@ -9083,7 +9086,8 @@
                 </a:solidFill>
                 <a:latin typeface="Arial"/>
               </a:rPr>
-              <a:t>Self-hosted Web-Suche für externe Dokumentationen und Bibliotheksreferenzen. Keine Abhängigkeit von kommerziellen Suchdiensten.</a:t>
+              <a:t>Web-Suche über eine gehostete SearXNG-Instanz — für externe Dokumentation, ohne kommerziellen Suchdienst.
+mcp.vier.services/searxng-mcp</a:t>
             </a:r>
           </a:p>
         </p:txBody>
@@ -9096,8 +9100,8 @@
         </p:nvSpPr>
         <p:spPr>
           <a:xfrm>
-            <a:off x="502920" y="4114800"/>
-            <a:ext cx="5408676" cy="1965960"/>
+            <a:off x="8171688" y="1828800"/>
+            <a:ext cx="3514344" cy="2240000"/>
           </a:xfrm>
           <a:prstGeom prst="rect">
             <a:avLst/>
@@ -9128,7 +9132,7 @@
         </p:nvSpPr>
         <p:spPr>
           <a:xfrm>
-            <a:off x="795528" y="4407408"/>
+            <a:off x="8464296" y="2121408"/>
             <a:ext cx="310896" cy="310896"/>
           </a:xfrm>
           <a:prstGeom prst="ellipse">
@@ -9167,8 +9171,8 @@
         </p:nvSpPr>
         <p:spPr>
           <a:xfrm>
-            <a:off x="1252728" y="4425696"/>
-            <a:ext cx="4475988" cy="310896"/>
+            <a:off x="8921496" y="2139696"/>
+            <a:ext cx="2471928" cy="310896"/>
           </a:xfrm>
           <a:prstGeom prst="rect">
             <a:avLst/>
@@ -9206,8 +9210,8 @@
         </p:nvSpPr>
         <p:spPr>
           <a:xfrm>
-            <a:off x="795528" y="4956048"/>
-            <a:ext cx="4823460" cy="1005840"/>
+            <a:off x="8464296" y="2670048"/>
+            <a:ext cx="2929128" cy="1600000"/>
           </a:xfrm>
           <a:prstGeom prst="rect">
             <a:avLst/>
@@ -9235,21 +9239,85 @@
                 </a:solidFill>
                 <a:latin typeface="Arial"/>
               </a:rPr>
-              <a:t>Direkter Abruf tagesaktueller API-Referenzen und Bibliotheks-Dokumentationen. Kein veraltetes Trainingswissen.</a:t>
-            </a:r>
-          </a:p>
-        </p:txBody>
-      </p:sp>
-      <p:sp>
-        <p:nvSpPr>
-          <p:cNvPr id="17" name="Rectangle 16"/>
+              <a:t>resolve-library-id und query-docs liefern tagesaktuelle Bibliotheks-Dokumentation statt veraltetem Trainingswissen.
+mcp.context7.com/mcp</a:t>
+            </a:r>
+          </a:p>
+        </p:txBody>
+      </p:sp>
+      <p:sp>
+        <p:nvSpPr>
+          <p:cNvPr id="21" name="TextBox 20"/>
+          <p:cNvSpPr txBox="1"/>
+          <p:nvPr/>
+        </p:nvSpPr>
+        <p:spPr>
+          <a:xfrm>
+            <a:off x="502920" y="6455664"/>
+            <a:ext cx="914400" cy="274320"/>
+          </a:xfrm>
+          <a:prstGeom prst="rect">
+            <a:avLst/>
+          </a:prstGeom>
+          <a:noFill/>
+        </p:spPr>
+        <p:txBody>
+          <a:bodyPr wrap="square" lIns="0" rIns="0" tIns="0" bIns="0">
+            <a:spAutoFit/>
+          </a:bodyPr>
+          <a:lstStyle/>
+          <a:p>
+            <a:pPr algn="l">
+              <a:spcAft>
+                <a:spcPts val="0"/>
+              </a:spcAft>
+            </a:pPr>
+            <a:r>
+              <a:rPr sz="1000" b="0" i="0">
+                <a:solidFill>
+                  <a:srgbClr val="8A8A8A"/>
+                </a:solidFill>
+                <a:latin typeface="Arial"/>
+              </a:rPr>
+              <a:t>21</a:t>
+            </a:r>
+          </a:p>
+        </p:txBody>
+      </p:sp>
+      <p:pic>
+        <p:nvPicPr>
+          <p:cNvPr id="22" name="Picture 21" descr="vier-logo.png"/>
+          <p:cNvPicPr>
+            <a:picLocks noChangeAspect="1"/>
+          </p:cNvPicPr>
+          <p:nvPr/>
+        </p:nvPicPr>
+        <p:blipFill>
+          <a:blip r:embed="rId2"/>
+          <a:stretch>
+            <a:fillRect/>
+          </a:stretch>
+        </p:blipFill>
+        <p:spPr>
+          <a:xfrm>
+            <a:off x="10911535" y="6400800"/>
+            <a:ext cx="777240" cy="297864"/>
+          </a:xfrm>
+          <a:prstGeom prst="rect">
+            <a:avLst/>
+          </a:prstGeom>
+        </p:spPr>
+      </p:pic>
+      <p:sp>
+        <p:nvSpPr>
+          <p:cNvPr id="23" name="Band"/>
           <p:cNvSpPr/>
           <p:nvPr/>
         </p:nvSpPr>
         <p:spPr>
           <a:xfrm>
-            <a:off x="6277356" y="4114800"/>
-            <a:ext cx="5408676" cy="1965960"/>
+            <a:off x="502920" y="4360000"/>
+            <a:ext cx="11183112" cy="960120"/>
           </a:xfrm>
           <a:prstGeom prst="rect">
             <a:avLst/>
@@ -9265,196 +9333,38 @@
           <a:effectLst/>
         </p:spPr>
         <p:txBody>
-          <a:bodyPr rtlCol="0" anchor="ctr" wrap="square" lIns="0" rIns="0" tIns="0" bIns="0"/>
-          <a:lstStyle/>
-          <a:p>
-            <a:pPr algn="ctr"/>
-          </a:p>
-        </p:txBody>
-      </p:sp>
-      <p:sp>
-        <p:nvSpPr>
-          <p:cNvPr id="18" name="Oval 17"/>
-          <p:cNvSpPr/>
-          <p:nvPr/>
-        </p:nvSpPr>
-        <p:spPr>
-          <a:xfrm>
-            <a:off x="6569964" y="4407408"/>
-            <a:ext cx="310896" cy="310896"/>
-          </a:xfrm>
-          <a:prstGeom prst="ellipse">
-            <a:avLst/>
-          </a:prstGeom>
-          <a:solidFill>
-            <a:srgbClr val="FF3C00"/>
-          </a:solidFill>
-          <a:ln>
-            <a:noFill/>
-          </a:ln>
-          <a:effectLst/>
-        </p:spPr>
-        <p:txBody>
-          <a:bodyPr rtlCol="0" anchor="ctr" wrap="none" lIns="0" rIns="0" tIns="0" bIns="0"/>
-          <a:lstStyle/>
-          <a:p>
-            <a:pPr algn="ctr"/>
-            <a:r>
-              <a:rPr sz="1500" b="1" i="0">
-                <a:solidFill>
-                  <a:srgbClr val="FFFFFF"/>
-                </a:solidFill>
-                <a:latin typeface="Arial"/>
-              </a:rPr>
-              <a:t>›</a:t>
-            </a:r>
-          </a:p>
-        </p:txBody>
-      </p:sp>
-      <p:sp>
-        <p:nvSpPr>
-          <p:cNvPr id="19" name="TextBox 18"/>
-          <p:cNvSpPr txBox="1"/>
-          <p:nvPr/>
-        </p:nvSpPr>
-        <p:spPr>
-          <a:xfrm>
-            <a:off x="7027164" y="4425696"/>
-            <a:ext cx="4475988" cy="310896"/>
-          </a:xfrm>
-          <a:prstGeom prst="rect">
-            <a:avLst/>
-          </a:prstGeom>
-          <a:noFill/>
-        </p:spPr>
-        <p:txBody>
-          <a:bodyPr wrap="square" lIns="0" rIns="0" tIns="0" bIns="0">
-            <a:spAutoFit/>
-          </a:bodyPr>
-          <a:lstStyle/>
-          <a:p>
-            <a:pPr algn="l">
-              <a:spcAft>
-                <a:spcPts val="0"/>
-              </a:spcAft>
-            </a:pPr>
-            <a:r>
-              <a:rPr sz="1500" b="1" i="0">
+          <a:bodyPr rtlCol="0" anchor="ctr" wrap="square" lIns="256032" rIns="256032" tIns="0" bIns="0"/>
+          <a:lstStyle/>
+          <a:p>
+            <a:pPr algn="l">
+              <a:lnSpc>
+                <a:spcPct val="130000"/>
+              </a:lnSpc>
+              <a:spcAft>
+                <a:spcPts val="0"/>
+              </a:spcAft>
+            </a:pPr>
+            <a:r>
+              <a:rPr sz="1150" b="1" i="0">
+                <a:solidFill>
+                  <a:srgbClr val="FF3C00"/>
+                </a:solidFill>
+                <a:latin typeface="Arial"/>
+              </a:rPr>
+              <a:t xml:space="preserve">Alle drei sind remote:  </a:t>
+            </a:r>
+            <a:r>
+              <a:rPr sz="1150" b="0" i="0">
                 <a:solidFill>
                   <a:srgbClr val="141414"/>
                 </a:solidFill>
-                <a:latin typeface="Courier New"/>
-              </a:rPr>
-              <a:t>sequential-thinking</a:t>
-            </a:r>
-          </a:p>
-        </p:txBody>
-      </p:sp>
-      <p:sp>
-        <p:nvSpPr>
-          <p:cNvPr id="20" name="TextBox 19"/>
-          <p:cNvSpPr txBox="1"/>
-          <p:nvPr/>
-        </p:nvSpPr>
-        <p:spPr>
-          <a:xfrm>
-            <a:off x="6569964" y="4956048"/>
-            <a:ext cx="4823460" cy="1005840"/>
-          </a:xfrm>
-          <a:prstGeom prst="rect">
-            <a:avLst/>
-          </a:prstGeom>
-          <a:noFill/>
-        </p:spPr>
-        <p:txBody>
-          <a:bodyPr wrap="square" lIns="0" rIns="0" tIns="0" bIns="0">
-            <a:spAutoFit/>
-          </a:bodyPr>
-          <a:lstStyle/>
-          <a:p>
-            <a:pPr algn="l">
-              <a:lnSpc>
-                <a:spcPct val="132000"/>
-              </a:lnSpc>
-              <a:spcAft>
-                <a:spcPts val="0"/>
-              </a:spcAft>
-            </a:pPr>
-            <a:r>
-              <a:rPr sz="1150" b="0" i="0">
-                <a:solidFill>
-                  <a:srgbClr val="5C5C5C"/>
-                </a:solidFill>
-                <a:latin typeface="Arial"/>
-              </a:rPr>
-              <a:t>Ein Multi-Step-Reasoning-Workspace für komplexe Architekturentscheidungen und Abhängigkeitsanalysen.</a:t>
-            </a:r>
-          </a:p>
-        </p:txBody>
-      </p:sp>
-      <p:sp>
-        <p:nvSpPr>
-          <p:cNvPr id="21" name="TextBox 20"/>
-          <p:cNvSpPr txBox="1"/>
-          <p:nvPr/>
-        </p:nvSpPr>
-        <p:spPr>
-          <a:xfrm>
-            <a:off x="502920" y="6455664"/>
-            <a:ext cx="914400" cy="274320"/>
-          </a:xfrm>
-          <a:prstGeom prst="rect">
-            <a:avLst/>
-          </a:prstGeom>
-          <a:noFill/>
-        </p:spPr>
-        <p:txBody>
-          <a:bodyPr wrap="square" lIns="0" rIns="0" tIns="0" bIns="0">
-            <a:spAutoFit/>
-          </a:bodyPr>
-          <a:lstStyle/>
-          <a:p>
-            <a:pPr algn="l">
-              <a:spcAft>
-                <a:spcPts val="0"/>
-              </a:spcAft>
-            </a:pPr>
-            <a:r>
-              <a:rPr sz="1000" b="0" i="0">
-                <a:solidFill>
-                  <a:srgbClr val="8A8A8A"/>
-                </a:solidFill>
-                <a:latin typeface="Arial"/>
-              </a:rPr>
-              <a:t>19</a:t>
-            </a:r>
-          </a:p>
-        </p:txBody>
-      </p:sp>
-      <p:pic>
-        <p:nvPicPr>
-          <p:cNvPr id="22" name="Picture 21" descr="vier-logo.png"/>
-          <p:cNvPicPr>
-            <a:picLocks noChangeAspect="1"/>
-          </p:cNvPicPr>
-          <p:nvPr/>
-        </p:nvPicPr>
-        <p:blipFill>
-          <a:blip r:embed="rId2"/>
-          <a:stretch>
-            <a:fillRect/>
-          </a:stretch>
-        </p:blipFill>
-        <p:spPr>
-          <a:xfrm>
-            <a:off x="10911535" y="6400800"/>
-            <a:ext cx="777240" cy="297864"/>
-          </a:xfrm>
-          <a:prstGeom prst="rect">
-            <a:avLst/>
-          </a:prstGeom>
-        </p:spPr>
-      </p:pic>
+                <a:latin typeface="Arial"/>
+              </a:rPr>
+              <a:t>deklariert in der Wurzel-.mcp.json, ohne lokalen Build, und über enableAllProjectMcpServers automatisch aktiv. crawl4ai und searxng laufen auf VIER-Hosts und brauchen keine Zugangsdaten — nur context7 liest ${CONTEXT7_API_KEY} aus der gitignorierten .env. Fehlt der Schlüssel, degradiert allein die Bibliotheks-Recherche.</a:t>
+            </a:r>
+          </a:p>
+        </p:txBody>
+      </p:sp>
     </p:spTree>
   </p:cSld>
   <p:clrMapOvr>
@@ -9706,598 +9616,13 @@
       </p:sp>
       <p:sp>
         <p:nvSpPr>
-          <p:cNvPr id="9" name="TextBox 8"/>
-          <p:cNvSpPr txBox="1"/>
-          <p:nvPr/>
-        </p:nvSpPr>
-        <p:spPr>
-          <a:xfrm>
-            <a:off x="822960" y="2697480"/>
-            <a:ext cx="365760" cy="310896"/>
-          </a:xfrm>
-          <a:prstGeom prst="rect">
-            <a:avLst/>
-          </a:prstGeom>
-          <a:noFill/>
-        </p:spPr>
-        <p:txBody>
-          <a:bodyPr wrap="square" lIns="0" rIns="0" tIns="0" bIns="0" anchor="ctr">
-            <a:spAutoFit/>
-          </a:bodyPr>
-          <a:lstStyle/>
-          <a:p>
-            <a:pPr algn="l">
-              <a:spcAft>
-                <a:spcPts val="0"/>
-              </a:spcAft>
-            </a:pPr>
-            <a:r>
-              <a:rPr sz="1300" b="1" i="0">
-                <a:solidFill>
-                  <a:srgbClr val="5B7A9A"/>
-                </a:solidFill>
-                <a:latin typeface="Courier New"/>
-              </a:rPr>
-              <a:t>&gt;</a:t>
-            </a:r>
-          </a:p>
-        </p:txBody>
-      </p:sp>
-      <p:sp>
-        <p:nvSpPr>
-          <p:cNvPr id="10" name="TextBox 9"/>
-          <p:cNvSpPr txBox="1"/>
-          <p:nvPr/>
-        </p:nvSpPr>
-        <p:spPr>
-          <a:xfrm>
-            <a:off x="1188720" y="2697480"/>
-            <a:ext cx="3017520" cy="310896"/>
-          </a:xfrm>
-          <a:prstGeom prst="rect">
-            <a:avLst/>
-          </a:prstGeom>
-          <a:noFill/>
-        </p:spPr>
-        <p:txBody>
-          <a:bodyPr wrap="square" lIns="0" rIns="0" tIns="0" bIns="0" anchor="ctr">
-            <a:spAutoFit/>
-          </a:bodyPr>
-          <a:lstStyle/>
-          <a:p>
-            <a:pPr algn="l">
-              <a:spcAft>
-                <a:spcPts val="0"/>
-              </a:spcAft>
-            </a:pPr>
-            <a:r>
-              <a:rPr sz="1300" b="1" i="0">
-                <a:solidFill>
-                  <a:srgbClr val="E8A070"/>
-                </a:solidFill>
-                <a:latin typeface="Courier New"/>
-              </a:rPr>
-              <a:t>/mission-architect</a:t>
-            </a:r>
-          </a:p>
-        </p:txBody>
-      </p:sp>
-      <p:sp>
-        <p:nvSpPr>
-          <p:cNvPr id="11" name="TextBox 10"/>
-          <p:cNvSpPr txBox="1"/>
-          <p:nvPr/>
-        </p:nvSpPr>
-        <p:spPr>
-          <a:xfrm>
-            <a:off x="4251959" y="2697480"/>
-            <a:ext cx="7315200" cy="310896"/>
-          </a:xfrm>
-          <a:prstGeom prst="rect">
-            <a:avLst/>
-          </a:prstGeom>
-          <a:noFill/>
-        </p:spPr>
-        <p:txBody>
-          <a:bodyPr wrap="square" lIns="0" rIns="0" tIns="0" bIns="0" anchor="ctr">
-            <a:spAutoFit/>
-          </a:bodyPr>
-          <a:lstStyle/>
-          <a:p>
-            <a:pPr algn="l">
-              <a:spcAft>
-                <a:spcPts val="0"/>
-              </a:spcAft>
-            </a:pPr>
-            <a:r>
-              <a:rPr sz="1150" b="0" i="0">
-                <a:solidFill>
-                  <a:srgbClr val="9AB0C8"/>
-                </a:solidFill>
-                <a:latin typeface="Arial"/>
-              </a:rPr>
-              <a:t>Startet ein komplett neues Projekt (Greenfield)</a:t>
-            </a:r>
-          </a:p>
-        </p:txBody>
-      </p:sp>
-      <p:sp>
-        <p:nvSpPr>
-          <p:cNvPr id="12" name="TextBox 11"/>
-          <p:cNvSpPr txBox="1"/>
-          <p:nvPr/>
-        </p:nvSpPr>
-        <p:spPr>
-          <a:xfrm>
-            <a:off x="822960" y="3118104"/>
-            <a:ext cx="365760" cy="310896"/>
-          </a:xfrm>
-          <a:prstGeom prst="rect">
-            <a:avLst/>
-          </a:prstGeom>
-          <a:noFill/>
-        </p:spPr>
-        <p:txBody>
-          <a:bodyPr wrap="square" lIns="0" rIns="0" tIns="0" bIns="0" anchor="ctr">
-            <a:spAutoFit/>
-          </a:bodyPr>
-          <a:lstStyle/>
-          <a:p>
-            <a:pPr algn="l">
-              <a:spcAft>
-                <a:spcPts val="0"/>
-              </a:spcAft>
-            </a:pPr>
-            <a:r>
-              <a:rPr sz="1300" b="1" i="0">
-                <a:solidFill>
-                  <a:srgbClr val="5B7A9A"/>
-                </a:solidFill>
-                <a:latin typeface="Courier New"/>
-              </a:rPr>
-              <a:t>&gt;</a:t>
-            </a:r>
-          </a:p>
-        </p:txBody>
-      </p:sp>
-      <p:sp>
-        <p:nvSpPr>
-          <p:cNvPr id="13" name="TextBox 12"/>
-          <p:cNvSpPr txBox="1"/>
-          <p:nvPr/>
-        </p:nvSpPr>
-        <p:spPr>
-          <a:xfrm>
-            <a:off x="1188720" y="3118104"/>
-            <a:ext cx="3017520" cy="310896"/>
-          </a:xfrm>
-          <a:prstGeom prst="rect">
-            <a:avLst/>
-          </a:prstGeom>
-          <a:noFill/>
-        </p:spPr>
-        <p:txBody>
-          <a:bodyPr wrap="square" lIns="0" rIns="0" tIns="0" bIns="0" anchor="ctr">
-            <a:spAutoFit/>
-          </a:bodyPr>
-          <a:lstStyle/>
-          <a:p>
-            <a:pPr algn="l">
-              <a:spcAft>
-                <a:spcPts val="0"/>
-              </a:spcAft>
-            </a:pPr>
-            <a:r>
-              <a:rPr sz="1300" b="1" i="0">
-                <a:solidFill>
-                  <a:srgbClr val="E8A070"/>
-                </a:solidFill>
-                <a:latin typeface="Courier New"/>
-              </a:rPr>
-              <a:t>/feature-architect</a:t>
-            </a:r>
-          </a:p>
-        </p:txBody>
-      </p:sp>
-      <p:sp>
-        <p:nvSpPr>
-          <p:cNvPr id="14" name="TextBox 13"/>
-          <p:cNvSpPr txBox="1"/>
-          <p:nvPr/>
-        </p:nvSpPr>
-        <p:spPr>
-          <a:xfrm>
-            <a:off x="4251959" y="3118104"/>
-            <a:ext cx="7315200" cy="310896"/>
-          </a:xfrm>
-          <a:prstGeom prst="rect">
-            <a:avLst/>
-          </a:prstGeom>
-          <a:noFill/>
-        </p:spPr>
-        <p:txBody>
-          <a:bodyPr wrap="square" lIns="0" rIns="0" tIns="0" bIns="0" anchor="ctr">
-            <a:spAutoFit/>
-          </a:bodyPr>
-          <a:lstStyle/>
-          <a:p>
-            <a:pPr algn="l">
-              <a:spcAft>
-                <a:spcPts val="0"/>
-              </a:spcAft>
-            </a:pPr>
-            <a:r>
-              <a:rPr sz="1150" b="0" i="0">
-                <a:solidFill>
-                  <a:srgbClr val="9AB0C8"/>
-                </a:solidFill>
-                <a:latin typeface="Arial"/>
-              </a:rPr>
-              <a:t>Integriert ein neues Feature in bestehenden Code (Brownfield)</a:t>
-            </a:r>
-          </a:p>
-        </p:txBody>
-      </p:sp>
-      <p:sp>
-        <p:nvSpPr>
-          <p:cNvPr id="15" name="TextBox 14"/>
-          <p:cNvSpPr txBox="1"/>
-          <p:nvPr/>
-        </p:nvSpPr>
-        <p:spPr>
-          <a:xfrm>
-            <a:off x="822960" y="3538728"/>
-            <a:ext cx="365760" cy="310896"/>
-          </a:xfrm>
-          <a:prstGeom prst="rect">
-            <a:avLst/>
-          </a:prstGeom>
-          <a:noFill/>
-        </p:spPr>
-        <p:txBody>
-          <a:bodyPr wrap="square" lIns="0" rIns="0" tIns="0" bIns="0" anchor="ctr">
-            <a:spAutoFit/>
-          </a:bodyPr>
-          <a:lstStyle/>
-          <a:p>
-            <a:pPr algn="l">
-              <a:spcAft>
-                <a:spcPts val="0"/>
-              </a:spcAft>
-            </a:pPr>
-            <a:r>
-              <a:rPr sz="1300" b="1" i="0">
-                <a:solidFill>
-                  <a:srgbClr val="5B7A9A"/>
-                </a:solidFill>
-                <a:latin typeface="Courier New"/>
-              </a:rPr>
-              <a:t>&gt;</a:t>
-            </a:r>
-          </a:p>
-        </p:txBody>
-      </p:sp>
-      <p:sp>
-        <p:nvSpPr>
-          <p:cNvPr id="16" name="TextBox 15"/>
-          <p:cNvSpPr txBox="1"/>
-          <p:nvPr/>
-        </p:nvSpPr>
-        <p:spPr>
-          <a:xfrm>
-            <a:off x="1188720" y="3538728"/>
-            <a:ext cx="3017520" cy="310896"/>
-          </a:xfrm>
-          <a:prstGeom prst="rect">
-            <a:avLst/>
-          </a:prstGeom>
-          <a:noFill/>
-        </p:spPr>
-        <p:txBody>
-          <a:bodyPr wrap="square" lIns="0" rIns="0" tIns="0" bIns="0" anchor="ctr">
-            <a:spAutoFit/>
-          </a:bodyPr>
-          <a:lstStyle/>
-          <a:p>
-            <a:pPr algn="l">
-              <a:spcAft>
-                <a:spcPts val="0"/>
-              </a:spcAft>
-            </a:pPr>
-            <a:r>
-              <a:rPr sz="1300" b="1" i="0">
-                <a:solidFill>
-                  <a:srgbClr val="E8A070"/>
-                </a:solidFill>
-                <a:latin typeface="Courier New"/>
-              </a:rPr>
-              <a:t>/fact-finder QA</a:t>
-            </a:r>
-          </a:p>
-        </p:txBody>
-      </p:sp>
-      <p:sp>
-        <p:nvSpPr>
-          <p:cNvPr id="17" name="TextBox 16"/>
-          <p:cNvSpPr txBox="1"/>
-          <p:nvPr/>
-        </p:nvSpPr>
-        <p:spPr>
-          <a:xfrm>
-            <a:off x="4251959" y="3538728"/>
-            <a:ext cx="7315200" cy="310896"/>
-          </a:xfrm>
-          <a:prstGeom prst="rect">
-            <a:avLst/>
-          </a:prstGeom>
-          <a:noFill/>
-        </p:spPr>
-        <p:txBody>
-          <a:bodyPr wrap="square" lIns="0" rIns="0" tIns="0" bIns="0" anchor="ctr">
-            <a:spAutoFit/>
-          </a:bodyPr>
-          <a:lstStyle/>
-          <a:p>
-            <a:pPr algn="l">
-              <a:spcAft>
-                <a:spcPts val="0"/>
-              </a:spcAft>
-            </a:pPr>
-            <a:r>
-              <a:rPr sz="1150" b="0" i="0">
-                <a:solidFill>
-                  <a:srgbClr val="9AB0C8"/>
-                </a:solidFill>
-                <a:latin typeface="Arial"/>
-              </a:rPr>
-              <a:t>Startet den parallelen Code-Quality-Review</a:t>
-            </a:r>
-          </a:p>
-        </p:txBody>
-      </p:sp>
-      <p:sp>
-        <p:nvSpPr>
-          <p:cNvPr id="18" name="TextBox 17"/>
-          <p:cNvSpPr txBox="1"/>
-          <p:nvPr/>
-        </p:nvSpPr>
-        <p:spPr>
-          <a:xfrm>
-            <a:off x="822960" y="3959352"/>
-            <a:ext cx="365760" cy="310896"/>
-          </a:xfrm>
-          <a:prstGeom prst="rect">
-            <a:avLst/>
-          </a:prstGeom>
-          <a:noFill/>
-        </p:spPr>
-        <p:txBody>
-          <a:bodyPr wrap="square" lIns="0" rIns="0" tIns="0" bIns="0" anchor="ctr">
-            <a:spAutoFit/>
-          </a:bodyPr>
-          <a:lstStyle/>
-          <a:p>
-            <a:pPr algn="l">
-              <a:spcAft>
-                <a:spcPts val="0"/>
-              </a:spcAft>
-            </a:pPr>
-            <a:r>
-              <a:rPr sz="1300" b="1" i="0">
-                <a:solidFill>
-                  <a:srgbClr val="5B7A9A"/>
-                </a:solidFill>
-                <a:latin typeface="Courier New"/>
-              </a:rPr>
-              <a:t>&gt;</a:t>
-            </a:r>
-          </a:p>
-        </p:txBody>
-      </p:sp>
-      <p:sp>
-        <p:nvSpPr>
-          <p:cNvPr id="19" name="TextBox 18"/>
-          <p:cNvSpPr txBox="1"/>
-          <p:nvPr/>
-        </p:nvSpPr>
-        <p:spPr>
-          <a:xfrm>
-            <a:off x="1188720" y="3959352"/>
-            <a:ext cx="3017520" cy="310896"/>
-          </a:xfrm>
-          <a:prstGeom prst="rect">
-            <a:avLst/>
-          </a:prstGeom>
-          <a:noFill/>
-        </p:spPr>
-        <p:txBody>
-          <a:bodyPr wrap="square" lIns="0" rIns="0" tIns="0" bIns="0" anchor="ctr">
-            <a:spAutoFit/>
-          </a:bodyPr>
-          <a:lstStyle/>
-          <a:p>
-            <a:pPr algn="l">
-              <a:spcAft>
-                <a:spcPts val="0"/>
-              </a:spcAft>
-            </a:pPr>
-            <a:r>
-              <a:rPr sz="1300" b="1" i="0">
-                <a:solidFill>
-                  <a:srgbClr val="E8A070"/>
-                </a:solidFill>
-                <a:latin typeface="Courier New"/>
-              </a:rPr>
-              <a:t>/implement</a:t>
-            </a:r>
-          </a:p>
-        </p:txBody>
-      </p:sp>
-      <p:sp>
-        <p:nvSpPr>
-          <p:cNvPr id="20" name="TextBox 19"/>
-          <p:cNvSpPr txBox="1"/>
-          <p:nvPr/>
-        </p:nvSpPr>
-        <p:spPr>
-          <a:xfrm>
-            <a:off x="4251959" y="3959352"/>
-            <a:ext cx="7315200" cy="310896"/>
-          </a:xfrm>
-          <a:prstGeom prst="rect">
-            <a:avLst/>
-          </a:prstGeom>
-          <a:noFill/>
-        </p:spPr>
-        <p:txBody>
-          <a:bodyPr wrap="square" lIns="0" rIns="0" tIns="0" bIns="0" anchor="ctr">
-            <a:spAutoFit/>
-          </a:bodyPr>
-          <a:lstStyle/>
-          <a:p>
-            <a:pPr algn="l">
-              <a:spcAft>
-                <a:spcPts val="0"/>
-              </a:spcAft>
-            </a:pPr>
-            <a:r>
-              <a:rPr sz="1150" b="0" i="0">
-                <a:solidFill>
-                  <a:srgbClr val="9AB0C8"/>
-                </a:solidFill>
-                <a:latin typeface="Arial"/>
-              </a:rPr>
-              <a:t>Führt den Plan aus oder setzt nach Abbruch fort</a:t>
-            </a:r>
-          </a:p>
-        </p:txBody>
-      </p:sp>
-      <p:sp>
-        <p:nvSpPr>
-          <p:cNvPr id="21" name="TextBox 20"/>
-          <p:cNvSpPr txBox="1"/>
-          <p:nvPr/>
-        </p:nvSpPr>
-        <p:spPr>
-          <a:xfrm>
-            <a:off x="822960" y="4379976"/>
-            <a:ext cx="365760" cy="310896"/>
-          </a:xfrm>
-          <a:prstGeom prst="rect">
-            <a:avLst/>
-          </a:prstGeom>
-          <a:noFill/>
-        </p:spPr>
-        <p:txBody>
-          <a:bodyPr wrap="square" lIns="0" rIns="0" tIns="0" bIns="0" anchor="ctr">
-            <a:spAutoFit/>
-          </a:bodyPr>
-          <a:lstStyle/>
-          <a:p>
-            <a:pPr algn="l">
-              <a:spcAft>
-                <a:spcPts val="0"/>
-              </a:spcAft>
-            </a:pPr>
-            <a:r>
-              <a:rPr sz="1300" b="1" i="0">
-                <a:solidFill>
-                  <a:srgbClr val="5B7A9A"/>
-                </a:solidFill>
-                <a:latin typeface="Courier New"/>
-              </a:rPr>
-              <a:t>&gt;</a:t>
-            </a:r>
-          </a:p>
-        </p:txBody>
-      </p:sp>
-      <p:sp>
-        <p:nvSpPr>
-          <p:cNvPr id="22" name="TextBox 21"/>
-          <p:cNvSpPr txBox="1"/>
-          <p:nvPr/>
-        </p:nvSpPr>
-        <p:spPr>
-          <a:xfrm>
-            <a:off x="1188720" y="4379976"/>
-            <a:ext cx="3017520" cy="310896"/>
-          </a:xfrm>
-          <a:prstGeom prst="rect">
-            <a:avLst/>
-          </a:prstGeom>
-          <a:noFill/>
-        </p:spPr>
-        <p:txBody>
-          <a:bodyPr wrap="square" lIns="0" rIns="0" tIns="0" bIns="0" anchor="ctr">
-            <a:spAutoFit/>
-          </a:bodyPr>
-          <a:lstStyle/>
-          <a:p>
-            <a:pPr algn="l">
-              <a:spcAft>
-                <a:spcPts val="0"/>
-              </a:spcAft>
-            </a:pPr>
-            <a:r>
-              <a:rPr sz="1300" b="1" i="0">
-                <a:solidFill>
-                  <a:srgbClr val="E8A070"/>
-                </a:solidFill>
-                <a:latin typeface="Courier New"/>
-              </a:rPr>
-              <a:t>STATUS / RETRY</a:t>
-            </a:r>
-          </a:p>
-        </p:txBody>
-      </p:sp>
-      <p:sp>
-        <p:nvSpPr>
-          <p:cNvPr id="23" name="TextBox 22"/>
-          <p:cNvSpPr txBox="1"/>
-          <p:nvPr/>
-        </p:nvSpPr>
-        <p:spPr>
-          <a:xfrm>
-            <a:off x="4251959" y="4379976"/>
-            <a:ext cx="7315200" cy="310896"/>
-          </a:xfrm>
-          <a:prstGeom prst="rect">
-            <a:avLst/>
-          </a:prstGeom>
-          <a:noFill/>
-        </p:spPr>
-        <p:txBody>
-          <a:bodyPr wrap="square" lIns="0" rIns="0" tIns="0" bIns="0" anchor="ctr">
-            <a:spAutoFit/>
-          </a:bodyPr>
-          <a:lstStyle/>
-          <a:p>
-            <a:pPr algn="l">
-              <a:spcAft>
-                <a:spcPts val="0"/>
-              </a:spcAft>
-            </a:pPr>
-            <a:r>
-              <a:rPr sz="1150" b="0" i="0">
-                <a:solidFill>
-                  <a:srgbClr val="9AB0C8"/>
-                </a:solidFill>
-                <a:latin typeface="Arial"/>
-              </a:rPr>
-              <a:t>Laufzeitkontrolle während der Implementierung</a:t>
-            </a:r>
-          </a:p>
-        </p:txBody>
-      </p:sp>
-      <p:sp>
-        <p:nvSpPr>
           <p:cNvPr id="24" name="Rectangle 23"/>
           <p:cNvSpPr/>
           <p:nvPr/>
         </p:nvSpPr>
         <p:spPr>
           <a:xfrm>
-            <a:off x="822960" y="4910328"/>
+            <a:off x="822960" y="4962000"/>
             <a:ext cx="10515600" cy="10972"/>
           </a:xfrm>
           <a:prstGeom prst="rect">
@@ -10321,240 +9646,6 @@
       </p:sp>
       <p:sp>
         <p:nvSpPr>
-          <p:cNvPr id="25" name="TextBox 24"/>
-          <p:cNvSpPr txBox="1"/>
-          <p:nvPr/>
-        </p:nvSpPr>
-        <p:spPr>
-          <a:xfrm>
-            <a:off x="822960" y="5102352"/>
-            <a:ext cx="365760" cy="310896"/>
-          </a:xfrm>
-          <a:prstGeom prst="rect">
-            <a:avLst/>
-          </a:prstGeom>
-          <a:noFill/>
-        </p:spPr>
-        <p:txBody>
-          <a:bodyPr wrap="square" lIns="0" rIns="0" tIns="0" bIns="0" anchor="ctr">
-            <a:spAutoFit/>
-          </a:bodyPr>
-          <a:lstStyle/>
-          <a:p>
-            <a:pPr algn="l">
-              <a:spcAft>
-                <a:spcPts val="0"/>
-              </a:spcAft>
-            </a:pPr>
-            <a:r>
-              <a:rPr sz="1300" b="1" i="0">
-                <a:solidFill>
-                  <a:srgbClr val="5B7A9A"/>
-                </a:solidFill>
-                <a:latin typeface="Courier New"/>
-              </a:rPr>
-              <a:t>&gt;</a:t>
-            </a:r>
-          </a:p>
-        </p:txBody>
-      </p:sp>
-      <p:sp>
-        <p:nvSpPr>
-          <p:cNvPr id="26" name="TextBox 25"/>
-          <p:cNvSpPr txBox="1"/>
-          <p:nvPr/>
-        </p:nvSpPr>
-        <p:spPr>
-          <a:xfrm>
-            <a:off x="1188720" y="5102352"/>
-            <a:ext cx="3017520" cy="310896"/>
-          </a:xfrm>
-          <a:prstGeom prst="rect">
-            <a:avLst/>
-          </a:prstGeom>
-          <a:noFill/>
-        </p:spPr>
-        <p:txBody>
-          <a:bodyPr wrap="square" lIns="0" rIns="0" tIns="0" bIns="0" anchor="ctr">
-            <a:spAutoFit/>
-          </a:bodyPr>
-          <a:lstStyle/>
-          <a:p>
-            <a:pPr algn="l">
-              <a:spcAft>
-                <a:spcPts val="0"/>
-              </a:spcAft>
-            </a:pPr>
-            <a:r>
-              <a:rPr sz="1300" b="1" i="0">
-                <a:solidFill>
-                  <a:srgbClr val="E8A070"/>
-                </a:solidFill>
-                <a:latin typeface="Courier New"/>
-              </a:rPr>
-              <a:t>/dox-init</a:t>
-            </a:r>
-          </a:p>
-        </p:txBody>
-      </p:sp>
-      <p:sp>
-        <p:nvSpPr>
-          <p:cNvPr id="27" name="TextBox 26"/>
-          <p:cNvSpPr txBox="1"/>
-          <p:nvPr/>
-        </p:nvSpPr>
-        <p:spPr>
-          <a:xfrm>
-            <a:off x="4251959" y="5102352"/>
-            <a:ext cx="7315200" cy="310896"/>
-          </a:xfrm>
-          <a:prstGeom prst="rect">
-            <a:avLst/>
-          </a:prstGeom>
-          <a:noFill/>
-        </p:spPr>
-        <p:txBody>
-          <a:bodyPr wrap="square" lIns="0" rIns="0" tIns="0" bIns="0" anchor="ctr">
-            <a:spAutoFit/>
-          </a:bodyPr>
-          <a:lstStyle/>
-          <a:p>
-            <a:pPr algn="l">
-              <a:spcAft>
-                <a:spcPts val="0"/>
-              </a:spcAft>
-            </a:pPr>
-            <a:r>
-              <a:rPr sz="1150" b="0" i="0">
-                <a:solidFill>
-                  <a:srgbClr val="9AB0C8"/>
-                </a:solidFill>
-                <a:latin typeface="Arial"/>
-              </a:rPr>
-              <a:t>Governance-Baum bootstrappen (einmalig bei Projektstart)</a:t>
-            </a:r>
-          </a:p>
-        </p:txBody>
-      </p:sp>
-      <p:sp>
-        <p:nvSpPr>
-          <p:cNvPr id="28" name="TextBox 27"/>
-          <p:cNvSpPr txBox="1"/>
-          <p:nvPr/>
-        </p:nvSpPr>
-        <p:spPr>
-          <a:xfrm>
-            <a:off x="822960" y="5522976"/>
-            <a:ext cx="365760" cy="310896"/>
-          </a:xfrm>
-          <a:prstGeom prst="rect">
-            <a:avLst/>
-          </a:prstGeom>
-          <a:noFill/>
-        </p:spPr>
-        <p:txBody>
-          <a:bodyPr wrap="square" lIns="0" rIns="0" tIns="0" bIns="0" anchor="ctr">
-            <a:spAutoFit/>
-          </a:bodyPr>
-          <a:lstStyle/>
-          <a:p>
-            <a:pPr algn="l">
-              <a:spcAft>
-                <a:spcPts val="0"/>
-              </a:spcAft>
-            </a:pPr>
-            <a:r>
-              <a:rPr sz="1300" b="1" i="0">
-                <a:solidFill>
-                  <a:srgbClr val="5B7A9A"/>
-                </a:solidFill>
-                <a:latin typeface="Courier New"/>
-              </a:rPr>
-              <a:t>&gt;</a:t>
-            </a:r>
-          </a:p>
-        </p:txBody>
-      </p:sp>
-      <p:sp>
-        <p:nvSpPr>
-          <p:cNvPr id="29" name="TextBox 28"/>
-          <p:cNvSpPr txBox="1"/>
-          <p:nvPr/>
-        </p:nvSpPr>
-        <p:spPr>
-          <a:xfrm>
-            <a:off x="1188720" y="5522976"/>
-            <a:ext cx="3017520" cy="310896"/>
-          </a:xfrm>
-          <a:prstGeom prst="rect">
-            <a:avLst/>
-          </a:prstGeom>
-          <a:noFill/>
-        </p:spPr>
-        <p:txBody>
-          <a:bodyPr wrap="square" lIns="0" rIns="0" tIns="0" bIns="0" anchor="ctr">
-            <a:spAutoFit/>
-          </a:bodyPr>
-          <a:lstStyle/>
-          <a:p>
-            <a:pPr algn="l">
-              <a:spcAft>
-                <a:spcPts val="0"/>
-              </a:spcAft>
-            </a:pPr>
-            <a:r>
-              <a:rPr sz="1300" b="1" i="0">
-                <a:solidFill>
-                  <a:srgbClr val="E8A070"/>
-                </a:solidFill>
-                <a:latin typeface="Courier New"/>
-              </a:rPr>
-              <a:t>/dox-update</a:t>
-            </a:r>
-          </a:p>
-        </p:txBody>
-      </p:sp>
-      <p:sp>
-        <p:nvSpPr>
-          <p:cNvPr id="30" name="TextBox 29"/>
-          <p:cNvSpPr txBox="1"/>
-          <p:nvPr/>
-        </p:nvSpPr>
-        <p:spPr>
-          <a:xfrm>
-            <a:off x="4251959" y="5522976"/>
-            <a:ext cx="7315200" cy="310896"/>
-          </a:xfrm>
-          <a:prstGeom prst="rect">
-            <a:avLst/>
-          </a:prstGeom>
-          <a:noFill/>
-        </p:spPr>
-        <p:txBody>
-          <a:bodyPr wrap="square" lIns="0" rIns="0" tIns="0" bIns="0" anchor="ctr">
-            <a:spAutoFit/>
-          </a:bodyPr>
-          <a:lstStyle/>
-          <a:p>
-            <a:pPr algn="l">
-              <a:spcAft>
-                <a:spcPts val="0"/>
-              </a:spcAft>
-            </a:pPr>
-            <a:r>
-              <a:rPr sz="1150" b="0" i="0">
-                <a:solidFill>
-                  <a:srgbClr val="9AB0C8"/>
-                </a:solidFill>
-                <a:latin typeface="Arial"/>
-              </a:rPr>
-              <a:t>Veraltete AGENTS.md-Dateien nach Codeänderungen reparieren</a:t>
-            </a:r>
-          </a:p>
-        </p:txBody>
-      </p:sp>
-      <p:sp>
-        <p:nvSpPr>
           <p:cNvPr id="31" name="TextBox 30"/>
           <p:cNvSpPr txBox="1"/>
           <p:nvPr/>
@@ -10587,7 +9678,7 @@
                 </a:solidFill>
                 <a:latin typeface="Arial"/>
               </a:rPr>
-              <a:t>20</a:t>
+              <a:t>22</a:t>
             </a:r>
           </a:p>
         </p:txBody>
@@ -10616,6 +9707,1410 @@
           </a:prstGeom>
         </p:spPr>
       </p:pic>
+      <p:sp>
+        <p:nvSpPr>
+          <p:cNvPr id="33" name="Row"/>
+          <p:cNvSpPr txBox="1"/>
+          <p:nvPr/>
+        </p:nvSpPr>
+        <p:spPr>
+          <a:xfrm>
+            <a:off x="822960" y="2400000"/>
+            <a:ext cx="365760" cy="310896"/>
+          </a:xfrm>
+          <a:prstGeom prst="rect">
+            <a:avLst/>
+          </a:prstGeom>
+          <a:noFill/>
+        </p:spPr>
+        <p:txBody>
+          <a:bodyPr wrap="square" lIns="0" rIns="0" tIns="0" bIns="0" anchor="ctr">
+            <a:spAutoFit/>
+          </a:bodyPr>
+          <a:lstStyle/>
+          <a:p>
+            <a:pPr algn="l">
+              <a:spcAft>
+                <a:spcPts val="0"/>
+              </a:spcAft>
+            </a:pPr>
+            <a:r>
+              <a:rPr sz="1300" b="1" i="0">
+                <a:solidFill>
+                  <a:srgbClr val="5B7A9A"/>
+                </a:solidFill>
+                <a:latin typeface="Courier New"/>
+              </a:rPr>
+              <a:t>&gt;</a:t>
+            </a:r>
+          </a:p>
+        </p:txBody>
+      </p:sp>
+      <p:sp>
+        <p:nvSpPr>
+          <p:cNvPr id="34" name="Row"/>
+          <p:cNvSpPr txBox="1"/>
+          <p:nvPr/>
+        </p:nvSpPr>
+        <p:spPr>
+          <a:xfrm>
+            <a:off x="1188720" y="2400000"/>
+            <a:ext cx="3017520" cy="310896"/>
+          </a:xfrm>
+          <a:prstGeom prst="rect">
+            <a:avLst/>
+          </a:prstGeom>
+          <a:noFill/>
+        </p:spPr>
+        <p:txBody>
+          <a:bodyPr wrap="square" lIns="0" rIns="0" tIns="0" bIns="0" anchor="ctr">
+            <a:spAutoFit/>
+          </a:bodyPr>
+          <a:lstStyle/>
+          <a:p>
+            <a:pPr algn="l">
+              <a:spcAft>
+                <a:spcPts val="0"/>
+              </a:spcAft>
+            </a:pPr>
+            <a:r>
+              <a:rPr sz="1300" b="1" i="0">
+                <a:solidFill>
+                  <a:srgbClr val="E8A070"/>
+                </a:solidFill>
+                <a:latin typeface="Courier New"/>
+              </a:rPr>
+              <a:t>/prototype</a:t>
+            </a:r>
+          </a:p>
+        </p:txBody>
+      </p:sp>
+      <p:sp>
+        <p:nvSpPr>
+          <p:cNvPr id="35" name="Row"/>
+          <p:cNvSpPr txBox="1"/>
+          <p:nvPr/>
+        </p:nvSpPr>
+        <p:spPr>
+          <a:xfrm>
+            <a:off x="4251959" y="2400000"/>
+            <a:ext cx="7315200" cy="310896"/>
+          </a:xfrm>
+          <a:prstGeom prst="rect">
+            <a:avLst/>
+          </a:prstGeom>
+          <a:noFill/>
+        </p:spPr>
+        <p:txBody>
+          <a:bodyPr wrap="square" lIns="0" rIns="0" tIns="0" bIns="0" anchor="ctr">
+            <a:spAutoFit/>
+          </a:bodyPr>
+          <a:lstStyle/>
+          <a:p>
+            <a:pPr algn="l">
+              <a:spcAft>
+                <a:spcPts val="0"/>
+              </a:spcAft>
+            </a:pPr>
+            <a:r>
+              <a:rPr sz="1150" b="0" i="0">
+                <a:solidFill>
+                  <a:srgbClr val="9AB0C8"/>
+                </a:solidFill>
+                <a:latin typeface="Arial"/>
+              </a:rPr>
+              <a:t>Idee im isolierten git-Worktree prüfen — optional, noch vor der Kette</a:t>
+            </a:r>
+          </a:p>
+        </p:txBody>
+      </p:sp>
+      <p:sp>
+        <p:nvSpPr>
+          <p:cNvPr id="36" name="Row"/>
+          <p:cNvSpPr txBox="1"/>
+          <p:nvPr/>
+        </p:nvSpPr>
+        <p:spPr>
+          <a:xfrm>
+            <a:off x="822960" y="2678000"/>
+            <a:ext cx="365760" cy="310896"/>
+          </a:xfrm>
+          <a:prstGeom prst="rect">
+            <a:avLst/>
+          </a:prstGeom>
+          <a:noFill/>
+        </p:spPr>
+        <p:txBody>
+          <a:bodyPr wrap="square" lIns="0" rIns="0" tIns="0" bIns="0" anchor="ctr">
+            <a:spAutoFit/>
+          </a:bodyPr>
+          <a:lstStyle/>
+          <a:p>
+            <a:pPr algn="l">
+              <a:spcAft>
+                <a:spcPts val="0"/>
+              </a:spcAft>
+            </a:pPr>
+            <a:r>
+              <a:rPr sz="1300" b="1" i="0">
+                <a:solidFill>
+                  <a:srgbClr val="5B7A9A"/>
+                </a:solidFill>
+                <a:latin typeface="Courier New"/>
+              </a:rPr>
+              <a:t>&gt;</a:t>
+            </a:r>
+          </a:p>
+        </p:txBody>
+      </p:sp>
+      <p:sp>
+        <p:nvSpPr>
+          <p:cNvPr id="37" name="Row"/>
+          <p:cNvSpPr txBox="1"/>
+          <p:nvPr/>
+        </p:nvSpPr>
+        <p:spPr>
+          <a:xfrm>
+            <a:off x="1188720" y="2678000"/>
+            <a:ext cx="3017520" cy="310896"/>
+          </a:xfrm>
+          <a:prstGeom prst="rect">
+            <a:avLst/>
+          </a:prstGeom>
+          <a:noFill/>
+        </p:spPr>
+        <p:txBody>
+          <a:bodyPr wrap="square" lIns="0" rIns="0" tIns="0" bIns="0" anchor="ctr">
+            <a:spAutoFit/>
+          </a:bodyPr>
+          <a:lstStyle/>
+          <a:p>
+            <a:pPr algn="l">
+              <a:spcAft>
+                <a:spcPts val="0"/>
+              </a:spcAft>
+            </a:pPr>
+            <a:r>
+              <a:rPr sz="1300" b="1" i="0">
+                <a:solidFill>
+                  <a:srgbClr val="E8A070"/>
+                </a:solidFill>
+                <a:latin typeface="Courier New"/>
+              </a:rPr>
+              <a:t>/mission-architect</a:t>
+            </a:r>
+          </a:p>
+        </p:txBody>
+      </p:sp>
+      <p:sp>
+        <p:nvSpPr>
+          <p:cNvPr id="38" name="Row"/>
+          <p:cNvSpPr txBox="1"/>
+          <p:nvPr/>
+        </p:nvSpPr>
+        <p:spPr>
+          <a:xfrm>
+            <a:off x="4251959" y="2678000"/>
+            <a:ext cx="7315200" cy="310896"/>
+          </a:xfrm>
+          <a:prstGeom prst="rect">
+            <a:avLst/>
+          </a:prstGeom>
+          <a:noFill/>
+        </p:spPr>
+        <p:txBody>
+          <a:bodyPr wrap="square" lIns="0" rIns="0" tIns="0" bIns="0" anchor="ctr">
+            <a:spAutoFit/>
+          </a:bodyPr>
+          <a:lstStyle/>
+          <a:p>
+            <a:pPr algn="l">
+              <a:spcAft>
+                <a:spcPts val="0"/>
+              </a:spcAft>
+            </a:pPr>
+            <a:r>
+              <a:rPr sz="1150" b="0" i="0">
+                <a:solidFill>
+                  <a:srgbClr val="9AB0C8"/>
+                </a:solidFill>
+                <a:latin typeface="Arial"/>
+              </a:rPr>
+              <a:t>Neues Projekt oder Subsystem starten (Greenfield)</a:t>
+            </a:r>
+          </a:p>
+        </p:txBody>
+      </p:sp>
+      <p:sp>
+        <p:nvSpPr>
+          <p:cNvPr id="39" name="Row"/>
+          <p:cNvSpPr txBox="1"/>
+          <p:nvPr/>
+        </p:nvSpPr>
+        <p:spPr>
+          <a:xfrm>
+            <a:off x="822960" y="2956000"/>
+            <a:ext cx="365760" cy="310896"/>
+          </a:xfrm>
+          <a:prstGeom prst="rect">
+            <a:avLst/>
+          </a:prstGeom>
+          <a:noFill/>
+        </p:spPr>
+        <p:txBody>
+          <a:bodyPr wrap="square" lIns="0" rIns="0" tIns="0" bIns="0" anchor="ctr">
+            <a:spAutoFit/>
+          </a:bodyPr>
+          <a:lstStyle/>
+          <a:p>
+            <a:pPr algn="l">
+              <a:spcAft>
+                <a:spcPts val="0"/>
+              </a:spcAft>
+            </a:pPr>
+            <a:r>
+              <a:rPr sz="1300" b="1" i="0">
+                <a:solidFill>
+                  <a:srgbClr val="5B7A9A"/>
+                </a:solidFill>
+                <a:latin typeface="Courier New"/>
+              </a:rPr>
+              <a:t>&gt;</a:t>
+            </a:r>
+          </a:p>
+        </p:txBody>
+      </p:sp>
+      <p:sp>
+        <p:nvSpPr>
+          <p:cNvPr id="40" name="Row"/>
+          <p:cNvSpPr txBox="1"/>
+          <p:nvPr/>
+        </p:nvSpPr>
+        <p:spPr>
+          <a:xfrm>
+            <a:off x="1188720" y="2956000"/>
+            <a:ext cx="3017520" cy="310896"/>
+          </a:xfrm>
+          <a:prstGeom prst="rect">
+            <a:avLst/>
+          </a:prstGeom>
+          <a:noFill/>
+        </p:spPr>
+        <p:txBody>
+          <a:bodyPr wrap="square" lIns="0" rIns="0" tIns="0" bIns="0" anchor="ctr">
+            <a:spAutoFit/>
+          </a:bodyPr>
+          <a:lstStyle/>
+          <a:p>
+            <a:pPr algn="l">
+              <a:spcAft>
+                <a:spcPts val="0"/>
+              </a:spcAft>
+            </a:pPr>
+            <a:r>
+              <a:rPr sz="1300" b="1" i="0">
+                <a:solidFill>
+                  <a:srgbClr val="E8A070"/>
+                </a:solidFill>
+                <a:latin typeface="Courier New"/>
+              </a:rPr>
+              <a:t>/feature-architect</a:t>
+            </a:r>
+          </a:p>
+        </p:txBody>
+      </p:sp>
+      <p:sp>
+        <p:nvSpPr>
+          <p:cNvPr id="41" name="Row"/>
+          <p:cNvSpPr txBox="1"/>
+          <p:nvPr/>
+        </p:nvSpPr>
+        <p:spPr>
+          <a:xfrm>
+            <a:off x="4251959" y="2956000"/>
+            <a:ext cx="7315200" cy="310896"/>
+          </a:xfrm>
+          <a:prstGeom prst="rect">
+            <a:avLst/>
+          </a:prstGeom>
+          <a:noFill/>
+        </p:spPr>
+        <p:txBody>
+          <a:bodyPr wrap="square" lIns="0" rIns="0" tIns="0" bIns="0" anchor="ctr">
+            <a:spAutoFit/>
+          </a:bodyPr>
+          <a:lstStyle/>
+          <a:p>
+            <a:pPr algn="l">
+              <a:spcAft>
+                <a:spcPts val="0"/>
+              </a:spcAft>
+            </a:pPr>
+            <a:r>
+              <a:rPr sz="1150" b="0" i="0">
+                <a:solidFill>
+                  <a:srgbClr val="9AB0C8"/>
+                </a:solidFill>
+                <a:latin typeface="Arial"/>
+              </a:rPr>
+              <a:t>Neues Feature im bestehenden System definieren (Brownfield)</a:t>
+            </a:r>
+          </a:p>
+        </p:txBody>
+      </p:sp>
+      <p:sp>
+        <p:nvSpPr>
+          <p:cNvPr id="42" name="Row"/>
+          <p:cNvSpPr txBox="1"/>
+          <p:nvPr/>
+        </p:nvSpPr>
+        <p:spPr>
+          <a:xfrm>
+            <a:off x="822960" y="3234000"/>
+            <a:ext cx="365760" cy="310896"/>
+          </a:xfrm>
+          <a:prstGeom prst="rect">
+            <a:avLst/>
+          </a:prstGeom>
+          <a:noFill/>
+        </p:spPr>
+        <p:txBody>
+          <a:bodyPr wrap="square" lIns="0" rIns="0" tIns="0" bIns="0" anchor="ctr">
+            <a:spAutoFit/>
+          </a:bodyPr>
+          <a:lstStyle/>
+          <a:p>
+            <a:pPr algn="l">
+              <a:spcAft>
+                <a:spcPts val="0"/>
+              </a:spcAft>
+            </a:pPr>
+            <a:r>
+              <a:rPr sz="1300" b="1" i="0">
+                <a:solidFill>
+                  <a:srgbClr val="5B7A9A"/>
+                </a:solidFill>
+                <a:latin typeface="Courier New"/>
+              </a:rPr>
+              <a:t>&gt;</a:t>
+            </a:r>
+          </a:p>
+        </p:txBody>
+      </p:sp>
+      <p:sp>
+        <p:nvSpPr>
+          <p:cNvPr id="43" name="Row"/>
+          <p:cNvSpPr txBox="1"/>
+          <p:nvPr/>
+        </p:nvSpPr>
+        <p:spPr>
+          <a:xfrm>
+            <a:off x="1188720" y="3234000"/>
+            <a:ext cx="3017520" cy="310896"/>
+          </a:xfrm>
+          <a:prstGeom prst="rect">
+            <a:avLst/>
+          </a:prstGeom>
+          <a:noFill/>
+        </p:spPr>
+        <p:txBody>
+          <a:bodyPr wrap="square" lIns="0" rIns="0" tIns="0" bIns="0" anchor="ctr">
+            <a:spAutoFit/>
+          </a:bodyPr>
+          <a:lstStyle/>
+          <a:p>
+            <a:pPr algn="l">
+              <a:spcAft>
+                <a:spcPts val="0"/>
+              </a:spcAft>
+            </a:pPr>
+            <a:r>
+              <a:rPr sz="1300" b="1" i="0">
+                <a:solidFill>
+                  <a:srgbClr val="E8A070"/>
+                </a:solidFill>
+                <a:latin typeface="Courier New"/>
+              </a:rPr>
+              <a:t>/specifier</a:t>
+            </a:r>
+          </a:p>
+        </p:txBody>
+      </p:sp>
+      <p:sp>
+        <p:nvSpPr>
+          <p:cNvPr id="44" name="Row"/>
+          <p:cNvSpPr txBox="1"/>
+          <p:nvPr/>
+        </p:nvSpPr>
+        <p:spPr>
+          <a:xfrm>
+            <a:off x="4251959" y="3234000"/>
+            <a:ext cx="7315200" cy="310896"/>
+          </a:xfrm>
+          <a:prstGeom prst="rect">
+            <a:avLst/>
+          </a:prstGeom>
+          <a:noFill/>
+        </p:spPr>
+        <p:txBody>
+          <a:bodyPr wrap="square" lIns="0" rIns="0" tIns="0" bIns="0" anchor="ctr">
+            <a:spAutoFit/>
+          </a:bodyPr>
+          <a:lstStyle/>
+          <a:p>
+            <a:pPr algn="l">
+              <a:spcAft>
+                <a:spcPts val="0"/>
+              </a:spcAft>
+            </a:pPr>
+            <a:r>
+              <a:rPr sz="1150" b="0" i="0">
+                <a:solidFill>
+                  <a:srgbClr val="9AB0C8"/>
+                </a:solidFill>
+                <a:latin typeface="Arial"/>
+              </a:rPr>
+              <a:t>Mission in eine technologieneutrale Spezifikation übersetzen</a:t>
+            </a:r>
+          </a:p>
+        </p:txBody>
+      </p:sp>
+      <p:sp>
+        <p:nvSpPr>
+          <p:cNvPr id="45" name="Row"/>
+          <p:cNvSpPr txBox="1"/>
+          <p:nvPr/>
+        </p:nvSpPr>
+        <p:spPr>
+          <a:xfrm>
+            <a:off x="822960" y="3512000"/>
+            <a:ext cx="365760" cy="310896"/>
+          </a:xfrm>
+          <a:prstGeom prst="rect">
+            <a:avLst/>
+          </a:prstGeom>
+          <a:noFill/>
+        </p:spPr>
+        <p:txBody>
+          <a:bodyPr wrap="square" lIns="0" rIns="0" tIns="0" bIns="0" anchor="ctr">
+            <a:spAutoFit/>
+          </a:bodyPr>
+          <a:lstStyle/>
+          <a:p>
+            <a:pPr algn="l">
+              <a:spcAft>
+                <a:spcPts val="0"/>
+              </a:spcAft>
+            </a:pPr>
+            <a:r>
+              <a:rPr sz="1300" b="1" i="0">
+                <a:solidFill>
+                  <a:srgbClr val="5B7A9A"/>
+                </a:solidFill>
+                <a:latin typeface="Courier New"/>
+              </a:rPr>
+              <a:t>&gt;</a:t>
+            </a:r>
+          </a:p>
+        </p:txBody>
+      </p:sp>
+      <p:sp>
+        <p:nvSpPr>
+          <p:cNvPr id="46" name="Row"/>
+          <p:cNvSpPr txBox="1"/>
+          <p:nvPr/>
+        </p:nvSpPr>
+        <p:spPr>
+          <a:xfrm>
+            <a:off x="1188720" y="3512000"/>
+            <a:ext cx="3017520" cy="310896"/>
+          </a:xfrm>
+          <a:prstGeom prst="rect">
+            <a:avLst/>
+          </a:prstGeom>
+          <a:noFill/>
+        </p:spPr>
+        <p:txBody>
+          <a:bodyPr wrap="square" lIns="0" rIns="0" tIns="0" bIns="0" anchor="ctr">
+            <a:spAutoFit/>
+          </a:bodyPr>
+          <a:lstStyle/>
+          <a:p>
+            <a:pPr algn="l">
+              <a:spcAft>
+                <a:spcPts val="0"/>
+              </a:spcAft>
+            </a:pPr>
+            <a:r>
+              <a:rPr sz="1300" b="1" i="0">
+                <a:solidFill>
+                  <a:srgbClr val="E8A070"/>
+                </a:solidFill>
+                <a:latin typeface="Courier New"/>
+              </a:rPr>
+              <a:t>/epic-planner</a:t>
+            </a:r>
+          </a:p>
+        </p:txBody>
+      </p:sp>
+      <p:sp>
+        <p:nvSpPr>
+          <p:cNvPr id="47" name="Row"/>
+          <p:cNvSpPr txBox="1"/>
+          <p:nvPr/>
+        </p:nvSpPr>
+        <p:spPr>
+          <a:xfrm>
+            <a:off x="4251959" y="3512000"/>
+            <a:ext cx="7315200" cy="310896"/>
+          </a:xfrm>
+          <a:prstGeom prst="rect">
+            <a:avLst/>
+          </a:prstGeom>
+          <a:noFill/>
+        </p:spPr>
+        <p:txBody>
+          <a:bodyPr wrap="square" lIns="0" rIns="0" tIns="0" bIns="0" anchor="ctr">
+            <a:spAutoFit/>
+          </a:bodyPr>
+          <a:lstStyle/>
+          <a:p>
+            <a:pPr algn="l">
+              <a:spcAft>
+                <a:spcPts val="0"/>
+              </a:spcAft>
+            </a:pPr>
+            <a:r>
+              <a:rPr sz="1150" b="0" i="0">
+                <a:solidFill>
+                  <a:srgbClr val="9AB0C8"/>
+                </a:solidFill>
+                <a:latin typeface="Arial"/>
+              </a:rPr>
+              <a:t>Spec in Epics zerlegen — nur auf dem Greenfield-Pfad</a:t>
+            </a:r>
+          </a:p>
+        </p:txBody>
+      </p:sp>
+      <p:sp>
+        <p:nvSpPr>
+          <p:cNvPr id="48" name="Row"/>
+          <p:cNvSpPr txBox="1"/>
+          <p:nvPr/>
+        </p:nvSpPr>
+        <p:spPr>
+          <a:xfrm>
+            <a:off x="822960" y="3790000"/>
+            <a:ext cx="365760" cy="310896"/>
+          </a:xfrm>
+          <a:prstGeom prst="rect">
+            <a:avLst/>
+          </a:prstGeom>
+          <a:noFill/>
+        </p:spPr>
+        <p:txBody>
+          <a:bodyPr wrap="square" lIns="0" rIns="0" tIns="0" bIns="0" anchor="ctr">
+            <a:spAutoFit/>
+          </a:bodyPr>
+          <a:lstStyle/>
+          <a:p>
+            <a:pPr algn="l">
+              <a:spcAft>
+                <a:spcPts val="0"/>
+              </a:spcAft>
+            </a:pPr>
+            <a:r>
+              <a:rPr sz="1300" b="1" i="0">
+                <a:solidFill>
+                  <a:srgbClr val="5B7A9A"/>
+                </a:solidFill>
+                <a:latin typeface="Courier New"/>
+              </a:rPr>
+              <a:t>&gt;</a:t>
+            </a:r>
+          </a:p>
+        </p:txBody>
+      </p:sp>
+      <p:sp>
+        <p:nvSpPr>
+          <p:cNvPr id="49" name="Row"/>
+          <p:cNvSpPr txBox="1"/>
+          <p:nvPr/>
+        </p:nvSpPr>
+        <p:spPr>
+          <a:xfrm>
+            <a:off x="1188720" y="3790000"/>
+            <a:ext cx="3017520" cy="310896"/>
+          </a:xfrm>
+          <a:prstGeom prst="rect">
+            <a:avLst/>
+          </a:prstGeom>
+          <a:noFill/>
+        </p:spPr>
+        <p:txBody>
+          <a:bodyPr wrap="square" lIns="0" rIns="0" tIns="0" bIns="0" anchor="ctr">
+            <a:spAutoFit/>
+          </a:bodyPr>
+          <a:lstStyle/>
+          <a:p>
+            <a:pPr algn="l">
+              <a:spcAft>
+                <a:spcPts val="0"/>
+              </a:spcAft>
+            </a:pPr>
+            <a:r>
+              <a:rPr sz="1300" b="1" i="0">
+                <a:solidFill>
+                  <a:srgbClr val="E8A070"/>
+                </a:solidFill>
+                <a:latin typeface="Courier New"/>
+              </a:rPr>
+              <a:t>/fact-finder</a:t>
+            </a:r>
+          </a:p>
+        </p:txBody>
+      </p:sp>
+      <p:sp>
+        <p:nvSpPr>
+          <p:cNvPr id="50" name="Row"/>
+          <p:cNvSpPr txBox="1"/>
+          <p:nvPr/>
+        </p:nvSpPr>
+        <p:spPr>
+          <a:xfrm>
+            <a:off x="4251959" y="3790000"/>
+            <a:ext cx="7315200" cy="310896"/>
+          </a:xfrm>
+          <a:prstGeom prst="rect">
+            <a:avLst/>
+          </a:prstGeom>
+          <a:noFill/>
+        </p:spPr>
+        <p:txBody>
+          <a:bodyPr wrap="square" lIns="0" rIns="0" tIns="0" bIns="0" anchor="ctr">
+            <a:spAutoFit/>
+          </a:bodyPr>
+          <a:lstStyle/>
+          <a:p>
+            <a:pPr algn="l">
+              <a:spcAft>
+                <a:spcPts val="0"/>
+              </a:spcAft>
+            </a:pPr>
+            <a:r>
+              <a:rPr sz="1150" b="0" i="0">
+                <a:solidFill>
+                  <a:srgbClr val="9AB0C8"/>
+                </a:solidFill>
+                <a:latin typeface="Arial"/>
+              </a:rPr>
+              <a:t>Codebasis und externes Wissen verifiziert erheben</a:t>
+            </a:r>
+          </a:p>
+        </p:txBody>
+      </p:sp>
+      <p:sp>
+        <p:nvSpPr>
+          <p:cNvPr id="51" name="Row"/>
+          <p:cNvSpPr txBox="1"/>
+          <p:nvPr/>
+        </p:nvSpPr>
+        <p:spPr>
+          <a:xfrm>
+            <a:off x="822960" y="4068000"/>
+            <a:ext cx="365760" cy="310896"/>
+          </a:xfrm>
+          <a:prstGeom prst="rect">
+            <a:avLst/>
+          </a:prstGeom>
+          <a:noFill/>
+        </p:spPr>
+        <p:txBody>
+          <a:bodyPr wrap="square" lIns="0" rIns="0" tIns="0" bIns="0" anchor="ctr">
+            <a:spAutoFit/>
+          </a:bodyPr>
+          <a:lstStyle/>
+          <a:p>
+            <a:pPr algn="l">
+              <a:spcAft>
+                <a:spcPts val="0"/>
+              </a:spcAft>
+            </a:pPr>
+            <a:r>
+              <a:rPr sz="1300" b="1" i="0">
+                <a:solidFill>
+                  <a:srgbClr val="5B7A9A"/>
+                </a:solidFill>
+                <a:latin typeface="Courier New"/>
+              </a:rPr>
+              <a:t>&gt;</a:t>
+            </a:r>
+          </a:p>
+        </p:txBody>
+      </p:sp>
+      <p:sp>
+        <p:nvSpPr>
+          <p:cNvPr id="52" name="Row"/>
+          <p:cNvSpPr txBox="1"/>
+          <p:nvPr/>
+        </p:nvSpPr>
+        <p:spPr>
+          <a:xfrm>
+            <a:off x="1188720" y="4068000"/>
+            <a:ext cx="3017520" cy="310896"/>
+          </a:xfrm>
+          <a:prstGeom prst="rect">
+            <a:avLst/>
+          </a:prstGeom>
+          <a:noFill/>
+        </p:spPr>
+        <p:txBody>
+          <a:bodyPr wrap="square" lIns="0" rIns="0" tIns="0" bIns="0" anchor="ctr">
+            <a:spAutoFit/>
+          </a:bodyPr>
+          <a:lstStyle/>
+          <a:p>
+            <a:pPr algn="l">
+              <a:spcAft>
+                <a:spcPts val="0"/>
+              </a:spcAft>
+            </a:pPr>
+            <a:r>
+              <a:rPr sz="1300" b="1" i="0">
+                <a:solidFill>
+                  <a:srgbClr val="E8A070"/>
+                </a:solidFill>
+                <a:latin typeface="Courier New"/>
+              </a:rPr>
+              <a:t>/fact-finder QA</a:t>
+            </a:r>
+          </a:p>
+        </p:txBody>
+      </p:sp>
+      <p:sp>
+        <p:nvSpPr>
+          <p:cNvPr id="53" name="Row"/>
+          <p:cNvSpPr txBox="1"/>
+          <p:nvPr/>
+        </p:nvSpPr>
+        <p:spPr>
+          <a:xfrm>
+            <a:off x="4251959" y="4068000"/>
+            <a:ext cx="7315200" cy="310896"/>
+          </a:xfrm>
+          <a:prstGeom prst="rect">
+            <a:avLst/>
+          </a:prstGeom>
+          <a:noFill/>
+        </p:spPr>
+        <p:txBody>
+          <a:bodyPr wrap="square" lIns="0" rIns="0" tIns="0" bIns="0" anchor="ctr">
+            <a:spAutoFit/>
+          </a:bodyPr>
+          <a:lstStyle/>
+          <a:p>
+            <a:pPr algn="l">
+              <a:spcAft>
+                <a:spcPts val="0"/>
+              </a:spcAft>
+            </a:pPr>
+            <a:r>
+              <a:rPr sz="1150" b="0" i="0">
+                <a:solidFill>
+                  <a:srgbClr val="9AB0C8"/>
+                </a:solidFill>
+                <a:latin typeface="Arial"/>
+              </a:rPr>
+              <a:t>Parallelen Code-Quality-Review starten (Bericht nach qa/)</a:t>
+            </a:r>
+          </a:p>
+        </p:txBody>
+      </p:sp>
+      <p:sp>
+        <p:nvSpPr>
+          <p:cNvPr id="54" name="Row"/>
+          <p:cNvSpPr txBox="1"/>
+          <p:nvPr/>
+        </p:nvSpPr>
+        <p:spPr>
+          <a:xfrm>
+            <a:off x="822960" y="4346000"/>
+            <a:ext cx="365760" cy="310896"/>
+          </a:xfrm>
+          <a:prstGeom prst="rect">
+            <a:avLst/>
+          </a:prstGeom>
+          <a:noFill/>
+        </p:spPr>
+        <p:txBody>
+          <a:bodyPr wrap="square" lIns="0" rIns="0" tIns="0" bIns="0" anchor="ctr">
+            <a:spAutoFit/>
+          </a:bodyPr>
+          <a:lstStyle/>
+          <a:p>
+            <a:pPr algn="l">
+              <a:spcAft>
+                <a:spcPts val="0"/>
+              </a:spcAft>
+            </a:pPr>
+            <a:r>
+              <a:rPr sz="1300" b="1" i="0">
+                <a:solidFill>
+                  <a:srgbClr val="5B7A9A"/>
+                </a:solidFill>
+                <a:latin typeface="Courier New"/>
+              </a:rPr>
+              <a:t>&gt;</a:t>
+            </a:r>
+          </a:p>
+        </p:txBody>
+      </p:sp>
+      <p:sp>
+        <p:nvSpPr>
+          <p:cNvPr id="55" name="Row"/>
+          <p:cNvSpPr txBox="1"/>
+          <p:nvPr/>
+        </p:nvSpPr>
+        <p:spPr>
+          <a:xfrm>
+            <a:off x="1188720" y="4346000"/>
+            <a:ext cx="3017520" cy="310896"/>
+          </a:xfrm>
+          <a:prstGeom prst="rect">
+            <a:avLst/>
+          </a:prstGeom>
+          <a:noFill/>
+        </p:spPr>
+        <p:txBody>
+          <a:bodyPr wrap="square" lIns="0" rIns="0" tIns="0" bIns="0" anchor="ctr">
+            <a:spAutoFit/>
+          </a:bodyPr>
+          <a:lstStyle/>
+          <a:p>
+            <a:pPr algn="l">
+              <a:spcAft>
+                <a:spcPts val="0"/>
+              </a:spcAft>
+            </a:pPr>
+            <a:r>
+              <a:rPr sz="1300" b="1" i="0">
+                <a:solidFill>
+                  <a:srgbClr val="E8A070"/>
+                </a:solidFill>
+                <a:latin typeface="Courier New"/>
+              </a:rPr>
+              <a:t>/planner</a:t>
+            </a:r>
+          </a:p>
+        </p:txBody>
+      </p:sp>
+      <p:sp>
+        <p:nvSpPr>
+          <p:cNvPr id="56" name="Row"/>
+          <p:cNvSpPr txBox="1"/>
+          <p:nvPr/>
+        </p:nvSpPr>
+        <p:spPr>
+          <a:xfrm>
+            <a:off x="4251959" y="4346000"/>
+            <a:ext cx="7315200" cy="310896"/>
+          </a:xfrm>
+          <a:prstGeom prst="rect">
+            <a:avLst/>
+          </a:prstGeom>
+          <a:noFill/>
+        </p:spPr>
+        <p:txBody>
+          <a:bodyPr wrap="square" lIns="0" rIns="0" tIns="0" bIns="0" anchor="ctr">
+            <a:spAutoFit/>
+          </a:bodyPr>
+          <a:lstStyle/>
+          <a:p>
+            <a:pPr algn="l">
+              <a:spcAft>
+                <a:spcPts val="0"/>
+              </a:spcAft>
+            </a:pPr>
+            <a:r>
+              <a:rPr sz="1150" b="0" i="0">
+                <a:solidFill>
+                  <a:srgbClr val="9AB0C8"/>
+                </a:solidFill>
+                <a:latin typeface="Arial"/>
+              </a:rPr>
+              <a:t>Plan mit Wellen, Evidenz und Verify-Kommandos schreiben</a:t>
+            </a:r>
+          </a:p>
+        </p:txBody>
+      </p:sp>
+      <p:sp>
+        <p:nvSpPr>
+          <p:cNvPr id="57" name="Row"/>
+          <p:cNvSpPr txBox="1"/>
+          <p:nvPr/>
+        </p:nvSpPr>
+        <p:spPr>
+          <a:xfrm>
+            <a:off x="822960" y="4624000"/>
+            <a:ext cx="365760" cy="310896"/>
+          </a:xfrm>
+          <a:prstGeom prst="rect">
+            <a:avLst/>
+          </a:prstGeom>
+          <a:noFill/>
+        </p:spPr>
+        <p:txBody>
+          <a:bodyPr wrap="square" lIns="0" rIns="0" tIns="0" bIns="0" anchor="ctr">
+            <a:spAutoFit/>
+          </a:bodyPr>
+          <a:lstStyle/>
+          <a:p>
+            <a:pPr algn="l">
+              <a:spcAft>
+                <a:spcPts val="0"/>
+              </a:spcAft>
+            </a:pPr>
+            <a:r>
+              <a:rPr sz="1300" b="1" i="0">
+                <a:solidFill>
+                  <a:srgbClr val="5B7A9A"/>
+                </a:solidFill>
+                <a:latin typeface="Courier New"/>
+              </a:rPr>
+              <a:t>&gt;</a:t>
+            </a:r>
+          </a:p>
+        </p:txBody>
+      </p:sp>
+      <p:sp>
+        <p:nvSpPr>
+          <p:cNvPr id="58" name="Row"/>
+          <p:cNvSpPr txBox="1"/>
+          <p:nvPr/>
+        </p:nvSpPr>
+        <p:spPr>
+          <a:xfrm>
+            <a:off x="1188720" y="4624000"/>
+            <a:ext cx="3017520" cy="310896"/>
+          </a:xfrm>
+          <a:prstGeom prst="rect">
+            <a:avLst/>
+          </a:prstGeom>
+          <a:noFill/>
+        </p:spPr>
+        <p:txBody>
+          <a:bodyPr wrap="square" lIns="0" rIns="0" tIns="0" bIns="0" anchor="ctr">
+            <a:spAutoFit/>
+          </a:bodyPr>
+          <a:lstStyle/>
+          <a:p>
+            <a:pPr algn="l">
+              <a:spcAft>
+                <a:spcPts val="0"/>
+              </a:spcAft>
+            </a:pPr>
+            <a:r>
+              <a:rPr sz="1300" b="1" i="0">
+                <a:solidFill>
+                  <a:srgbClr val="E8A070"/>
+                </a:solidFill>
+                <a:latin typeface="Courier New"/>
+              </a:rPr>
+              <a:t>/implement</a:t>
+            </a:r>
+          </a:p>
+        </p:txBody>
+      </p:sp>
+      <p:sp>
+        <p:nvSpPr>
+          <p:cNvPr id="59" name="Row"/>
+          <p:cNvSpPr txBox="1"/>
+          <p:nvPr/>
+        </p:nvSpPr>
+        <p:spPr>
+          <a:xfrm>
+            <a:off x="4251959" y="4624000"/>
+            <a:ext cx="7315200" cy="310896"/>
+          </a:xfrm>
+          <a:prstGeom prst="rect">
+            <a:avLst/>
+          </a:prstGeom>
+          <a:noFill/>
+        </p:spPr>
+        <p:txBody>
+          <a:bodyPr wrap="square" lIns="0" rIns="0" tIns="0" bIns="0" anchor="ctr">
+            <a:spAutoFit/>
+          </a:bodyPr>
+          <a:lstStyle/>
+          <a:p>
+            <a:pPr algn="l">
+              <a:spcAft>
+                <a:spcPts val="0"/>
+              </a:spcAft>
+            </a:pPr>
+            <a:r>
+              <a:rPr sz="1150" b="0" i="0">
+                <a:solidFill>
+                  <a:srgbClr val="9AB0C8"/>
+                </a:solidFill>
+                <a:latin typeface="Arial"/>
+              </a:rPr>
+              <a:t>Plan wellenweise ausführen — oder nach Abbruch fortsetzen</a:t>
+            </a:r>
+          </a:p>
+        </p:txBody>
+      </p:sp>
+      <p:sp>
+        <p:nvSpPr>
+          <p:cNvPr id="60" name="Row"/>
+          <p:cNvSpPr txBox="1"/>
+          <p:nvPr/>
+        </p:nvSpPr>
+        <p:spPr>
+          <a:xfrm>
+            <a:off x="822960" y="5068000"/>
+            <a:ext cx="365760" cy="310896"/>
+          </a:xfrm>
+          <a:prstGeom prst="rect">
+            <a:avLst/>
+          </a:prstGeom>
+          <a:noFill/>
+        </p:spPr>
+        <p:txBody>
+          <a:bodyPr wrap="square" lIns="0" rIns="0" tIns="0" bIns="0" anchor="ctr">
+            <a:spAutoFit/>
+          </a:bodyPr>
+          <a:lstStyle/>
+          <a:p>
+            <a:pPr algn="l">
+              <a:spcAft>
+                <a:spcPts val="0"/>
+              </a:spcAft>
+            </a:pPr>
+            <a:r>
+              <a:rPr sz="1300" b="1" i="0">
+                <a:solidFill>
+                  <a:srgbClr val="5B7A9A"/>
+                </a:solidFill>
+                <a:latin typeface="Courier New"/>
+              </a:rPr>
+              <a:t>&gt;</a:t>
+            </a:r>
+          </a:p>
+        </p:txBody>
+      </p:sp>
+      <p:sp>
+        <p:nvSpPr>
+          <p:cNvPr id="61" name="Row"/>
+          <p:cNvSpPr txBox="1"/>
+          <p:nvPr/>
+        </p:nvSpPr>
+        <p:spPr>
+          <a:xfrm>
+            <a:off x="1188720" y="5068000"/>
+            <a:ext cx="3017520" cy="310896"/>
+          </a:xfrm>
+          <a:prstGeom prst="rect">
+            <a:avLst/>
+          </a:prstGeom>
+          <a:noFill/>
+        </p:spPr>
+        <p:txBody>
+          <a:bodyPr wrap="square" lIns="0" rIns="0" tIns="0" bIns="0" anchor="ctr">
+            <a:spAutoFit/>
+          </a:bodyPr>
+          <a:lstStyle/>
+          <a:p>
+            <a:pPr algn="l">
+              <a:spcAft>
+                <a:spcPts val="0"/>
+              </a:spcAft>
+            </a:pPr>
+            <a:r>
+              <a:rPr sz="1300" b="1" i="0">
+                <a:solidFill>
+                  <a:srgbClr val="E8A070"/>
+                </a:solidFill>
+                <a:latin typeface="Courier New"/>
+              </a:rPr>
+              <a:t>/dox-init</a:t>
+            </a:r>
+          </a:p>
+        </p:txBody>
+      </p:sp>
+      <p:sp>
+        <p:nvSpPr>
+          <p:cNvPr id="62" name="Row"/>
+          <p:cNvSpPr txBox="1"/>
+          <p:nvPr/>
+        </p:nvSpPr>
+        <p:spPr>
+          <a:xfrm>
+            <a:off x="4251959" y="5068000"/>
+            <a:ext cx="7315200" cy="310896"/>
+          </a:xfrm>
+          <a:prstGeom prst="rect">
+            <a:avLst/>
+          </a:prstGeom>
+          <a:noFill/>
+        </p:spPr>
+        <p:txBody>
+          <a:bodyPr wrap="square" lIns="0" rIns="0" tIns="0" bIns="0" anchor="ctr">
+            <a:spAutoFit/>
+          </a:bodyPr>
+          <a:lstStyle/>
+          <a:p>
+            <a:pPr algn="l">
+              <a:spcAft>
+                <a:spcPts val="0"/>
+              </a:spcAft>
+            </a:pPr>
+            <a:r>
+              <a:rPr sz="1150" b="0" i="0">
+                <a:solidFill>
+                  <a:srgbClr val="9AB0C8"/>
+                </a:solidFill>
+                <a:latin typeface="Arial"/>
+              </a:rPr>
+              <a:t>Governance-Baum bootstrappen (einmalig bei Projektstart)</a:t>
+            </a:r>
+          </a:p>
+        </p:txBody>
+      </p:sp>
+      <p:sp>
+        <p:nvSpPr>
+          <p:cNvPr id="63" name="Row"/>
+          <p:cNvSpPr txBox="1"/>
+          <p:nvPr/>
+        </p:nvSpPr>
+        <p:spPr>
+          <a:xfrm>
+            <a:off x="822960" y="5346000"/>
+            <a:ext cx="365760" cy="310896"/>
+          </a:xfrm>
+          <a:prstGeom prst="rect">
+            <a:avLst/>
+          </a:prstGeom>
+          <a:noFill/>
+        </p:spPr>
+        <p:txBody>
+          <a:bodyPr wrap="square" lIns="0" rIns="0" tIns="0" bIns="0" anchor="ctr">
+            <a:spAutoFit/>
+          </a:bodyPr>
+          <a:lstStyle/>
+          <a:p>
+            <a:pPr algn="l">
+              <a:spcAft>
+                <a:spcPts val="0"/>
+              </a:spcAft>
+            </a:pPr>
+            <a:r>
+              <a:rPr sz="1300" b="1" i="0">
+                <a:solidFill>
+                  <a:srgbClr val="5B7A9A"/>
+                </a:solidFill>
+                <a:latin typeface="Courier New"/>
+              </a:rPr>
+              <a:t>&gt;</a:t>
+            </a:r>
+          </a:p>
+        </p:txBody>
+      </p:sp>
+      <p:sp>
+        <p:nvSpPr>
+          <p:cNvPr id="64" name="Row"/>
+          <p:cNvSpPr txBox="1"/>
+          <p:nvPr/>
+        </p:nvSpPr>
+        <p:spPr>
+          <a:xfrm>
+            <a:off x="1188720" y="5346000"/>
+            <a:ext cx="3017520" cy="310896"/>
+          </a:xfrm>
+          <a:prstGeom prst="rect">
+            <a:avLst/>
+          </a:prstGeom>
+          <a:noFill/>
+        </p:spPr>
+        <p:txBody>
+          <a:bodyPr wrap="square" lIns="0" rIns="0" tIns="0" bIns="0" anchor="ctr">
+            <a:spAutoFit/>
+          </a:bodyPr>
+          <a:lstStyle/>
+          <a:p>
+            <a:pPr algn="l">
+              <a:spcAft>
+                <a:spcPts val="0"/>
+              </a:spcAft>
+            </a:pPr>
+            <a:r>
+              <a:rPr sz="1300" b="1" i="0">
+                <a:solidFill>
+                  <a:srgbClr val="E8A070"/>
+                </a:solidFill>
+                <a:latin typeface="Courier New"/>
+              </a:rPr>
+              <a:t>/dox-update</a:t>
+            </a:r>
+          </a:p>
+        </p:txBody>
+      </p:sp>
+      <p:sp>
+        <p:nvSpPr>
+          <p:cNvPr id="65" name="Row"/>
+          <p:cNvSpPr txBox="1"/>
+          <p:nvPr/>
+        </p:nvSpPr>
+        <p:spPr>
+          <a:xfrm>
+            <a:off x="4251959" y="5346000"/>
+            <a:ext cx="7315200" cy="310896"/>
+          </a:xfrm>
+          <a:prstGeom prst="rect">
+            <a:avLst/>
+          </a:prstGeom>
+          <a:noFill/>
+        </p:spPr>
+        <p:txBody>
+          <a:bodyPr wrap="square" lIns="0" rIns="0" tIns="0" bIns="0" anchor="ctr">
+            <a:spAutoFit/>
+          </a:bodyPr>
+          <a:lstStyle/>
+          <a:p>
+            <a:pPr algn="l">
+              <a:spcAft>
+                <a:spcPts val="0"/>
+              </a:spcAft>
+            </a:pPr>
+            <a:r>
+              <a:rPr sz="1150" b="0" i="0">
+                <a:solidFill>
+                  <a:srgbClr val="9AB0C8"/>
+                </a:solidFill>
+                <a:latin typeface="Arial"/>
+              </a:rPr>
+              <a:t>Veraltete AGENTS.md-Dateien nach Codeänderungen reparieren</a:t>
+            </a:r>
+          </a:p>
+        </p:txBody>
+      </p:sp>
+      <p:sp>
+        <p:nvSpPr>
+          <p:cNvPr id="66" name="Row"/>
+          <p:cNvSpPr txBox="1"/>
+          <p:nvPr/>
+        </p:nvSpPr>
+        <p:spPr>
+          <a:xfrm>
+            <a:off x="822960" y="5624000"/>
+            <a:ext cx="365760" cy="310896"/>
+          </a:xfrm>
+          <a:prstGeom prst="rect">
+            <a:avLst/>
+          </a:prstGeom>
+          <a:noFill/>
+        </p:spPr>
+        <p:txBody>
+          <a:bodyPr wrap="square" lIns="0" rIns="0" tIns="0" bIns="0" anchor="ctr">
+            <a:spAutoFit/>
+          </a:bodyPr>
+          <a:lstStyle/>
+          <a:p>
+            <a:pPr algn="l">
+              <a:spcAft>
+                <a:spcPts val="0"/>
+              </a:spcAft>
+            </a:pPr>
+            <a:r>
+              <a:rPr sz="1300" b="1" i="0">
+                <a:solidFill>
+                  <a:srgbClr val="5B7A9A"/>
+                </a:solidFill>
+                <a:latin typeface="Courier New"/>
+              </a:rPr>
+              <a:t>&gt;</a:t>
+            </a:r>
+          </a:p>
+        </p:txBody>
+      </p:sp>
+      <p:sp>
+        <p:nvSpPr>
+          <p:cNvPr id="67" name="Row"/>
+          <p:cNvSpPr txBox="1"/>
+          <p:nvPr/>
+        </p:nvSpPr>
+        <p:spPr>
+          <a:xfrm>
+            <a:off x="1188720" y="5624000"/>
+            <a:ext cx="3017520" cy="310896"/>
+          </a:xfrm>
+          <a:prstGeom prst="rect">
+            <a:avLst/>
+          </a:prstGeom>
+          <a:noFill/>
+        </p:spPr>
+        <p:txBody>
+          <a:bodyPr wrap="square" lIns="0" rIns="0" tIns="0" bIns="0" anchor="ctr">
+            <a:spAutoFit/>
+          </a:bodyPr>
+          <a:lstStyle/>
+          <a:p>
+            <a:pPr algn="l">
+              <a:spcAft>
+                <a:spcPts val="0"/>
+              </a:spcAft>
+            </a:pPr>
+            <a:r>
+              <a:rPr sz="1300" b="1" i="0">
+                <a:solidFill>
+                  <a:srgbClr val="E8A070"/>
+                </a:solidFill>
+                <a:latin typeface="Courier New"/>
+              </a:rPr>
+              <a:t>/commit</a:t>
+            </a:r>
+          </a:p>
+        </p:txBody>
+      </p:sp>
+      <p:sp>
+        <p:nvSpPr>
+          <p:cNvPr id="68" name="Row"/>
+          <p:cNvSpPr txBox="1"/>
+          <p:nvPr/>
+        </p:nvSpPr>
+        <p:spPr>
+          <a:xfrm>
+            <a:off x="4251959" y="5624000"/>
+            <a:ext cx="7315200" cy="310896"/>
+          </a:xfrm>
+          <a:prstGeom prst="rect">
+            <a:avLst/>
+          </a:prstGeom>
+          <a:noFill/>
+        </p:spPr>
+        <p:txBody>
+          <a:bodyPr wrap="square" lIns="0" rIns="0" tIns="0" bIns="0" anchor="ctr">
+            <a:spAutoFit/>
+          </a:bodyPr>
+          <a:lstStyle/>
+          <a:p>
+            <a:pPr algn="l">
+              <a:spcAft>
+                <a:spcPts val="0"/>
+              </a:spcAft>
+            </a:pPr>
+            <a:r>
+              <a:rPr sz="1150" b="0" i="0">
+                <a:solidFill>
+                  <a:srgbClr val="9AB0C8"/>
+                </a:solidFill>
+                <a:latin typeface="Arial"/>
+              </a:rPr>
+              <a:t>Änderungen gruppiert committen — nur manuell aufrufbar</a:t>
+            </a:r>
+          </a:p>
+        </p:txBody>
+      </p:sp>
     </p:spTree>
   </p:cSld>
   <p:clrMapOvr>
@@ -10809,7 +11304,7 @@
                 </a:solidFill>
                 <a:latin typeface="Courier New"/>
               </a:rPr>
-              <a:t>missions/</a:t>
+              <a:t>missions/ · features/</a:t>
             </a:r>
             <a:r>
               <a:rPr sz="1150" b="0" i="0">
@@ -11218,7 +11713,7 @@
                 </a:solidFill>
                 <a:latin typeface="Arial"/>
               </a:rPr>
-              <a:t>Von der Vision bis zum ausführbaren Code — jeder Schritt hinterlässt ein Artefakt. Kein Schritt überspringt den vorherigen.</a:t>
+              <a:t>Von der Vision bis zum ausführbaren Code — jeder Schritt hinterlässt ein Artefakt, das im Frontmatter auf seinen Vorgänger zeigt. Kein Schritt überspringt den vorherigen.</a:t>
             </a:r>
           </a:p>
         </p:txBody>
@@ -11257,7 +11752,7 @@
                 </a:solidFill>
                 <a:latin typeface="Arial"/>
               </a:rPr>
-              <a:t>21</a:t>
+              <a:t>23</a:t>
             </a:r>
           </a:p>
         </p:txBody>
@@ -13160,7 +13655,7 @@
                 </a:solidFill>
                 <a:latin typeface="Arial"/>
               </a:rPr>
-              <a:t>Zerlegt Specs in nutzerorientierte „Epics" aus 5–7 User Stories.</a:t>
+              <a:t>Zerlegt Specs in nutzerorientierte „Epics“ — nur auf dem Greenfield-Pfad.</a:t>
             </a:r>
           </a:p>
         </p:txBody>
@@ -13488,7 +13983,7 @@
                 </a:solidFill>
                 <a:latin typeface="Arial"/>
               </a:rPr>
-              <a:t>Verwaltete Implementierung &amp; QA</a:t>
+              <a:t>Wellenweise Implementierung &amp; QA</a:t>
             </a:r>
           </a:p>
           <a:p>
@@ -13507,7 +14002,7 @@
                 </a:solidFill>
                 <a:latin typeface="Arial"/>
               </a:rPr>
-              <a:t>Der Controller orchestriert Coder, verifiziert und committet Code.</a:t>
+              <a:t>Der Orchestrator führt dateidisjunkte Wellen parallel aus, prüft und committet.</a:t>
             </a:r>
           </a:p>
         </p:txBody>
@@ -13773,7 +14268,7 @@
         <p:spPr>
           <a:xfrm>
             <a:off x="502920" y="2057400"/>
-            <a:ext cx="1783080" cy="274320"/>
+            <a:ext cx="2150000" cy="274320"/>
           </a:xfrm>
           <a:prstGeom prst="rect">
             <a:avLst/>
@@ -14675,7 +15170,7 @@
                 </a:solidFill>
                 <a:latin typeface="Arial"/>
               </a:rPr>
-              <a:t xml:space="preserve">Kein Ersatz für den Prozess, sondern ein bewusstes Ventil davor — die Erkenntnis fließt zurück in Mission, Feature oder Fakten.</a:t>
+              <a:t xml:space="preserve">Kein Ersatz für den Prozess, sondern ein bewusstes Ventil davor — /prototype läuft auf opus und nie als Subagent.</a:t>
             </a:r>
           </a:p>
         </p:txBody>
@@ -14714,7 +15209,7 @@
                 </a:solidFill>
                 <a:latin typeface="Arial"/>
               </a:rPr>
-              <a:t xml:space="preserve">14</a:t>
+              <a:t xml:space="preserve">16</a:t>
             </a:r>
           </a:p>
         </p:txBody>
@@ -15767,7 +16262,2113 @@
                 </a:solidFill>
                 <a:latin typeface="Arial"/>
               </a:rPr>
+              <a:t xml:space="preserve">7</a:t>
+            </a:r>
+          </a:p>
+        </p:txBody>
+      </p:sp>
+      <p:pic>
+        <p:nvPicPr>
+          <p:cNvPr id="27" name="Picture" descr="vier-logo.png"/>
+          <p:cNvPicPr>
+            <a:picLocks noChangeAspect="1"/>
+          </p:cNvPicPr>
+          <p:nvPr/>
+        </p:nvPicPr>
+        <p:blipFill>
+          <a:blip r:embed="rId2"/>
+          <a:stretch>
+            <a:fillRect/>
+          </a:stretch>
+        </p:blipFill>
+        <p:spPr>
+          <a:xfrm>
+            <a:off x="10911535" y="6400800"/>
+            <a:ext cx="777240" cy="297864"/>
+          </a:xfrm>
+          <a:prstGeom prst="rect">
+            <a:avLst/>
+          </a:prstGeom>
+        </p:spPr>
+      </p:pic>
+    </p:spTree>
+  </p:cSld>
+  <p:clrMapOvr>
+    <a:masterClrMapping/>
+  </p:clrMapOvr>
+</p:sld>
+</file>
+
+<file path=ppt/slides/slide22.xml><?xml version="1.0" encoding="utf-8"?>
+<p:sld xmlns:a="http://schemas.openxmlformats.org/drawingml/2006/main" xmlns:p="http://schemas.openxmlformats.org/presentationml/2006/main" xmlns:r="http://schemas.openxmlformats.org/officeDocument/2006/relationships">
+  <p:cSld>
+    <p:spTree>
+      <p:nvGrpSpPr>
+        <p:cNvPr id="1" name=""/>
+        <p:cNvGrpSpPr/>
+        <p:nvPr/>
+      </p:nvGrpSpPr>
+      <p:grpSpPr/>
+      <p:sp>
+        <p:nvSpPr>
+          <p:cNvPr id="2" name="TextBox"/>
+          <p:cNvSpPr txBox="1"/>
+          <p:nvPr/>
+        </p:nvSpPr>
+        <p:spPr>
+          <a:xfrm>
+            <a:off x="502920" y="365760"/>
+            <a:ext cx="11155680" cy="274320"/>
+          </a:xfrm>
+          <a:prstGeom prst="rect">
+            <a:avLst/>
+          </a:prstGeom>
+          <a:noFill/>
+        </p:spPr>
+        <p:txBody>
+          <a:bodyPr wrap="square" lIns="0" rIns="0" tIns="0" bIns="0" anchor="t">
+            <a:spAutoFit/>
+          </a:bodyPr>
+          <a:lstStyle/>
+          <a:p>
+            <a:pPr algn="l">
+              <a:spcAft>
+                <a:spcPts val="0"/>
+              </a:spcAft>
+            </a:pPr>
+            <a:r>
+              <a:rPr sz="1100" b="1" i="0" spc="240">
+                <a:solidFill>
+                  <a:srgbClr val="FF3C00"/>
+                </a:solidFill>
+                <a:latin typeface="Arial"/>
+              </a:rPr>
+              <a:t xml:space="preserve">NACHVERFOLGBARKEIT</a:t>
+            </a:r>
+          </a:p>
+        </p:txBody>
+      </p:sp>
+      <p:sp>
+        <p:nvSpPr>
+          <p:cNvPr id="3" name="TextBox"/>
+          <p:cNvSpPr txBox="1"/>
+          <p:nvPr/>
+        </p:nvSpPr>
+        <p:spPr>
+          <a:xfrm>
+            <a:off x="502920" y="667512"/>
+            <a:ext cx="11155680" cy="566928"/>
+          </a:xfrm>
+          <a:prstGeom prst="rect">
+            <a:avLst/>
+          </a:prstGeom>
+          <a:noFill/>
+        </p:spPr>
+        <p:txBody>
+          <a:bodyPr wrap="square" lIns="0" rIns="0" tIns="0" bIns="0" anchor="t">
+            <a:spAutoFit/>
+          </a:bodyPr>
+          <a:lstStyle/>
+          <a:p>
+            <a:pPr algn="l">
+              <a:lnSpc>
+                <a:spcPct val="102000"/>
+              </a:lnSpc>
+              <a:spcAft>
+                <a:spcPts val="0"/>
+              </a:spcAft>
+            </a:pPr>
+            <a:r>
+              <a:rPr sz="3000" b="1" i="0">
+                <a:solidFill>
+                  <a:srgbClr val="141414"/>
+                </a:solidFill>
+                <a:latin typeface="Arial"/>
+              </a:rPr>
+              <a:t xml:space="preserve">Die Kette ist maschinenlesbar</a:t>
+            </a:r>
+          </a:p>
+        </p:txBody>
+      </p:sp>
+      <p:sp>
+        <p:nvSpPr>
+          <p:cNvPr id="4" name="Rule"/>
+          <p:cNvSpPr/>
+          <p:nvPr/>
+        </p:nvSpPr>
+        <p:spPr>
+          <a:xfrm>
+            <a:off x="502920" y="1216152"/>
+            <a:ext cx="1051560" cy="45720"/>
+          </a:xfrm>
+          <a:prstGeom prst="rect">
+            <a:avLst/>
+          </a:prstGeom>
+          <a:solidFill>
+            <a:srgbClr val="FF3C00"/>
+          </a:solidFill>
+          <a:ln>
+            <a:noFill/>
+          </a:ln>
+          <a:effectLst/>
+        </p:spPr>
+        <p:txBody>
+          <a:bodyPr rtlCol="0" anchor="ctr" wrap="square" lIns="0" rIns="0" tIns="0" bIns="0"/>
+          <a:lstStyle/>
+          <a:p>
+            <a:pPr algn="ctr"/>
+          </a:p>
+        </p:txBody>
+      </p:sp>
+      <p:sp>
+        <p:nvSpPr>
+          <p:cNvPr id="5" name="TextBox"/>
+          <p:cNvSpPr txBox="1"/>
+          <p:nvPr/>
+        </p:nvSpPr>
+        <p:spPr>
+          <a:xfrm>
+            <a:off x="502920" y="1481328"/>
+            <a:ext cx="10600000" cy="560000"/>
+          </a:xfrm>
+          <a:prstGeom prst="rect">
+            <a:avLst/>
+          </a:prstGeom>
+          <a:noFill/>
+        </p:spPr>
+        <p:txBody>
+          <a:bodyPr wrap="square" lIns="0" rIns="0" tIns="0" bIns="0" anchor="t">
+            <a:spAutoFit/>
+          </a:bodyPr>
+          <a:lstStyle/>
+          <a:p>
+            <a:pPr algn="l">
+              <a:lnSpc>
+                <a:spcPct val="130000"/>
+              </a:lnSpc>
+              <a:spcAft>
+                <a:spcPts val="0"/>
+              </a:spcAft>
+            </a:pPr>
+            <a:r>
+              <a:rPr sz="1200" b="0" i="0">
+                <a:solidFill>
+                  <a:srgbClr val="5C5C5C"/>
+                </a:solidFill>
+                <a:latin typeface="Arial"/>
+              </a:rPr>
+              <a:t xml:space="preserve">Neu in V4: jedes Artefakt trägt YAML-Frontmatter, das seinen Vorgänger benennt. Damit ist die Pipeline in beide Richtungen traversierbar — nicht mehr nur per Konvention, sondern per Feld.</a:t>
+            </a:r>
+          </a:p>
+        </p:txBody>
+      </p:sp>
+      <p:sp>
+        <p:nvSpPr>
+          <p:cNvPr id="6" name="Num"/>
+          <p:cNvSpPr/>
+          <p:nvPr/>
+        </p:nvSpPr>
+        <p:spPr>
+          <a:xfrm>
+            <a:off x="502920" y="2450000"/>
+            <a:ext cx="380000" cy="380000"/>
+          </a:xfrm>
+          <a:prstGeom prst="rect">
+            <a:avLst/>
+          </a:prstGeom>
+          <a:solidFill>
+            <a:srgbClr val="FF3C00"/>
+          </a:solidFill>
+          <a:ln>
+            <a:noFill/>
+          </a:ln>
+          <a:effectLst/>
+        </p:spPr>
+        <p:txBody>
+          <a:bodyPr rtlCol="0" anchor="ctr" wrap="square" lIns="0" rIns="0" tIns="0" bIns="0"/>
+          <a:lstStyle/>
+          <a:p>
+            <a:pPr algn="ctr"/>
+          </a:p>
+        </p:txBody>
+      </p:sp>
+      <p:sp>
+        <p:nvSpPr>
+          <p:cNvPr id="7" name="TextBox"/>
+          <p:cNvSpPr txBox="1"/>
+          <p:nvPr/>
+        </p:nvSpPr>
+        <p:spPr>
+          <a:xfrm>
+            <a:off x="502920" y="2450000"/>
+            <a:ext cx="380000" cy="380000"/>
+          </a:xfrm>
+          <a:prstGeom prst="rect">
+            <a:avLst/>
+          </a:prstGeom>
+          <a:noFill/>
+        </p:spPr>
+        <p:txBody>
+          <a:bodyPr wrap="square" lIns="0" rIns="0" tIns="0" bIns="0" anchor="ctr"/>
+          <a:lstStyle/>
+          <a:p>
+            <a:pPr algn="ctr">
+              <a:spcAft>
+                <a:spcPts val="0"/>
+              </a:spcAft>
+            </a:pPr>
+            <a:r>
+              <a:rPr sz="1400" b="1" i="0">
+                <a:solidFill>
+                  <a:srgbClr val="FFFFFF"/>
+                </a:solidFill>
+                <a:latin typeface="Arial"/>
+              </a:rPr>
+              <a:t xml:space="preserve">1</a:t>
+            </a:r>
+          </a:p>
+        </p:txBody>
+      </p:sp>
+      <p:sp>
+        <p:nvSpPr>
+          <p:cNvPr id="8" name="TextBox"/>
+          <p:cNvSpPr txBox="1"/>
+          <p:nvPr/>
+        </p:nvSpPr>
+        <p:spPr>
+          <a:xfrm>
+            <a:off x="1022920" y="2430000"/>
+            <a:ext cx="5250000" cy="820000"/>
+          </a:xfrm>
+          <a:prstGeom prst="rect">
+            <a:avLst/>
+          </a:prstGeom>
+          <a:noFill/>
+        </p:spPr>
+        <p:txBody>
+          <a:bodyPr wrap="square" lIns="0" rIns="0" tIns="0" bIns="0" anchor="t">
+            <a:spAutoFit/>
+          </a:bodyPr>
+          <a:lstStyle/>
+          <a:p>
+            <a:pPr algn="l">
+              <a:lnSpc>
+                <a:spcPct val="120000"/>
+              </a:lnSpc>
+              <a:spcAft>
+                <a:spcPts val="0"/>
+              </a:spcAft>
+            </a:pPr>
+            <a:r>
+              <a:rPr sz="1250" b="1" i="0">
+                <a:solidFill>
+                  <a:srgbClr val="141414"/>
+                </a:solidFill>
+                <a:latin typeface="Arial"/>
+              </a:rPr>
+              <a:t xml:space="preserve">Rückwärtszeiger</a:t>
+            </a:r>
+          </a:p>
+          <a:p>
+            <a:pPr algn="l">
+              <a:lnSpc>
+                <a:spcPct val="120000"/>
+              </a:lnSpc>
+              <a:spcAft>
+                <a:spcPts val="0"/>
+              </a:spcAft>
+            </a:pPr>
+            <a:r>
+              <a:rPr sz="1050" b="0" i="0">
+                <a:solidFill>
+                  <a:srgbClr val="5C5C5C"/>
+                </a:solidFill>
+                <a:latin typeface="Arial"/>
+              </a:rPr>
+              <a:t xml:space="preserve">mission-source:, spec-source:, fact-source:, plan: oder das generische upstream-artifact: — immer ein repo-relativer Pfad oder das Literal none.</a:t>
+            </a:r>
+          </a:p>
+        </p:txBody>
+      </p:sp>
+      <p:sp>
+        <p:nvSpPr>
+          <p:cNvPr id="9" name="Num"/>
+          <p:cNvSpPr/>
+          <p:nvPr/>
+        </p:nvSpPr>
+        <p:spPr>
+          <a:xfrm>
+            <a:off x="502920" y="3400000"/>
+            <a:ext cx="380000" cy="380000"/>
+          </a:xfrm>
+          <a:prstGeom prst="rect">
+            <a:avLst/>
+          </a:prstGeom>
+          <a:solidFill>
+            <a:srgbClr val="FF3C00"/>
+          </a:solidFill>
+          <a:ln>
+            <a:noFill/>
+          </a:ln>
+          <a:effectLst/>
+        </p:spPr>
+        <p:txBody>
+          <a:bodyPr rtlCol="0" anchor="ctr" wrap="square" lIns="0" rIns="0" tIns="0" bIns="0"/>
+          <a:lstStyle/>
+          <a:p>
+            <a:pPr algn="ctr"/>
+          </a:p>
+        </p:txBody>
+      </p:sp>
+      <p:sp>
+        <p:nvSpPr>
+          <p:cNvPr id="10" name="TextBox"/>
+          <p:cNvSpPr txBox="1"/>
+          <p:nvPr/>
+        </p:nvSpPr>
+        <p:spPr>
+          <a:xfrm>
+            <a:off x="502920" y="3400000"/>
+            <a:ext cx="380000" cy="380000"/>
+          </a:xfrm>
+          <a:prstGeom prst="rect">
+            <a:avLst/>
+          </a:prstGeom>
+          <a:noFill/>
+        </p:spPr>
+        <p:txBody>
+          <a:bodyPr wrap="square" lIns="0" rIns="0" tIns="0" bIns="0" anchor="ctr"/>
+          <a:lstStyle/>
+          <a:p>
+            <a:pPr algn="ctr">
+              <a:spcAft>
+                <a:spcPts val="0"/>
+              </a:spcAft>
+            </a:pPr>
+            <a:r>
+              <a:rPr sz="1400" b="1" i="0">
+                <a:solidFill>
+                  <a:srgbClr val="FFFFFF"/>
+                </a:solidFill>
+                <a:latin typeface="Arial"/>
+              </a:rPr>
+              <a:t xml:space="preserve">2</a:t>
+            </a:r>
+          </a:p>
+        </p:txBody>
+      </p:sp>
+      <p:sp>
+        <p:nvSpPr>
+          <p:cNvPr id="11" name="TextBox"/>
+          <p:cNvSpPr txBox="1"/>
+          <p:nvPr/>
+        </p:nvSpPr>
+        <p:spPr>
+          <a:xfrm>
+            <a:off x="1022920" y="3380000"/>
+            <a:ext cx="5250000" cy="820000"/>
+          </a:xfrm>
+          <a:prstGeom prst="rect">
+            <a:avLst/>
+          </a:prstGeom>
+          <a:noFill/>
+        </p:spPr>
+        <p:txBody>
+          <a:bodyPr wrap="square" lIns="0" rIns="0" tIns="0" bIns="0" anchor="t">
+            <a:spAutoFit/>
+          </a:bodyPr>
+          <a:lstStyle/>
+          <a:p>
+            <a:pPr algn="l">
+              <a:lnSpc>
+                <a:spcPct val="120000"/>
+              </a:lnSpc>
+              <a:spcAft>
+                <a:spcPts val="0"/>
+              </a:spcAft>
+            </a:pPr>
+            <a:r>
+              <a:rPr sz="1250" b="1" i="0">
+                <a:solidFill>
+                  <a:srgbClr val="141414"/>
+                </a:solidFill>
+                <a:latin typeface="Arial"/>
+              </a:rPr>
+              <a:t xml:space="preserve">status: beschreibt das Dokument, nicht die Arbeit</a:t>
+            </a:r>
+          </a:p>
+          <a:p>
+            <a:pPr algn="l">
+              <a:lnSpc>
+                <a:spcPct val="120000"/>
+              </a:lnSpc>
+              <a:spcAft>
+                <a:spcPts val="0"/>
+              </a:spcAft>
+            </a:pPr>
+            <a:r>
+              <a:rPr sz="1050" b="0" i="0">
+                <a:solidFill>
+                  <a:srgbClr val="5C5C5C"/>
+                </a:solidFill>
+                <a:latin typeface="Arial"/>
+              </a:rPr>
+              <a:t xml:space="preserve">complete, superseded, ready-for-research. Ob ein Plan tatsächlich ausgeführt wurde, steht getrennt davon in seiner STATE-Datei.</a:t>
+            </a:r>
+          </a:p>
+        </p:txBody>
+      </p:sp>
+      <p:sp>
+        <p:nvSpPr>
+          <p:cNvPr id="12" name="Num"/>
+          <p:cNvSpPr/>
+          <p:nvPr/>
+        </p:nvSpPr>
+        <p:spPr>
+          <a:xfrm>
+            <a:off x="502920" y="4350000"/>
+            <a:ext cx="380000" cy="380000"/>
+          </a:xfrm>
+          <a:prstGeom prst="rect">
+            <a:avLst/>
+          </a:prstGeom>
+          <a:solidFill>
+            <a:srgbClr val="FF3C00"/>
+          </a:solidFill>
+          <a:ln>
+            <a:noFill/>
+          </a:ln>
+          <a:effectLst/>
+        </p:spPr>
+        <p:txBody>
+          <a:bodyPr rtlCol="0" anchor="ctr" wrap="square" lIns="0" rIns="0" tIns="0" bIns="0"/>
+          <a:lstStyle/>
+          <a:p>
+            <a:pPr algn="ctr"/>
+          </a:p>
+        </p:txBody>
+      </p:sp>
+      <p:sp>
+        <p:nvSpPr>
+          <p:cNvPr id="13" name="TextBox"/>
+          <p:cNvSpPr txBox="1"/>
+          <p:nvPr/>
+        </p:nvSpPr>
+        <p:spPr>
+          <a:xfrm>
+            <a:off x="502920" y="4350000"/>
+            <a:ext cx="380000" cy="380000"/>
+          </a:xfrm>
+          <a:prstGeom prst="rect">
+            <a:avLst/>
+          </a:prstGeom>
+          <a:noFill/>
+        </p:spPr>
+        <p:txBody>
+          <a:bodyPr wrap="square" lIns="0" rIns="0" tIns="0" bIns="0" anchor="ctr"/>
+          <a:lstStyle/>
+          <a:p>
+            <a:pPr algn="ctr">
+              <a:spcAft>
+                <a:spcPts val="0"/>
+              </a:spcAft>
+            </a:pPr>
+            <a:r>
+              <a:rPr sz="1400" b="1" i="0">
+                <a:solidFill>
+                  <a:srgbClr val="FFFFFF"/>
+                </a:solidFill>
+                <a:latin typeface="Arial"/>
+              </a:rPr>
+              <a:t xml:space="preserve">3</a:t>
+            </a:r>
+          </a:p>
+        </p:txBody>
+      </p:sp>
+      <p:sp>
+        <p:nvSpPr>
+          <p:cNvPr id="14" name="TextBox"/>
+          <p:cNvSpPr txBox="1"/>
+          <p:nvPr/>
+        </p:nvSpPr>
+        <p:spPr>
+          <a:xfrm>
+            <a:off x="1022920" y="4330000"/>
+            <a:ext cx="5250000" cy="820000"/>
+          </a:xfrm>
+          <a:prstGeom prst="rect">
+            <a:avLst/>
+          </a:prstGeom>
+          <a:noFill/>
+        </p:spPr>
+        <p:txBody>
+          <a:bodyPr wrap="square" lIns="0" rIns="0" tIns="0" bIns="0" anchor="t">
+            <a:spAutoFit/>
+          </a:bodyPr>
+          <a:lstStyle/>
+          <a:p>
+            <a:pPr algn="l">
+              <a:lnSpc>
+                <a:spcPct val="120000"/>
+              </a:lnSpc>
+              <a:spcAft>
+                <a:spcPts val="0"/>
+              </a:spcAft>
+            </a:pPr>
+            <a:r>
+              <a:rPr sz="1250" b="1" i="0">
+                <a:solidFill>
+                  <a:srgbClr val="141414"/>
+                </a:solidFill>
+                <a:latin typeface="Arial"/>
+              </a:rPr>
+              <a:t xml:space="preserve">Der schreibende Skill signiert</a:t>
+            </a:r>
+          </a:p>
+          <a:p>
+            <a:pPr algn="l">
+              <a:lnSpc>
+                <a:spcPct val="120000"/>
+              </a:lnSpc>
+              <a:spcAft>
+                <a:spcPts val="0"/>
+              </a:spcAft>
+            </a:pPr>
+            <a:r>
+              <a:rPr sz="1050" b="0" i="0">
+                <a:solidFill>
+                  <a:srgbClr val="5C5C5C"/>
+                </a:solidFill>
+                <a:latin typeface="Arial"/>
+              </a:rPr>
+              <a:t xml:space="preserve">fact-finder:, feature-architect:, planner: — wer ein Artefakt erzeugt hat, steht im Artefakt selbst.</a:t>
+            </a:r>
+          </a:p>
+        </p:txBody>
+      </p:sp>
+      <p:sp>
+        <p:nvSpPr>
+          <p:cNvPr id="15" name="TextBox"/>
+          <p:cNvSpPr txBox="1"/>
+          <p:nvPr/>
+        </p:nvSpPr>
+        <p:spPr>
+          <a:xfrm>
+            <a:off x="6600000" y="2057400"/>
+            <a:ext cx="5088775" cy="240000"/>
+          </a:xfrm>
+          <a:prstGeom prst="rect">
+            <a:avLst/>
+          </a:prstGeom>
+          <a:noFill/>
+        </p:spPr>
+        <p:txBody>
+          <a:bodyPr wrap="square" lIns="0" rIns="0" tIns="0" bIns="0" anchor="t">
+            <a:spAutoFit/>
+          </a:bodyPr>
+          <a:lstStyle/>
+          <a:p>
+            <a:pPr algn="ctr">
+              <a:spcAft>
+                <a:spcPts val="0"/>
+              </a:spcAft>
+            </a:pPr>
+            <a:r>
+              <a:rPr sz="1000" b="1" i="0" spc="120">
+                <a:solidFill>
+                  <a:srgbClr val="8A8A8A"/>
+                </a:solidFill>
+                <a:latin typeface="Arial"/>
+              </a:rPr>
+              <a:t xml:space="preserve">WER ZEIGT AUF WEN</a:t>
+            </a:r>
+          </a:p>
+        </p:txBody>
+      </p:sp>
+      <p:sp>
+        <p:nvSpPr>
+          <p:cNvPr id="16" name="FBox"/>
+          <p:cNvSpPr/>
+          <p:nvPr/>
+        </p:nvSpPr>
+        <p:spPr>
+          <a:xfrm>
+            <a:off x="6600000" y="2470000"/>
+            <a:ext cx="5088775" cy="640000"/>
+          </a:xfrm>
+          <a:prstGeom prst="rect">
+            <a:avLst/>
+          </a:prstGeom>
+          <a:solidFill>
+            <a:srgbClr val="FAF9F9"/>
+          </a:solidFill>
+          <a:ln w="12700">
+            <a:solidFill>
+              <a:srgbClr val="E8E8E8"/>
+            </a:solidFill>
+          </a:ln>
+          <a:effectLst/>
+        </p:spPr>
+        <p:txBody>
+          <a:bodyPr rtlCol="0" anchor="ctr" wrap="square" lIns="0" rIns="0" tIns="0" bIns="0"/>
+          <a:lstStyle/>
+          <a:p>
+            <a:pPr algn="ctr"/>
+          </a:p>
+        </p:txBody>
+      </p:sp>
+      <p:sp>
+        <p:nvSpPr>
+          <p:cNvPr id="17" name="TextBox"/>
+          <p:cNvSpPr txBox="1"/>
+          <p:nvPr/>
+        </p:nvSpPr>
+        <p:spPr>
+          <a:xfrm>
+            <a:off x="6600000" y="2470000"/>
+            <a:ext cx="5088775" cy="640000"/>
+          </a:xfrm>
+          <a:prstGeom prst="rect">
+            <a:avLst/>
+          </a:prstGeom>
+          <a:noFill/>
+        </p:spPr>
+        <p:txBody>
+          <a:bodyPr wrap="square" lIns="0" rIns="0" tIns="0" bIns="0" anchor="ctr"/>
+          <a:lstStyle/>
+          <a:p>
+            <a:pPr algn="ctr">
+              <a:lnSpc>
+                <a:spcPct val="115000"/>
+              </a:lnSpc>
+              <a:spcAft>
+                <a:spcPts val="0"/>
+              </a:spcAft>
+            </a:pPr>
+            <a:r>
+              <a:rPr sz="1250" b="1" i="0" spc="80">
+                <a:solidFill>
+                  <a:srgbClr val="141414"/>
+                </a:solidFill>
+                <a:latin typeface="Arial"/>
+              </a:rPr>
+              <a:t xml:space="preserve">mission  →  spec  →  epic</a:t>
+            </a:r>
+          </a:p>
+          <a:p>
+            <a:pPr algn="ctr">
+              <a:lnSpc>
+                <a:spcPct val="115000"/>
+              </a:lnSpc>
+              <a:spcAft>
+                <a:spcPts val="0"/>
+              </a:spcAft>
+            </a:pPr>
+            <a:r>
+              <a:rPr sz="1000" b="0" i="0">
+                <a:solidFill>
+                  <a:srgbClr val="5C5C5C"/>
+                </a:solidFill>
+                <a:latin typeface="Arial"/>
+              </a:rPr>
+              <a:t xml:space="preserve">mission-source:   ·   spec-source:</a:t>
+            </a:r>
+          </a:p>
+        </p:txBody>
+      </p:sp>
+      <p:sp>
+        <p:nvSpPr>
+          <p:cNvPr id="18" name="TextBox"/>
+          <p:cNvSpPr txBox="1"/>
+          <p:nvPr/>
+        </p:nvSpPr>
+        <p:spPr>
+          <a:xfrm>
+            <a:off x="6600000" y="3170000"/>
+            <a:ext cx="5088775" cy="300000"/>
+          </a:xfrm>
+          <a:prstGeom prst="rect">
+            <a:avLst/>
+          </a:prstGeom>
+          <a:noFill/>
+        </p:spPr>
+        <p:txBody>
+          <a:bodyPr wrap="square" lIns="0" rIns="0" tIns="0" bIns="0" anchor="ctr"/>
+          <a:lstStyle/>
+          <a:p>
+            <a:pPr algn="ctr">
+              <a:spcAft>
+                <a:spcPts val="0"/>
+              </a:spcAft>
+            </a:pPr>
+            <a:r>
+              <a:rPr sz="1800" b="1" i="0">
+                <a:solidFill>
+                  <a:srgbClr val="FF3C00"/>
+                </a:solidFill>
+                <a:latin typeface="Arial"/>
+              </a:rPr>
+              <a:t xml:space="preserve">↓</a:t>
+            </a:r>
+          </a:p>
+        </p:txBody>
+      </p:sp>
+      <p:sp>
+        <p:nvSpPr>
+          <p:cNvPr id="19" name="FBox"/>
+          <p:cNvSpPr/>
+          <p:nvPr/>
+        </p:nvSpPr>
+        <p:spPr>
+          <a:xfrm>
+            <a:off x="6600000" y="3490000"/>
+            <a:ext cx="5088775" cy="640000"/>
+          </a:xfrm>
+          <a:prstGeom prst="rect">
+            <a:avLst/>
+          </a:prstGeom>
+          <a:solidFill>
+            <a:srgbClr val="FAF9F9"/>
+          </a:solidFill>
+          <a:ln w="12700">
+            <a:solidFill>
+              <a:srgbClr val="E8E8E8"/>
+            </a:solidFill>
+          </a:ln>
+          <a:effectLst/>
+        </p:spPr>
+        <p:txBody>
+          <a:bodyPr rtlCol="0" anchor="ctr" wrap="square" lIns="0" rIns="0" tIns="0" bIns="0"/>
+          <a:lstStyle/>
+          <a:p>
+            <a:pPr algn="ctr"/>
+          </a:p>
+        </p:txBody>
+      </p:sp>
+      <p:sp>
+        <p:nvSpPr>
+          <p:cNvPr id="20" name="TextBox"/>
+          <p:cNvSpPr txBox="1"/>
+          <p:nvPr/>
+        </p:nvSpPr>
+        <p:spPr>
+          <a:xfrm>
+            <a:off x="6600000" y="3490000"/>
+            <a:ext cx="5088775" cy="640000"/>
+          </a:xfrm>
+          <a:prstGeom prst="rect">
+            <a:avLst/>
+          </a:prstGeom>
+          <a:noFill/>
+        </p:spPr>
+        <p:txBody>
+          <a:bodyPr wrap="square" lIns="0" rIns="0" tIns="0" bIns="0" anchor="ctr"/>
+          <a:lstStyle/>
+          <a:p>
+            <a:pPr algn="ctr">
+              <a:lnSpc>
+                <a:spcPct val="115000"/>
+              </a:lnSpc>
+              <a:spcAft>
+                <a:spcPts val="0"/>
+              </a:spcAft>
+            </a:pPr>
+            <a:r>
+              <a:rPr sz="1250" b="1" i="0" spc="80">
+                <a:solidFill>
+                  <a:srgbClr val="141414"/>
+                </a:solidFill>
+                <a:latin typeface="Arial"/>
+              </a:rPr>
+              <a:t xml:space="preserve">fact report  /  QA report</a:t>
+            </a:r>
+          </a:p>
+          <a:p>
+            <a:pPr algn="ctr">
+              <a:lnSpc>
+                <a:spcPct val="115000"/>
+              </a:lnSpc>
+              <a:spcAft>
+                <a:spcPts val="0"/>
+              </a:spcAft>
+            </a:pPr>
+            <a:r>
+              <a:rPr sz="1000" b="0" i="0">
+                <a:solidFill>
+                  <a:srgbClr val="5C5C5C"/>
+                </a:solidFill>
+                <a:latin typeface="Arial"/>
+              </a:rPr>
+              <a:t xml:space="preserve">upstream-artifact:  —  Epic oder Feature-Brief</a:t>
+            </a:r>
+          </a:p>
+        </p:txBody>
+      </p:sp>
+      <p:sp>
+        <p:nvSpPr>
+          <p:cNvPr id="21" name="TextBox"/>
+          <p:cNvSpPr txBox="1"/>
+          <p:nvPr/>
+        </p:nvSpPr>
+        <p:spPr>
+          <a:xfrm>
+            <a:off x="6600000" y="4190000"/>
+            <a:ext cx="5088775" cy="300000"/>
+          </a:xfrm>
+          <a:prstGeom prst="rect">
+            <a:avLst/>
+          </a:prstGeom>
+          <a:noFill/>
+        </p:spPr>
+        <p:txBody>
+          <a:bodyPr wrap="square" lIns="0" rIns="0" tIns="0" bIns="0" anchor="ctr"/>
+          <a:lstStyle/>
+          <a:p>
+            <a:pPr algn="ctr">
+              <a:spcAft>
+                <a:spcPts val="0"/>
+              </a:spcAft>
+            </a:pPr>
+            <a:r>
+              <a:rPr sz="1800" b="1" i="0">
+                <a:solidFill>
+                  <a:srgbClr val="FF3C00"/>
+                </a:solidFill>
+                <a:latin typeface="Arial"/>
+              </a:rPr>
+              <a:t xml:space="preserve">↓</a:t>
+            </a:r>
+          </a:p>
+        </p:txBody>
+      </p:sp>
+      <p:sp>
+        <p:nvSpPr>
+          <p:cNvPr id="22" name="FBox"/>
+          <p:cNvSpPr/>
+          <p:nvPr/>
+        </p:nvSpPr>
+        <p:spPr>
+          <a:xfrm>
+            <a:off x="6600000" y="4510000"/>
+            <a:ext cx="5088775" cy="640000"/>
+          </a:xfrm>
+          <a:prstGeom prst="rect">
+            <a:avLst/>
+          </a:prstGeom>
+          <a:solidFill>
+            <a:srgbClr val="FF3C00"/>
+          </a:solidFill>
+          <a:ln>
+            <a:noFill/>
+          </a:ln>
+          <a:effectLst/>
+        </p:spPr>
+        <p:txBody>
+          <a:bodyPr rtlCol="0" anchor="ctr" wrap="square" lIns="0" rIns="0" tIns="0" bIns="0"/>
+          <a:lstStyle/>
+          <a:p>
+            <a:pPr algn="ctr"/>
+          </a:p>
+        </p:txBody>
+      </p:sp>
+      <p:sp>
+        <p:nvSpPr>
+          <p:cNvPr id="23" name="TextBox"/>
+          <p:cNvSpPr txBox="1"/>
+          <p:nvPr/>
+        </p:nvSpPr>
+        <p:spPr>
+          <a:xfrm>
+            <a:off x="6600000" y="4510000"/>
+            <a:ext cx="5088775" cy="640000"/>
+          </a:xfrm>
+          <a:prstGeom prst="rect">
+            <a:avLst/>
+          </a:prstGeom>
+          <a:noFill/>
+        </p:spPr>
+        <p:txBody>
+          <a:bodyPr wrap="square" lIns="0" rIns="0" tIns="0" bIns="0" anchor="ctr"/>
+          <a:lstStyle/>
+          <a:p>
+            <a:pPr algn="ctr">
+              <a:lnSpc>
+                <a:spcPct val="115000"/>
+              </a:lnSpc>
+              <a:spcAft>
+                <a:spcPts val="0"/>
+              </a:spcAft>
+            </a:pPr>
+            <a:r>
+              <a:rPr sz="1250" b="1" i="0" spc="80">
+                <a:solidFill>
+                  <a:srgbClr val="FFFFFF"/>
+                </a:solidFill>
+                <a:latin typeface="Arial"/>
+              </a:rPr>
+              <a:t xml:space="preserve">plan  →  STATE   —   fact-source:  ·  plan:</a:t>
+            </a:r>
+          </a:p>
+        </p:txBody>
+      </p:sp>
+      <p:sp>
+        <p:nvSpPr>
+          <p:cNvPr id="24" name="Banner"/>
+          <p:cNvSpPr/>
+          <p:nvPr/>
+        </p:nvSpPr>
+        <p:spPr>
+          <a:xfrm>
+            <a:off x="502920" y="5650992"/>
+            <a:ext cx="11183112" cy="566928"/>
+          </a:xfrm>
+          <a:prstGeom prst="rect">
+            <a:avLst/>
+          </a:prstGeom>
+          <a:solidFill>
+            <a:srgbClr val="141414"/>
+          </a:solidFill>
+          <a:ln>
+            <a:noFill/>
+          </a:ln>
+          <a:effectLst/>
+        </p:spPr>
+        <p:txBody>
+          <a:bodyPr rtlCol="0" anchor="ctr" wrap="square" lIns="0" rIns="0" tIns="0" bIns="0"/>
+          <a:lstStyle/>
+          <a:p>
+            <a:pPr algn="ctr"/>
+          </a:p>
+        </p:txBody>
+      </p:sp>
+      <p:sp>
+        <p:nvSpPr>
+          <p:cNvPr id="25" name="TextBox"/>
+          <p:cNvSpPr txBox="1"/>
+          <p:nvPr/>
+        </p:nvSpPr>
+        <p:spPr>
+          <a:xfrm>
+            <a:off x="502920" y="5650992"/>
+            <a:ext cx="11183112" cy="566928"/>
+          </a:xfrm>
+          <a:prstGeom prst="rect">
+            <a:avLst/>
+          </a:prstGeom>
+          <a:noFill/>
+        </p:spPr>
+        <p:txBody>
+          <a:bodyPr wrap="square" lIns="228600" rIns="0" tIns="0" bIns="0" anchor="ctr"/>
+          <a:lstStyle/>
+          <a:p>
+            <a:pPr algn="ctr">
+              <a:lnSpc>
+                <a:spcPct val="115000"/>
+              </a:lnSpc>
+              <a:spcAft>
+                <a:spcPts val="0"/>
+              </a:spcAft>
+            </a:pPr>
+            <a:r>
+              <a:rPr sz="1250" b="1" i="0">
+                <a:solidFill>
+                  <a:srgbClr val="FFFFFF"/>
+                </a:solidFill>
+                <a:latin typeface="Arial"/>
+              </a:rPr>
+              <a:t xml:space="preserve">/planner kopiert upstream-artifact: wörtlich — und /implement liest genau diese Kopie, um den Verification Plan des Epics zu finden.</a:t>
+            </a:r>
+          </a:p>
+        </p:txBody>
+      </p:sp>
+      <p:sp>
+        <p:nvSpPr>
+          <p:cNvPr id="26" name="TextBox"/>
+          <p:cNvSpPr txBox="1"/>
+          <p:nvPr/>
+        </p:nvSpPr>
+        <p:spPr>
+          <a:xfrm>
+            <a:off x="502920" y="6455664"/>
+            <a:ext cx="914400" cy="274320"/>
+          </a:xfrm>
+          <a:prstGeom prst="rect">
+            <a:avLst/>
+          </a:prstGeom>
+          <a:noFill/>
+        </p:spPr>
+        <p:txBody>
+          <a:bodyPr wrap="square" lIns="0" rIns="0" tIns="0" bIns="0" anchor="t">
+            <a:spAutoFit/>
+          </a:bodyPr>
+          <a:lstStyle/>
+          <a:p>
+            <a:pPr algn="l">
+              <a:spcAft>
+                <a:spcPts val="0"/>
+              </a:spcAft>
+            </a:pPr>
+            <a:r>
+              <a:rPr sz="1000" b="0" i="0">
+                <a:solidFill>
+                  <a:srgbClr val="8A8A8A"/>
+                </a:solidFill>
+                <a:latin typeface="Arial"/>
+              </a:rPr>
               <a:t xml:space="preserve">6</a:t>
+            </a:r>
+          </a:p>
+        </p:txBody>
+      </p:sp>
+      <p:pic>
+        <p:nvPicPr>
+          <p:cNvPr id="27" name="Picture" descr="vier-logo.png"/>
+          <p:cNvPicPr>
+            <a:picLocks noChangeAspect="1"/>
+          </p:cNvPicPr>
+          <p:nvPr/>
+        </p:nvPicPr>
+        <p:blipFill>
+          <a:blip r:embed="rId2"/>
+          <a:stretch>
+            <a:fillRect/>
+          </a:stretch>
+        </p:blipFill>
+        <p:spPr>
+          <a:xfrm>
+            <a:off x="10911535" y="6400800"/>
+            <a:ext cx="777240" cy="297864"/>
+          </a:xfrm>
+          <a:prstGeom prst="rect">
+            <a:avLst/>
+          </a:prstGeom>
+        </p:spPr>
+      </p:pic>
+    </p:spTree>
+  </p:cSld>
+  <p:clrMapOvr>
+    <a:masterClrMapping/>
+  </p:clrMapOvr>
+</p:sld>
+</file>
+
+<file path=ppt/slides/slide23.xml><?xml version="1.0" encoding="utf-8"?>
+<p:sld xmlns:a="http://schemas.openxmlformats.org/drawingml/2006/main" xmlns:p="http://schemas.openxmlformats.org/presentationml/2006/main" xmlns:r="http://schemas.openxmlformats.org/officeDocument/2006/relationships">
+  <p:cSld>
+    <p:spTree>
+      <p:nvGrpSpPr>
+        <p:cNvPr id="1" name=""/>
+        <p:cNvGrpSpPr/>
+        <p:nvPr/>
+      </p:nvGrpSpPr>
+      <p:grpSpPr/>
+      <p:sp>
+        <p:nvSpPr>
+          <p:cNvPr id="2" name="TextBox"/>
+          <p:cNvSpPr txBox="1"/>
+          <p:nvPr/>
+        </p:nvSpPr>
+        <p:spPr>
+          <a:xfrm>
+            <a:off x="502920" y="365760"/>
+            <a:ext cx="11155680" cy="274320"/>
+          </a:xfrm>
+          <a:prstGeom prst="rect">
+            <a:avLst/>
+          </a:prstGeom>
+          <a:noFill/>
+        </p:spPr>
+        <p:txBody>
+          <a:bodyPr wrap="square" lIns="0" rIns="0" tIns="0" bIns="0" anchor="t">
+            <a:spAutoFit/>
+          </a:bodyPr>
+          <a:lstStyle/>
+          <a:p>
+            <a:pPr algn="l">
+              <a:spcAft>
+                <a:spcPts val="0"/>
+              </a:spcAft>
+            </a:pPr>
+            <a:r>
+              <a:rPr sz="1100" b="1" i="0" spc="240">
+                <a:solidFill>
+                  <a:srgbClr val="FF3C00"/>
+                </a:solidFill>
+                <a:latin typeface="Arial"/>
+              </a:rPr>
+              <a:t xml:space="preserve">AUSFÜHRUNGSMODELL</a:t>
+            </a:r>
+          </a:p>
+        </p:txBody>
+      </p:sp>
+      <p:sp>
+        <p:nvSpPr>
+          <p:cNvPr id="3" name="TextBox"/>
+          <p:cNvSpPr txBox="1"/>
+          <p:nvPr/>
+        </p:nvSpPr>
+        <p:spPr>
+          <a:xfrm>
+            <a:off x="502920" y="667512"/>
+            <a:ext cx="11155680" cy="566928"/>
+          </a:xfrm>
+          <a:prstGeom prst="rect">
+            <a:avLst/>
+          </a:prstGeom>
+          <a:noFill/>
+        </p:spPr>
+        <p:txBody>
+          <a:bodyPr wrap="square" lIns="0" rIns="0" tIns="0" bIns="0" anchor="t">
+            <a:spAutoFit/>
+          </a:bodyPr>
+          <a:lstStyle/>
+          <a:p>
+            <a:pPr algn="l">
+              <a:lnSpc>
+                <a:spcPct val="102000"/>
+              </a:lnSpc>
+              <a:spcAft>
+                <a:spcPts val="0"/>
+              </a:spcAft>
+            </a:pPr>
+            <a:r>
+              <a:rPr sz="3000" b="1" i="0">
+                <a:solidFill>
+                  <a:srgbClr val="141414"/>
+                </a:solidFill>
+                <a:latin typeface="Arial"/>
+              </a:rPr>
+              <a:t xml:space="preserve">Wellen statt Warteschlange</a:t>
+            </a:r>
+          </a:p>
+        </p:txBody>
+      </p:sp>
+      <p:sp>
+        <p:nvSpPr>
+          <p:cNvPr id="4" name="Rule"/>
+          <p:cNvSpPr/>
+          <p:nvPr/>
+        </p:nvSpPr>
+        <p:spPr>
+          <a:xfrm>
+            <a:off x="502920" y="1216152"/>
+            <a:ext cx="1051560" cy="45720"/>
+          </a:xfrm>
+          <a:prstGeom prst="rect">
+            <a:avLst/>
+          </a:prstGeom>
+          <a:solidFill>
+            <a:srgbClr val="FF3C00"/>
+          </a:solidFill>
+          <a:ln>
+            <a:noFill/>
+          </a:ln>
+          <a:effectLst/>
+        </p:spPr>
+        <p:txBody>
+          <a:bodyPr rtlCol="0" anchor="ctr" wrap="square" lIns="0" rIns="0" tIns="0" bIns="0"/>
+          <a:lstStyle/>
+          <a:p>
+            <a:pPr algn="ctr"/>
+          </a:p>
+        </p:txBody>
+      </p:sp>
+      <p:sp>
+        <p:nvSpPr>
+          <p:cNvPr id="5" name="TextBox"/>
+          <p:cNvSpPr txBox="1"/>
+          <p:nvPr/>
+        </p:nvSpPr>
+        <p:spPr>
+          <a:xfrm>
+            <a:off x="502920" y="1481328"/>
+            <a:ext cx="10600000" cy="560000"/>
+          </a:xfrm>
+          <a:prstGeom prst="rect">
+            <a:avLst/>
+          </a:prstGeom>
+          <a:noFill/>
+        </p:spPr>
+        <p:txBody>
+          <a:bodyPr wrap="square" lIns="0" rIns="0" tIns="0" bIns="0" anchor="t">
+            <a:spAutoFit/>
+          </a:bodyPr>
+          <a:lstStyle/>
+          <a:p>
+            <a:pPr algn="l">
+              <a:lnSpc>
+                <a:spcPct val="130000"/>
+              </a:lnSpc>
+              <a:spcAft>
+                <a:spcPts val="0"/>
+              </a:spcAft>
+            </a:pPr>
+            <a:r>
+              <a:rPr sz="1200" b="0" i="0">
+                <a:solidFill>
+                  <a:srgbClr val="5C5C5C"/>
+                </a:solidFill>
+                <a:latin typeface="Arial"/>
+              </a:rPr>
+              <a:t xml:space="preserve">V4 führt Pläne nicht Task für Task aus, sondern in Wellen dateidisjunkter Arbeit. Innerhalb einer Welle laufen die Implementer gleichzeitig — die Wellen selbst strikt nacheinander.</a:t>
+            </a:r>
+          </a:p>
+        </p:txBody>
+      </p:sp>
+      <p:sp>
+        <p:nvSpPr>
+          <p:cNvPr id="6" name="Num"/>
+          <p:cNvSpPr/>
+          <p:nvPr/>
+        </p:nvSpPr>
+        <p:spPr>
+          <a:xfrm>
+            <a:off x="502920" y="2450000"/>
+            <a:ext cx="380000" cy="380000"/>
+          </a:xfrm>
+          <a:prstGeom prst="rect">
+            <a:avLst/>
+          </a:prstGeom>
+          <a:solidFill>
+            <a:srgbClr val="FF3C00"/>
+          </a:solidFill>
+          <a:ln>
+            <a:noFill/>
+          </a:ln>
+          <a:effectLst/>
+        </p:spPr>
+        <p:txBody>
+          <a:bodyPr rtlCol="0" anchor="ctr" wrap="square" lIns="0" rIns="0" tIns="0" bIns="0"/>
+          <a:lstStyle/>
+          <a:p>
+            <a:pPr algn="ctr"/>
+          </a:p>
+        </p:txBody>
+      </p:sp>
+      <p:sp>
+        <p:nvSpPr>
+          <p:cNvPr id="7" name="TextBox"/>
+          <p:cNvSpPr txBox="1"/>
+          <p:nvPr/>
+        </p:nvSpPr>
+        <p:spPr>
+          <a:xfrm>
+            <a:off x="502920" y="2450000"/>
+            <a:ext cx="380000" cy="380000"/>
+          </a:xfrm>
+          <a:prstGeom prst="rect">
+            <a:avLst/>
+          </a:prstGeom>
+          <a:noFill/>
+        </p:spPr>
+        <p:txBody>
+          <a:bodyPr wrap="square" lIns="0" rIns="0" tIns="0" bIns="0" anchor="ctr"/>
+          <a:lstStyle/>
+          <a:p>
+            <a:pPr algn="ctr">
+              <a:spcAft>
+                <a:spcPts val="0"/>
+              </a:spcAft>
+            </a:pPr>
+            <a:r>
+              <a:rPr sz="1400" b="1" i="0">
+                <a:solidFill>
+                  <a:srgbClr val="FFFFFF"/>
+                </a:solidFill>
+                <a:latin typeface="Arial"/>
+              </a:rPr>
+              <a:t xml:space="preserve">1</a:t>
+            </a:r>
+          </a:p>
+        </p:txBody>
+      </p:sp>
+      <p:sp>
+        <p:nvSpPr>
+          <p:cNvPr id="8" name="TextBox"/>
+          <p:cNvSpPr txBox="1"/>
+          <p:nvPr/>
+        </p:nvSpPr>
+        <p:spPr>
+          <a:xfrm>
+            <a:off x="1022920" y="2430000"/>
+            <a:ext cx="5250000" cy="820000"/>
+          </a:xfrm>
+          <a:prstGeom prst="rect">
+            <a:avLst/>
+          </a:prstGeom>
+          <a:noFill/>
+        </p:spPr>
+        <p:txBody>
+          <a:bodyPr wrap="square" lIns="0" rIns="0" tIns="0" bIns="0" anchor="t">
+            <a:spAutoFit/>
+          </a:bodyPr>
+          <a:lstStyle/>
+          <a:p>
+            <a:pPr algn="l">
+              <a:lnSpc>
+                <a:spcPct val="120000"/>
+              </a:lnSpc>
+              <a:spcAft>
+                <a:spcPts val="0"/>
+              </a:spcAft>
+            </a:pPr>
+            <a:r>
+              <a:rPr sz="1250" b="1" i="0">
+                <a:solidFill>
+                  <a:srgbClr val="141414"/>
+                </a:solidFill>
+                <a:latin typeface="Arial"/>
+              </a:rPr>
+              <a:t xml:space="preserve">Dateidisjunkt, maximal fünf</a:t>
+            </a:r>
+          </a:p>
+          <a:p>
+            <a:pPr algn="l">
+              <a:lnSpc>
+                <a:spcPct val="120000"/>
+              </a:lnSpc>
+              <a:spcAft>
+                <a:spcPts val="0"/>
+              </a:spcAft>
+            </a:pPr>
+            <a:r>
+              <a:rPr sz="1050" b="0" i="0">
+                <a:solidFill>
+                  <a:srgbClr val="5C5C5C"/>
+                </a:solidFill>
+                <a:latin typeface="Arial"/>
+              </a:rPr>
+              <a:t xml:space="preserve">Zwei Tasks teilen eine Welle nur, wenn sich ihre File(s) und allowedAdjacentEdits nicht überschneiden. Wellen aus einem einzigen Task sind normal, kein Versäumnis.</a:t>
+            </a:r>
+          </a:p>
+        </p:txBody>
+      </p:sp>
+      <p:sp>
+        <p:nvSpPr>
+          <p:cNvPr id="9" name="Num"/>
+          <p:cNvSpPr/>
+          <p:nvPr/>
+        </p:nvSpPr>
+        <p:spPr>
+          <a:xfrm>
+            <a:off x="502920" y="3400000"/>
+            <a:ext cx="380000" cy="380000"/>
+          </a:xfrm>
+          <a:prstGeom prst="rect">
+            <a:avLst/>
+          </a:prstGeom>
+          <a:solidFill>
+            <a:srgbClr val="FF3C00"/>
+          </a:solidFill>
+          <a:ln>
+            <a:noFill/>
+          </a:ln>
+          <a:effectLst/>
+        </p:spPr>
+        <p:txBody>
+          <a:bodyPr rtlCol="0" anchor="ctr" wrap="square" lIns="0" rIns="0" tIns="0" bIns="0"/>
+          <a:lstStyle/>
+          <a:p>
+            <a:pPr algn="ctr"/>
+          </a:p>
+        </p:txBody>
+      </p:sp>
+      <p:sp>
+        <p:nvSpPr>
+          <p:cNvPr id="10" name="TextBox"/>
+          <p:cNvSpPr txBox="1"/>
+          <p:nvPr/>
+        </p:nvSpPr>
+        <p:spPr>
+          <a:xfrm>
+            <a:off x="502920" y="3400000"/>
+            <a:ext cx="380000" cy="380000"/>
+          </a:xfrm>
+          <a:prstGeom prst="rect">
+            <a:avLst/>
+          </a:prstGeom>
+          <a:noFill/>
+        </p:spPr>
+        <p:txBody>
+          <a:bodyPr wrap="square" lIns="0" rIns="0" tIns="0" bIns="0" anchor="ctr"/>
+          <a:lstStyle/>
+          <a:p>
+            <a:pPr algn="ctr">
+              <a:spcAft>
+                <a:spcPts val="0"/>
+              </a:spcAft>
+            </a:pPr>
+            <a:r>
+              <a:rPr sz="1400" b="1" i="0">
+                <a:solidFill>
+                  <a:srgbClr val="FFFFFF"/>
+                </a:solidFill>
+                <a:latin typeface="Arial"/>
+              </a:rPr>
+              <a:t xml:space="preserve">2</a:t>
+            </a:r>
+          </a:p>
+        </p:txBody>
+      </p:sp>
+      <p:sp>
+        <p:nvSpPr>
+          <p:cNvPr id="11" name="TextBox"/>
+          <p:cNvSpPr txBox="1"/>
+          <p:nvPr/>
+        </p:nvSpPr>
+        <p:spPr>
+          <a:xfrm>
+            <a:off x="1022920" y="3380000"/>
+            <a:ext cx="5250000" cy="820000"/>
+          </a:xfrm>
+          <a:prstGeom prst="rect">
+            <a:avLst/>
+          </a:prstGeom>
+          <a:noFill/>
+        </p:spPr>
+        <p:txBody>
+          <a:bodyPr wrap="square" lIns="0" rIns="0" tIns="0" bIns="0" anchor="t">
+            <a:spAutoFit/>
+          </a:bodyPr>
+          <a:lstStyle/>
+          <a:p>
+            <a:pPr algn="l">
+              <a:lnSpc>
+                <a:spcPct val="120000"/>
+              </a:lnSpc>
+              <a:spcAft>
+                <a:spcPts val="0"/>
+              </a:spcAft>
+            </a:pPr>
+            <a:r>
+              <a:rPr sz="1250" b="1" i="0">
+                <a:solidFill>
+                  <a:srgbClr val="141414"/>
+                </a:solidFill>
+                <a:latin typeface="Arial"/>
+              </a:rPr>
+              <a:t xml:space="preserve">Der Orchestrator committet, nicht der Subagent</a:t>
+            </a:r>
+          </a:p>
+          <a:p>
+            <a:pPr algn="l">
+              <a:lnSpc>
+                <a:spcPct val="120000"/>
+              </a:lnSpc>
+              <a:spcAft>
+                <a:spcPts val="0"/>
+              </a:spcAft>
+            </a:pPr>
+            <a:r>
+              <a:rPr sz="1050" b="0" i="0">
+                <a:solidFill>
+                  <a:srgbClr val="5C5C5C"/>
+                </a:solidFill>
+                <a:latin typeface="Arial"/>
+              </a:rPr>
+              <a:t xml:space="preserve">Parallele git-Aufrufe würden sich verschränken. Implementer schreiben nur Dateien — jeder Commit und jedes STATE-Update kommt vom Orchestrator.</a:t>
+            </a:r>
+          </a:p>
+        </p:txBody>
+      </p:sp>
+      <p:sp>
+        <p:nvSpPr>
+          <p:cNvPr id="12" name="Num"/>
+          <p:cNvSpPr/>
+          <p:nvPr/>
+        </p:nvSpPr>
+        <p:spPr>
+          <a:xfrm>
+            <a:off x="502920" y="4350000"/>
+            <a:ext cx="380000" cy="380000"/>
+          </a:xfrm>
+          <a:prstGeom prst="rect">
+            <a:avLst/>
+          </a:prstGeom>
+          <a:solidFill>
+            <a:srgbClr val="FF3C00"/>
+          </a:solidFill>
+          <a:ln>
+            <a:noFill/>
+          </a:ln>
+          <a:effectLst/>
+        </p:spPr>
+        <p:txBody>
+          <a:bodyPr rtlCol="0" anchor="ctr" wrap="square" lIns="0" rIns="0" tIns="0" bIns="0"/>
+          <a:lstStyle/>
+          <a:p>
+            <a:pPr algn="ctr"/>
+          </a:p>
+        </p:txBody>
+      </p:sp>
+      <p:sp>
+        <p:nvSpPr>
+          <p:cNvPr id="13" name="TextBox"/>
+          <p:cNvSpPr txBox="1"/>
+          <p:nvPr/>
+        </p:nvSpPr>
+        <p:spPr>
+          <a:xfrm>
+            <a:off x="502920" y="4350000"/>
+            <a:ext cx="380000" cy="380000"/>
+          </a:xfrm>
+          <a:prstGeom prst="rect">
+            <a:avLst/>
+          </a:prstGeom>
+          <a:noFill/>
+        </p:spPr>
+        <p:txBody>
+          <a:bodyPr wrap="square" lIns="0" rIns="0" tIns="0" bIns="0" anchor="ctr"/>
+          <a:lstStyle/>
+          <a:p>
+            <a:pPr algn="ctr">
+              <a:spcAft>
+                <a:spcPts val="0"/>
+              </a:spcAft>
+            </a:pPr>
+            <a:r>
+              <a:rPr sz="1400" b="1" i="0">
+                <a:solidFill>
+                  <a:srgbClr val="FFFFFF"/>
+                </a:solidFill>
+                <a:latin typeface="Arial"/>
+              </a:rPr>
+              <a:t xml:space="preserve">3</a:t>
+            </a:r>
+          </a:p>
+        </p:txBody>
+      </p:sp>
+      <p:sp>
+        <p:nvSpPr>
+          <p:cNvPr id="14" name="TextBox"/>
+          <p:cNvSpPr txBox="1"/>
+          <p:nvPr/>
+        </p:nvSpPr>
+        <p:spPr>
+          <a:xfrm>
+            <a:off x="1022920" y="4330000"/>
+            <a:ext cx="5250000" cy="820000"/>
+          </a:xfrm>
+          <a:prstGeom prst="rect">
+            <a:avLst/>
+          </a:prstGeom>
+          <a:noFill/>
+        </p:spPr>
+        <p:txBody>
+          <a:bodyPr wrap="square" lIns="0" rIns="0" tIns="0" bIns="0" anchor="t">
+            <a:spAutoFit/>
+          </a:bodyPr>
+          <a:lstStyle/>
+          <a:p>
+            <a:pPr algn="l">
+              <a:lnSpc>
+                <a:spcPct val="120000"/>
+              </a:lnSpc>
+              <a:spcAft>
+                <a:spcPts val="0"/>
+              </a:spcAft>
+            </a:pPr>
+            <a:r>
+              <a:rPr sz="1250" b="1" i="0">
+                <a:solidFill>
+                  <a:srgbClr val="141414"/>
+                </a:solidFill>
+                <a:latin typeface="Arial"/>
+              </a:rPr>
+              <a:t xml:space="preserve">Zwei Preise, nicht einer</a:t>
+            </a:r>
+          </a:p>
+          <a:p>
+            <a:pPr algn="l">
+              <a:lnSpc>
+                <a:spcPct val="120000"/>
+              </a:lnSpc>
+              <a:spcAft>
+                <a:spcPts val="0"/>
+              </a:spcAft>
+            </a:pPr>
+            <a:r>
+              <a:rPr sz="1050" b="0" i="0">
+                <a:solidFill>
+                  <a:srgbClr val="5C5C5C"/>
+                </a:solidFill>
+                <a:latin typeface="Arial"/>
+              </a:rPr>
+              <a:t xml:space="preserve">Implementer laufen auf haiku, Reviewer auf dem Session-Modell. Nicht die Zahl der Subagenten treibt die Kosten, sondern wie viele Tasks einen Reviewer brauchen.</a:t>
+            </a:r>
+          </a:p>
+        </p:txBody>
+      </p:sp>
+      <p:sp>
+        <p:nvSpPr>
+          <p:cNvPr id="15" name="TextBox"/>
+          <p:cNvSpPr txBox="1"/>
+          <p:nvPr/>
+        </p:nvSpPr>
+        <p:spPr>
+          <a:xfrm>
+            <a:off x="6600000" y="2057400"/>
+            <a:ext cx="5088775" cy="240000"/>
+          </a:xfrm>
+          <a:prstGeom prst="rect">
+            <a:avLst/>
+          </a:prstGeom>
+          <a:noFill/>
+        </p:spPr>
+        <p:txBody>
+          <a:bodyPr wrap="square" lIns="0" rIns="0" tIns="0" bIns="0" anchor="t">
+            <a:spAutoFit/>
+          </a:bodyPr>
+          <a:lstStyle/>
+          <a:p>
+            <a:pPr algn="ctr">
+              <a:spcAft>
+                <a:spcPts val="0"/>
+              </a:spcAft>
+            </a:pPr>
+            <a:r>
+              <a:rPr sz="1000" b="1" i="0" spc="120">
+                <a:solidFill>
+                  <a:srgbClr val="8A8A8A"/>
+                </a:solidFill>
+                <a:latin typeface="Arial"/>
+              </a:rPr>
+              <a:t xml:space="preserve">DAS GATE JEDER WELLE</a:t>
+            </a:r>
+          </a:p>
+        </p:txBody>
+      </p:sp>
+      <p:sp>
+        <p:nvSpPr>
+          <p:cNvPr id="16" name="FBox"/>
+          <p:cNvSpPr/>
+          <p:nvPr/>
+        </p:nvSpPr>
+        <p:spPr>
+          <a:xfrm>
+            <a:off x="6600000" y="2470000"/>
+            <a:ext cx="5088775" cy="640000"/>
+          </a:xfrm>
+          <a:prstGeom prst="rect">
+            <a:avLst/>
+          </a:prstGeom>
+          <a:solidFill>
+            <a:srgbClr val="FAF9F9"/>
+          </a:solidFill>
+          <a:ln w="12700">
+            <a:solidFill>
+              <a:srgbClr val="E8E8E8"/>
+            </a:solidFill>
+          </a:ln>
+          <a:effectLst/>
+        </p:spPr>
+        <p:txBody>
+          <a:bodyPr rtlCol="0" anchor="ctr" wrap="square" lIns="0" rIns="0" tIns="0" bIns="0"/>
+          <a:lstStyle/>
+          <a:p>
+            <a:pPr algn="ctr"/>
+          </a:p>
+        </p:txBody>
+      </p:sp>
+      <p:sp>
+        <p:nvSpPr>
+          <p:cNvPr id="17" name="TextBox"/>
+          <p:cNvSpPr txBox="1"/>
+          <p:nvPr/>
+        </p:nvSpPr>
+        <p:spPr>
+          <a:xfrm>
+            <a:off x="6600000" y="2470000"/>
+            <a:ext cx="5088775" cy="640000"/>
+          </a:xfrm>
+          <a:prstGeom prst="rect">
+            <a:avLst/>
+          </a:prstGeom>
+          <a:noFill/>
+        </p:spPr>
+        <p:txBody>
+          <a:bodyPr wrap="square" lIns="0" rIns="0" tIns="0" bIns="0" anchor="ctr"/>
+          <a:lstStyle/>
+          <a:p>
+            <a:pPr algn="ctr">
+              <a:lnSpc>
+                <a:spcPct val="115000"/>
+              </a:lnSpc>
+              <a:spcAft>
+                <a:spcPts val="0"/>
+              </a:spcAft>
+            </a:pPr>
+            <a:r>
+              <a:rPr sz="1250" b="1" i="0" spc="80">
+                <a:solidFill>
+                  <a:srgbClr val="141414"/>
+                </a:solidFill>
+                <a:latin typeface="Arial"/>
+              </a:rPr>
+              <a:t xml:space="preserve">BOUNDARY CHECK</a:t>
+            </a:r>
+          </a:p>
+          <a:p>
+            <a:pPr algn="ctr">
+              <a:lnSpc>
+                <a:spcPct val="115000"/>
+              </a:lnSpc>
+              <a:spcAft>
+                <a:spcPts val="0"/>
+              </a:spcAft>
+            </a:pPr>
+            <a:r>
+              <a:rPr sz="1000" b="0" i="0">
+                <a:solidFill>
+                  <a:srgbClr val="5C5C5C"/>
+                </a:solidFill>
+                <a:latin typeface="Arial"/>
+              </a:rPr>
+              <a:t xml:space="preserve">Jeder berührte Pfad muss deklariert sein</a:t>
+            </a:r>
+          </a:p>
+        </p:txBody>
+      </p:sp>
+      <p:sp>
+        <p:nvSpPr>
+          <p:cNvPr id="18" name="TextBox"/>
+          <p:cNvSpPr txBox="1"/>
+          <p:nvPr/>
+        </p:nvSpPr>
+        <p:spPr>
+          <a:xfrm>
+            <a:off x="6600000" y="3170000"/>
+            <a:ext cx="5088775" cy="300000"/>
+          </a:xfrm>
+          <a:prstGeom prst="rect">
+            <a:avLst/>
+          </a:prstGeom>
+          <a:noFill/>
+        </p:spPr>
+        <p:txBody>
+          <a:bodyPr wrap="square" lIns="0" rIns="0" tIns="0" bIns="0" anchor="ctr"/>
+          <a:lstStyle/>
+          <a:p>
+            <a:pPr algn="ctr">
+              <a:spcAft>
+                <a:spcPts val="0"/>
+              </a:spcAft>
+            </a:pPr>
+            <a:r>
+              <a:rPr sz="1800" b="1" i="0">
+                <a:solidFill>
+                  <a:srgbClr val="FF3C00"/>
+                </a:solidFill>
+                <a:latin typeface="Arial"/>
+              </a:rPr>
+              <a:t xml:space="preserve">↓</a:t>
+            </a:r>
+          </a:p>
+        </p:txBody>
+      </p:sp>
+      <p:sp>
+        <p:nvSpPr>
+          <p:cNvPr id="19" name="FBox"/>
+          <p:cNvSpPr/>
+          <p:nvPr/>
+        </p:nvSpPr>
+        <p:spPr>
+          <a:xfrm>
+            <a:off x="6600000" y="3490000"/>
+            <a:ext cx="5088775" cy="640000"/>
+          </a:xfrm>
+          <a:prstGeom prst="rect">
+            <a:avLst/>
+          </a:prstGeom>
+          <a:solidFill>
+            <a:srgbClr val="FAF9F9"/>
+          </a:solidFill>
+          <a:ln w="12700">
+            <a:solidFill>
+              <a:srgbClr val="E8E8E8"/>
+            </a:solidFill>
+          </a:ln>
+          <a:effectLst/>
+        </p:spPr>
+        <p:txBody>
+          <a:bodyPr rtlCol="0" anchor="ctr" wrap="square" lIns="0" rIns="0" tIns="0" bIns="0"/>
+          <a:lstStyle/>
+          <a:p>
+            <a:pPr algn="ctr"/>
+          </a:p>
+        </p:txBody>
+      </p:sp>
+      <p:sp>
+        <p:nvSpPr>
+          <p:cNvPr id="20" name="TextBox"/>
+          <p:cNvSpPr txBox="1"/>
+          <p:nvPr/>
+        </p:nvSpPr>
+        <p:spPr>
+          <a:xfrm>
+            <a:off x="6600000" y="3490000"/>
+            <a:ext cx="5088775" cy="640000"/>
+          </a:xfrm>
+          <a:prstGeom prst="rect">
+            <a:avLst/>
+          </a:prstGeom>
+          <a:noFill/>
+        </p:spPr>
+        <p:txBody>
+          <a:bodyPr wrap="square" lIns="0" rIns="0" tIns="0" bIns="0" anchor="ctr"/>
+          <a:lstStyle/>
+          <a:p>
+            <a:pPr algn="ctr">
+              <a:lnSpc>
+                <a:spcPct val="115000"/>
+              </a:lnSpc>
+              <a:spcAft>
+                <a:spcPts val="0"/>
+              </a:spcAft>
+            </a:pPr>
+            <a:r>
+              <a:rPr sz="1250" b="1" i="0" spc="80">
+                <a:solidFill>
+                  <a:srgbClr val="141414"/>
+                </a:solidFill>
+                <a:latin typeface="Arial"/>
+              </a:rPr>
+              <a:t xml:space="preserve">FAST PATH</a:t>
+            </a:r>
+          </a:p>
+          <a:p>
+            <a:pPr algn="ctr">
+              <a:lnSpc>
+                <a:spcPct val="115000"/>
+              </a:lnSpc>
+              <a:spcAft>
+                <a:spcPts val="0"/>
+              </a:spcAft>
+            </a:pPr>
+            <a:r>
+              <a:rPr sz="1000" b="0" i="0">
+                <a:solidFill>
+                  <a:srgbClr val="5C5C5C"/>
+                </a:solidFill>
+                <a:latin typeface="Arial"/>
+              </a:rPr>
+              <a:t xml:space="preserve">Kleiner Diff, keine Logik, ein Verify:, das Inhalt prüft</a:t>
+            </a:r>
+          </a:p>
+        </p:txBody>
+      </p:sp>
+      <p:sp>
+        <p:nvSpPr>
+          <p:cNvPr id="21" name="TextBox"/>
+          <p:cNvSpPr txBox="1"/>
+          <p:nvPr/>
+        </p:nvSpPr>
+        <p:spPr>
+          <a:xfrm>
+            <a:off x="6600000" y="4190000"/>
+            <a:ext cx="5088775" cy="300000"/>
+          </a:xfrm>
+          <a:prstGeom prst="rect">
+            <a:avLst/>
+          </a:prstGeom>
+          <a:noFill/>
+        </p:spPr>
+        <p:txBody>
+          <a:bodyPr wrap="square" lIns="0" rIns="0" tIns="0" bIns="0" anchor="ctr"/>
+          <a:lstStyle/>
+          <a:p>
+            <a:pPr algn="ctr">
+              <a:spcAft>
+                <a:spcPts val="0"/>
+              </a:spcAft>
+            </a:pPr>
+            <a:r>
+              <a:rPr sz="1800" b="1" i="0">
+                <a:solidFill>
+                  <a:srgbClr val="FF3C00"/>
+                </a:solidFill>
+                <a:latin typeface="Arial"/>
+              </a:rPr>
+              <a:t xml:space="preserve">oder</a:t>
+            </a:r>
+          </a:p>
+        </p:txBody>
+      </p:sp>
+      <p:sp>
+        <p:nvSpPr>
+          <p:cNvPr id="22" name="FBox"/>
+          <p:cNvSpPr/>
+          <p:nvPr/>
+        </p:nvSpPr>
+        <p:spPr>
+          <a:xfrm>
+            <a:off x="6600000" y="4510000"/>
+            <a:ext cx="5088775" cy="640000"/>
+          </a:xfrm>
+          <a:prstGeom prst="rect">
+            <a:avLst/>
+          </a:prstGeom>
+          <a:solidFill>
+            <a:srgbClr val="FF3C00"/>
+          </a:solidFill>
+          <a:ln>
+            <a:noFill/>
+          </a:ln>
+          <a:effectLst/>
+        </p:spPr>
+        <p:txBody>
+          <a:bodyPr rtlCol="0" anchor="ctr" wrap="square" lIns="0" rIns="0" tIns="0" bIns="0"/>
+          <a:lstStyle/>
+          <a:p>
+            <a:pPr algn="ctr"/>
+          </a:p>
+        </p:txBody>
+      </p:sp>
+      <p:sp>
+        <p:nvSpPr>
+          <p:cNvPr id="23" name="TextBox"/>
+          <p:cNvSpPr txBox="1"/>
+          <p:nvPr/>
+        </p:nvSpPr>
+        <p:spPr>
+          <a:xfrm>
+            <a:off x="6600000" y="4510000"/>
+            <a:ext cx="5088775" cy="640000"/>
+          </a:xfrm>
+          <a:prstGeom prst="rect">
+            <a:avLst/>
+          </a:prstGeom>
+          <a:noFill/>
+        </p:spPr>
+        <p:txBody>
+          <a:bodyPr wrap="square" lIns="0" rIns="0" tIns="0" bIns="0" anchor="ctr"/>
+          <a:lstStyle/>
+          <a:p>
+            <a:pPr algn="ctr">
+              <a:lnSpc>
+                <a:spcPct val="115000"/>
+              </a:lnSpc>
+              <a:spcAft>
+                <a:spcPts val="0"/>
+              </a:spcAft>
+            </a:pPr>
+            <a:r>
+              <a:rPr sz="1250" b="1" i="0" spc="80">
+                <a:solidFill>
+                  <a:srgbClr val="FFFFFF"/>
+                </a:solidFill>
+                <a:latin typeface="Arial"/>
+              </a:rPr>
+              <a:t xml:space="preserve">REVIEWER  —  Spec und Qualität in einem Bericht</a:t>
+            </a:r>
+          </a:p>
+        </p:txBody>
+      </p:sp>
+      <p:sp>
+        <p:nvSpPr>
+          <p:cNvPr id="24" name="Banner"/>
+          <p:cNvSpPr/>
+          <p:nvPr/>
+        </p:nvSpPr>
+        <p:spPr>
+          <a:xfrm>
+            <a:off x="502920" y="5650992"/>
+            <a:ext cx="11183112" cy="566928"/>
+          </a:xfrm>
+          <a:prstGeom prst="rect">
+            <a:avLst/>
+          </a:prstGeom>
+          <a:solidFill>
+            <a:srgbClr val="141414"/>
+          </a:solidFill>
+          <a:ln>
+            <a:noFill/>
+          </a:ln>
+          <a:effectLst/>
+        </p:spPr>
+        <p:txBody>
+          <a:bodyPr rtlCol="0" anchor="ctr" wrap="square" lIns="0" rIns="0" tIns="0" bIns="0"/>
+          <a:lstStyle/>
+          <a:p>
+            <a:pPr algn="ctr"/>
+          </a:p>
+        </p:txBody>
+      </p:sp>
+      <p:sp>
+        <p:nvSpPr>
+          <p:cNvPr id="25" name="TextBox"/>
+          <p:cNvSpPr txBox="1"/>
+          <p:nvPr/>
+        </p:nvSpPr>
+        <p:spPr>
+          <a:xfrm>
+            <a:off x="502920" y="5650992"/>
+            <a:ext cx="11183112" cy="566928"/>
+          </a:xfrm>
+          <a:prstGeom prst="rect">
+            <a:avLst/>
+          </a:prstGeom>
+          <a:noFill/>
+        </p:spPr>
+        <p:txBody>
+          <a:bodyPr wrap="square" lIns="228600" rIns="0" tIns="0" bIns="0" anchor="ctr"/>
+          <a:lstStyle/>
+          <a:p>
+            <a:pPr algn="ctr">
+              <a:lnSpc>
+                <a:spcPct val="115000"/>
+              </a:lnSpc>
+              <a:spcAft>
+                <a:spcPts val="0"/>
+              </a:spcAft>
+            </a:pPr>
+            <a:r>
+              <a:rPr sz="1250" b="1" i="0">
+                <a:solidFill>
+                  <a:srgbClr val="FFFFFF"/>
+                </a:solidFill>
+                <a:latin typeface="Arial"/>
+              </a:rPr>
+              <a:t xml:space="preserve">Erst wenn die Welle sauber ist, wird committet — ein Commit pro logischer Änderung, jeder mit seinem eigenen STATE-Update.</a:t>
+            </a:r>
+          </a:p>
+        </p:txBody>
+      </p:sp>
+      <p:sp>
+        <p:nvSpPr>
+          <p:cNvPr id="26" name="TextBox"/>
+          <p:cNvSpPr txBox="1"/>
+          <p:nvPr/>
+        </p:nvSpPr>
+        <p:spPr>
+          <a:xfrm>
+            <a:off x="502920" y="6455664"/>
+            <a:ext cx="914400" cy="274320"/>
+          </a:xfrm>
+          <a:prstGeom prst="rect">
+            <a:avLst/>
+          </a:prstGeom>
+          <a:noFill/>
+        </p:spPr>
+        <p:txBody>
+          <a:bodyPr wrap="square" lIns="0" rIns="0" tIns="0" bIns="0" anchor="t">
+            <a:spAutoFit/>
+          </a:bodyPr>
+          <a:lstStyle/>
+          <a:p>
+            <a:pPr algn="l">
+              <a:spcAft>
+                <a:spcPts val="0"/>
+              </a:spcAft>
+            </a:pPr>
+            <a:r>
+              <a:rPr sz="1000" b="0" i="0">
+                <a:solidFill>
+                  <a:srgbClr val="8A8A8A"/>
+                </a:solidFill>
+                <a:latin typeface="Arial"/>
+              </a:rPr>
+              <a:t xml:space="preserve">15</a:t>
             </a:r>
           </a:p>
         </p:txBody>
@@ -17073,7 +19674,7 @@
                 </a:solidFill>
                 <a:latin typeface="Arial"/>
               </a:rPr>
-              <a:t>Jedes Artefakt referenziert seinen Vorgänger — ein lückenloses Audit-Log.</a:t>
+              <a:t>Jedes Artefakt nennt seinen Vorgänger im Frontmatter — ein lückenloses Audit-Log. Daneben liegen features/, prototypes/ und qa/.</a:t>
             </a:r>
           </a:p>
           <a:p>
@@ -17334,7 +19935,7 @@
                 </a:solidFill>
                 <a:latin typeface="Arial"/>
               </a:rPr>
-              <a:t>DIE VOLLSTÄNDIGE ARTEFAKT-KETTE</a:t>
+              <a:t>DIE VOLLSTÄNDIGE ARTEFAKT-KETTE  (GREENFIELD)</a:t>
             </a:r>
           </a:p>
         </p:txBody>
@@ -18060,7 +20661,7 @@
                 </a:solidFill>
                 <a:latin typeface="Arial"/>
               </a:rPr>
-              <a:t>Jede Zeile Code ist bis zur ursprünglichen Vision rückverfolgbar.</a:t>
+              <a:t>Brownfield startet bei features/ und geht direkt nach facts/ — jede Zeile Code bleibt bis zu ihrem ersten Artefakt rückverfolgbar.</a:t>
             </a:r>
           </a:p>
         </p:txBody>
@@ -19133,7 +21734,7 @@
                 </a:solidFill>
                 <a:latin typeface="Arial"/>
               </a:rPr>
-              <a:t>Hinweis zur Kette:  </a:t>
+              <a:t xml:space="preserve">Zwei Regeln:  </a:t>
             </a:r>
             <a:r>
               <a:rPr sz="1150" b="0" i="0">
@@ -19142,7 +21743,7 @@
                 </a:solidFill>
                 <a:latin typeface="Arial"/>
               </a:rPr>
-              <a:t>Jeder Einstiegspunkt bestimmt, an welchem Glied der Kette die Arbeit beginnt. Die Architekten erzeugen das erste Artefakt ohne Eingabe — alle nachgelagerten Skills lesen dieses Artefakt als Startpunkt ihrer Transformation.</a:t>
+              <a:t>Brownfield überspringt /epic-planner — Epic-Zerlegung schneidet eine ganze Spezifikation in mehrere parallele Ströme, und ein Feature ist ein Strom. Braucht ein Feature diese Zerlegung doch, ist es kein Feature, sondern ein Subsystem: eigene Wertaussage UND mehrere Ströme, beides zugleich. Es geht dann über /mission-architect, dessen Mission das Host-System als Constraint festhält.</a:t>
             </a:r>
           </a:p>
         </p:txBody>
@@ -19181,7 +21782,7 @@
                 </a:solidFill>
                 <a:latin typeface="Arial"/>
               </a:rPr>
-              <a:t>7</a:t>
+              <a:t>8</a:t>
             </a:r>
           </a:p>
         </p:txBody>
@@ -19210,6 +21811,88 @@
           </a:prstGeom>
         </p:spPr>
       </p:pic>
+      <p:sp>
+        <p:nvSpPr>
+          <p:cNvPr id="27" name="Row3Add"/>
+          <p:cNvSpPr txBox="1"/>
+          <p:nvPr/>
+        </p:nvSpPr>
+        <p:spPr>
+          <a:xfrm>
+            <a:off x="7699247" y="3739896"/>
+            <a:ext cx="384048" cy="640080"/>
+          </a:xfrm>
+          <a:prstGeom prst="rect">
+            <a:avLst/>
+          </a:prstGeom>
+          <a:noFill/>
+        </p:spPr>
+        <p:txBody>
+          <a:bodyPr wrap="square" lIns="0" rIns="0" tIns="0" bIns="0" anchor="ctr">
+            <a:spAutoFit/>
+          </a:bodyPr>
+          <a:lstStyle/>
+          <a:p>
+            <a:pPr algn="ctr">
+              <a:spcAft>
+                <a:spcPts val="0"/>
+              </a:spcAft>
+            </a:pPr>
+            <a:r>
+              <a:rPr sz="1800" b="1" i="0">
+                <a:solidFill>
+                  <a:srgbClr val="FF3C00"/>
+                </a:solidFill>
+                <a:latin typeface="Arial"/>
+              </a:rPr>
+              <a:t>→</a:t>
+            </a:r>
+          </a:p>
+        </p:txBody>
+      </p:sp>
+      <p:sp>
+        <p:nvSpPr>
+          <p:cNvPr id="28" name="Row3Add"/>
+          <p:cNvSpPr/>
+          <p:nvPr/>
+        </p:nvSpPr>
+        <p:spPr>
+          <a:xfrm>
+            <a:off x="8119871" y="3739896"/>
+            <a:ext cx="2606040" cy="640080"/>
+          </a:xfrm>
+          <a:prstGeom prst="rect">
+            <a:avLst/>
+          </a:prstGeom>
+          <a:solidFill>
+            <a:srgbClr val="141414"/>
+          </a:solidFill>
+          <a:ln>
+            <a:noFill/>
+          </a:ln>
+          <a:effectLst/>
+        </p:spPr>
+        <p:txBody>
+          <a:bodyPr rtlCol="0" anchor="ctr" wrap="square" lIns="0" rIns="0" tIns="0" bIns="0"/>
+          <a:lstStyle/>
+          <a:p>
+            <a:pPr algn="ctr">
+              <a:spcAft>
+                <a:spcPts val="0"/>
+              </a:spcAft>
+            </a:pPr>
+            <a:r>
+              <a:rPr sz="1200" b="1" i="0">
+                <a:solidFill>
+                  <a:srgbClr val="FFFFFF"/>
+                </a:solidFill>
+                <a:latin typeface="Arial"/>
+              </a:rPr>
+              <a:t>Small-Fix Pipeline</a:t>
+            </a:r>
+          </a:p>
+        </p:txBody>
+      </p:sp>
     </p:spTree>
   </p:cSld>
   <p:clrMapOvr>
@@ -20119,7 +22802,7 @@
                 </a:solidFill>
                 <a:latin typeface="Arial"/>
               </a:rPr>
-              <a:t>Übernimmt bestehende Architekturbeschränkungen aus der Codebasis.</a:t>
+              <a:t>Übernimmt bestehende Architekturbeschränkungen. Ein Feature, das mehrere parallele Ströme braucht, geht als Subsystem an /mission-architect.</a:t>
             </a:r>
           </a:p>
         </p:txBody>
@@ -20404,7 +23087,7 @@
                 </a:solidFill>
                 <a:latin typeface="Courier New"/>
               </a:rPr>
-              <a:t>specs/</a:t>
+              <a:t>specs/  ·  facts/</a:t>
             </a:r>
           </a:p>
         </p:txBody>
@@ -20443,7 +23126,7 @@
                 </a:solidFill>
                 <a:latin typeface="Arial"/>
               </a:rPr>
-              <a:t>Nächste Phase</a:t>
+              <a:t>Greenfield · Brownfield</a:t>
             </a:r>
           </a:p>
         </p:txBody>
@@ -20482,7 +23165,7 @@
                 </a:solidFill>
                 <a:latin typeface="Arial"/>
               </a:rPr>
-              <a:t>8</a:t>
+              <a:t>9</a:t>
             </a:r>
           </a:p>
         </p:txBody>
@@ -20511,6 +23194,36 @@
           </a:prstGeom>
         </p:spPr>
       </p:pic>
+      <p:sp>
+        <p:nvSpPr>
+          <p:cNvPr id="33" name="AccentR"/>
+          <p:cNvSpPr/>
+          <p:nvPr/>
+        </p:nvSpPr>
+        <p:spPr>
+          <a:xfrm>
+            <a:off x="6277356" y="1965960"/>
+            <a:ext cx="5408676" cy="50292"/>
+          </a:xfrm>
+          <a:prstGeom prst="rect">
+            <a:avLst/>
+          </a:prstGeom>
+          <a:solidFill>
+            <a:srgbClr val="FF3C00"/>
+          </a:solidFill>
+          <a:ln>
+            <a:noFill/>
+          </a:ln>
+          <a:effectLst/>
+        </p:spPr>
+        <p:txBody>
+          <a:bodyPr rtlCol="0" anchor="ctr" wrap="square" lIns="0" rIns="0" tIns="0" bIns="0"/>
+          <a:lstStyle/>
+          <a:p>
+            <a:pPr algn="ctr"/>
+          </a:p>
+        </p:txBody>
+      </p:sp>
     </p:spTree>
   </p:cSld>
   <p:clrMapOvr>
@@ -21450,7 +24163,7 @@
                 </a:solidFill>
                 <a:latin typeface="Arial"/>
               </a:rPr>
-              <a:t>Entscheidungen über spezifische Stacks werden bewusst auf spätere Phasen verschoben. Das Spec-Artefakt beschreibt, </a:t>
+              <a:t xml:space="preserve">Entscheidungen über spezifische Stacks werden bewusst auf spätere Phasen verschoben. Geerbte Constraints des Host-Systems hält die Spec in einem eigenen Abschnitt fest. Das Spec-Artefakt beschreibt, </a:t>
             </a:r>
             <a:r>
               <a:rPr sz="1150" b="1" i="1">
@@ -21525,7 +24238,7 @@
                 </a:solidFill>
                 <a:latin typeface="Arial"/>
               </a:rPr>
-              <a:t>9</a:t>
+              <a:t>10</a:t>
             </a:r>
           </a:p>
         </p:txBody>
@@ -22325,7 +25038,7 @@
                 </a:solidFill>
                 <a:latin typeface="Arial"/>
               </a:rPr>
-              <a:t>Zwingende Fragen für den fact-finder — unbeantwortet bleiben sie eine offene Gefahr.</a:t>
+              <a:t>Zwingende Fragen für den fact-finder — samt geerbten Constraints, die über die Epic-Grenze weitergetragen werden.</a:t>
             </a:r>
           </a:p>
         </p:txBody>
@@ -22364,7 +25077,7 @@
                 </a:solidFill>
                 <a:latin typeface="Arial"/>
               </a:rPr>
-              <a:t>10</a:t>
+              <a:t>11</a:t>
             </a:r>
           </a:p>
         </p:txBody>
@@ -22393,6 +25106,45 @@
           </a:prstGeom>
         </p:spPr>
       </p:pic>
+      <p:sp>
+        <p:nvSpPr>
+          <p:cNvPr id="21" name="EpicNote"/>
+          <p:cNvSpPr txBox="1"/>
+          <p:nvPr/>
+        </p:nvSpPr>
+        <p:spPr>
+          <a:xfrm>
+            <a:off x="502920" y="5820000"/>
+            <a:ext cx="11183112" cy="292608"/>
+          </a:xfrm>
+          <a:prstGeom prst="rect">
+            <a:avLst/>
+          </a:prstGeom>
+          <a:noFill/>
+        </p:spPr>
+        <p:txBody>
+          <a:bodyPr wrap="square" lIns="0" rIns="0" tIns="0" bIns="0">
+            <a:spAutoFit/>
+          </a:bodyPr>
+          <a:lstStyle/>
+          <a:p>
+            <a:pPr algn="l">
+              <a:spcAft>
+                <a:spcPts val="0"/>
+              </a:spcAft>
+            </a:pPr>
+            <a:r>
+              <a:rPr sz="1050" b="0" i="0">
+                <a:solidFill>
+                  <a:srgbClr val="5C5C5C"/>
+                </a:solidFill>
+                <a:latin typeface="Arial"/>
+              </a:rPr>
+              <a:t>Der Dateiname trägt die ID — YYYY-MM-DD-EPIC-NNN-Topic.md, passend zum Frontmatter-Feld epic-id:. Jedes Epic führt außerdem einen Verification Plan (For Implementor), den /implement beim Abschluss des zugehörigen Plans abarbeitet.</a:t>
+            </a:r>
+          </a:p>
+        </p:txBody>
+      </p:sp>
     </p:spTree>
   </p:cSld>
   <p:clrMapOvr>
@@ -22599,7 +25351,7 @@
                 </a:solidFill>
                 <a:latin typeface="Courier New"/>
               </a:rPr>
-              <a:t>thoughts/shared/epics/</a:t>
+              <a:t>epics/ · features/ · freie Frage</a:t>
             </a:r>
           </a:p>
         </p:txBody>
@@ -22720,7 +25472,7 @@
                 </a:solidFill>
                 <a:latin typeface="Courier New"/>
               </a:rPr>
-              <a:t>thoughts/shared/facts/</a:t>
+              <a:t>thoughts/shared/facts/  ·  qa/</a:t>
             </a:r>
           </a:p>
         </p:txBody>
@@ -22918,7 +25670,7 @@
                 </a:solidFill>
                 <a:latin typeface="Arial"/>
               </a:rPr>
-              <a:t>Verifizierte Daten speisen den Planner.</a:t>
+              <a:t>Verifizierte Fakten und upstream-artifact: speisen den Planner.</a:t>
             </a:r>
           </a:p>
           <a:p>
@@ -23087,7 +25839,7 @@
                 </a:solidFill>
                 <a:latin typeface="Arial"/>
               </a:rPr>
-              <a:t>11</a:t>
+              <a:t>12</a:t>
             </a:r>
           </a:p>
         </p:txBody>
